--- a/exports/pptx/lessons/middle-module-04-doshas/day-08-project-session-1.pptx
+++ b/exports/pptx/lessons/middle-module-04-doshas/day-08-project-session-1.pptx
@@ -17,9 +17,13 @@
     <p:sldId id="265" r:id="rId11"/>
     <p:sldId id="266" r:id="rId12"/>
     <p:sldId id="267" r:id="rId13"/>
+    <p:sldId id="268" r:id="rId14"/>
+    <p:sldId id="269" r:id="rId15"/>
+    <p:sldId id="270" r:id="rId16"/>
+    <p:sldId id="271" r:id="rId17"/>
   </p:sldIdLst>
   <p:notesMasterIdLst>
-    <p:notesMasterId r:id="rId14"/>
+    <p:notesMasterId r:id="rId18"/>
   </p:notesMasterIdLst>
   <p:sldSz cx="9144000" cy="5143500"/>
   <p:notesSz cx="5143500" cy="9144000"/>
@@ -801,6 +805,358 @@
             <a:fld id="{F7021451-1387-4CA6-816F-3879F97B5CBC}" type="slidenum">
               <a:rPr lang="en-US"/>
               <a:t>12</a:t>
+            </a:fld>
+            <a:endParaRPr lang="en-US"/>
+          </a:p>
+        </p:txBody>
+      </p:sp>
+    </p:spTree>
+    <p:extLst>
+      <p:ext uri="{BB962C8B-B14F-4D97-AF65-F5344CB8AC3E}">
+        <p14:creationId xmlns:p14="http://schemas.microsoft.com/office/powerpoint/2010/main" val="1024086991"/>
+      </p:ext>
+    </p:extLst>
+  </p:cSld>
+  <p:clrMapOvr>
+    <a:masterClrMapping/>
+  </p:clrMapOvr>
+</p:notes>
+</file>
+
+<file path=ppt/notesSlides/notesSlide13.xml><?xml version="1.0" encoding="utf-8"?>
+<p:notes xmlns:a="http://schemas.openxmlformats.org/drawingml/2006/main" xmlns:r="http://schemas.openxmlformats.org/officeDocument/2006/relationships" xmlns:p="http://schemas.openxmlformats.org/presentationml/2006/main">
+  <p:cSld>
+    <p:spTree>
+      <p:nvGrpSpPr>
+        <p:cNvPr id="1" name=""/>
+        <p:cNvGrpSpPr/>
+        <p:nvPr/>
+      </p:nvGrpSpPr>
+      <p:grpSpPr>
+        <a:xfrm>
+          <a:off x="0" y="0"/>
+          <a:ext cx="0" cy="0"/>
+          <a:chOff x="0" y="0"/>
+          <a:chExt cx="0" cy="0"/>
+        </a:xfrm>
+      </p:grpSpPr>
+      <p:sp>
+        <p:nvSpPr>
+          <p:cNvPr id="2" name="Slide Image Placeholder 1"/>
+          <p:cNvSpPr>
+            <a:spLocks noGrp="1" noRot="1" noChangeAspect="1"/>
+          </p:cNvSpPr>
+          <p:nvPr>
+            <p:ph type="sldImg"/>
+          </p:nvPr>
+        </p:nvSpPr>
+        <p:spPr/>
+      </p:sp>
+      <p:sp>
+        <p:nvSpPr>
+          <p:cNvPr id="3" name="Notes Placeholder 2"/>
+          <p:cNvSpPr>
+            <a:spLocks noGrp="1"/>
+          </p:cNvSpPr>
+          <p:nvPr>
+            <p:ph type="body" idx="1"/>
+          </p:nvPr>
+        </p:nvSpPr>
+        <p:spPr/>
+        <p:txBody>
+          <a:bodyPr/>
+          <a:lstStyle/>
+          <a:p>
+            <a:r>
+              <a:rPr lang="en-US" dirty="0"/>
+              <a:t/>
+            </a:r>
+            <a:endParaRPr lang="en-US" dirty="0"/>
+          </a:p>
+        </p:txBody>
+      </p:sp>
+      <p:sp>
+        <p:nvSpPr>
+          <p:cNvPr id="4" name="Slide Number Placeholder 3"/>
+          <p:cNvSpPr>
+            <a:spLocks noGrp="1"/>
+          </p:cNvSpPr>
+          <p:nvPr>
+            <p:ph type="sldNum" sz="quarter" idx="10"/>
+          </p:nvPr>
+        </p:nvSpPr>
+        <p:spPr/>
+        <p:txBody>
+          <a:bodyPr/>
+          <a:lstStyle/>
+          <a:p>
+            <a:fld id="{F7021451-1387-4CA6-816F-3879F97B5CBC}" type="slidenum">
+              <a:rPr lang="en-US"/>
+              <a:t>13</a:t>
+            </a:fld>
+            <a:endParaRPr lang="en-US"/>
+          </a:p>
+        </p:txBody>
+      </p:sp>
+    </p:spTree>
+    <p:extLst>
+      <p:ext uri="{BB962C8B-B14F-4D97-AF65-F5344CB8AC3E}">
+        <p14:creationId xmlns:p14="http://schemas.microsoft.com/office/powerpoint/2010/main" val="1024086991"/>
+      </p:ext>
+    </p:extLst>
+  </p:cSld>
+  <p:clrMapOvr>
+    <a:masterClrMapping/>
+  </p:clrMapOvr>
+</p:notes>
+</file>
+
+<file path=ppt/notesSlides/notesSlide14.xml><?xml version="1.0" encoding="utf-8"?>
+<p:notes xmlns:a="http://schemas.openxmlformats.org/drawingml/2006/main" xmlns:r="http://schemas.openxmlformats.org/officeDocument/2006/relationships" xmlns:p="http://schemas.openxmlformats.org/presentationml/2006/main">
+  <p:cSld>
+    <p:spTree>
+      <p:nvGrpSpPr>
+        <p:cNvPr id="1" name=""/>
+        <p:cNvGrpSpPr/>
+        <p:nvPr/>
+      </p:nvGrpSpPr>
+      <p:grpSpPr>
+        <a:xfrm>
+          <a:off x="0" y="0"/>
+          <a:ext cx="0" cy="0"/>
+          <a:chOff x="0" y="0"/>
+          <a:chExt cx="0" cy="0"/>
+        </a:xfrm>
+      </p:grpSpPr>
+      <p:sp>
+        <p:nvSpPr>
+          <p:cNvPr id="2" name="Slide Image Placeholder 1"/>
+          <p:cNvSpPr>
+            <a:spLocks noGrp="1" noRot="1" noChangeAspect="1"/>
+          </p:cNvSpPr>
+          <p:nvPr>
+            <p:ph type="sldImg"/>
+          </p:nvPr>
+        </p:nvSpPr>
+        <p:spPr/>
+      </p:sp>
+      <p:sp>
+        <p:nvSpPr>
+          <p:cNvPr id="3" name="Notes Placeholder 2"/>
+          <p:cNvSpPr>
+            <a:spLocks noGrp="1"/>
+          </p:cNvSpPr>
+          <p:nvPr>
+            <p:ph type="body" idx="1"/>
+          </p:nvPr>
+        </p:nvSpPr>
+        <p:spPr/>
+        <p:txBody>
+          <a:bodyPr/>
+          <a:lstStyle/>
+          <a:p>
+            <a:r>
+              <a:rPr lang="en-US" dirty="0"/>
+              <a:t/>
+            </a:r>
+            <a:endParaRPr lang="en-US" dirty="0"/>
+          </a:p>
+        </p:txBody>
+      </p:sp>
+      <p:sp>
+        <p:nvSpPr>
+          <p:cNvPr id="4" name="Slide Number Placeholder 3"/>
+          <p:cNvSpPr>
+            <a:spLocks noGrp="1"/>
+          </p:cNvSpPr>
+          <p:nvPr>
+            <p:ph type="sldNum" sz="quarter" idx="10"/>
+          </p:nvPr>
+        </p:nvSpPr>
+        <p:spPr/>
+        <p:txBody>
+          <a:bodyPr/>
+          <a:lstStyle/>
+          <a:p>
+            <a:fld id="{F7021451-1387-4CA6-816F-3879F97B5CBC}" type="slidenum">
+              <a:rPr lang="en-US"/>
+              <a:t>14</a:t>
+            </a:fld>
+            <a:endParaRPr lang="en-US"/>
+          </a:p>
+        </p:txBody>
+      </p:sp>
+    </p:spTree>
+    <p:extLst>
+      <p:ext uri="{BB962C8B-B14F-4D97-AF65-F5344CB8AC3E}">
+        <p14:creationId xmlns:p14="http://schemas.microsoft.com/office/powerpoint/2010/main" val="1024086991"/>
+      </p:ext>
+    </p:extLst>
+  </p:cSld>
+  <p:clrMapOvr>
+    <a:masterClrMapping/>
+  </p:clrMapOvr>
+</p:notes>
+</file>
+
+<file path=ppt/notesSlides/notesSlide15.xml><?xml version="1.0" encoding="utf-8"?>
+<p:notes xmlns:a="http://schemas.openxmlformats.org/drawingml/2006/main" xmlns:r="http://schemas.openxmlformats.org/officeDocument/2006/relationships" xmlns:p="http://schemas.openxmlformats.org/presentationml/2006/main">
+  <p:cSld>
+    <p:spTree>
+      <p:nvGrpSpPr>
+        <p:cNvPr id="1" name=""/>
+        <p:cNvGrpSpPr/>
+        <p:nvPr/>
+      </p:nvGrpSpPr>
+      <p:grpSpPr>
+        <a:xfrm>
+          <a:off x="0" y="0"/>
+          <a:ext cx="0" cy="0"/>
+          <a:chOff x="0" y="0"/>
+          <a:chExt cx="0" cy="0"/>
+        </a:xfrm>
+      </p:grpSpPr>
+      <p:sp>
+        <p:nvSpPr>
+          <p:cNvPr id="2" name="Slide Image Placeholder 1"/>
+          <p:cNvSpPr>
+            <a:spLocks noGrp="1" noRot="1" noChangeAspect="1"/>
+          </p:cNvSpPr>
+          <p:nvPr>
+            <p:ph type="sldImg"/>
+          </p:nvPr>
+        </p:nvSpPr>
+        <p:spPr/>
+      </p:sp>
+      <p:sp>
+        <p:nvSpPr>
+          <p:cNvPr id="3" name="Notes Placeholder 2"/>
+          <p:cNvSpPr>
+            <a:spLocks noGrp="1"/>
+          </p:cNvSpPr>
+          <p:nvPr>
+            <p:ph type="body" idx="1"/>
+          </p:nvPr>
+        </p:nvSpPr>
+        <p:spPr/>
+        <p:txBody>
+          <a:bodyPr/>
+          <a:lstStyle/>
+          <a:p>
+            <a:r>
+              <a:rPr lang="en-US" dirty="0"/>
+              <a:t/>
+            </a:r>
+            <a:endParaRPr lang="en-US" dirty="0"/>
+          </a:p>
+        </p:txBody>
+      </p:sp>
+      <p:sp>
+        <p:nvSpPr>
+          <p:cNvPr id="4" name="Slide Number Placeholder 3"/>
+          <p:cNvSpPr>
+            <a:spLocks noGrp="1"/>
+          </p:cNvSpPr>
+          <p:nvPr>
+            <p:ph type="sldNum" sz="quarter" idx="10"/>
+          </p:nvPr>
+        </p:nvSpPr>
+        <p:spPr/>
+        <p:txBody>
+          <a:bodyPr/>
+          <a:lstStyle/>
+          <a:p>
+            <a:fld id="{F7021451-1387-4CA6-816F-3879F97B5CBC}" type="slidenum">
+              <a:rPr lang="en-US"/>
+              <a:t>15</a:t>
+            </a:fld>
+            <a:endParaRPr lang="en-US"/>
+          </a:p>
+        </p:txBody>
+      </p:sp>
+    </p:spTree>
+    <p:extLst>
+      <p:ext uri="{BB962C8B-B14F-4D97-AF65-F5344CB8AC3E}">
+        <p14:creationId xmlns:p14="http://schemas.microsoft.com/office/powerpoint/2010/main" val="1024086991"/>
+      </p:ext>
+    </p:extLst>
+  </p:cSld>
+  <p:clrMapOvr>
+    <a:masterClrMapping/>
+  </p:clrMapOvr>
+</p:notes>
+</file>
+
+<file path=ppt/notesSlides/notesSlide16.xml><?xml version="1.0" encoding="utf-8"?>
+<p:notes xmlns:a="http://schemas.openxmlformats.org/drawingml/2006/main" xmlns:r="http://schemas.openxmlformats.org/officeDocument/2006/relationships" xmlns:p="http://schemas.openxmlformats.org/presentationml/2006/main">
+  <p:cSld>
+    <p:spTree>
+      <p:nvGrpSpPr>
+        <p:cNvPr id="1" name=""/>
+        <p:cNvGrpSpPr/>
+        <p:nvPr/>
+      </p:nvGrpSpPr>
+      <p:grpSpPr>
+        <a:xfrm>
+          <a:off x="0" y="0"/>
+          <a:ext cx="0" cy="0"/>
+          <a:chOff x="0" y="0"/>
+          <a:chExt cx="0" cy="0"/>
+        </a:xfrm>
+      </p:grpSpPr>
+      <p:sp>
+        <p:nvSpPr>
+          <p:cNvPr id="2" name="Slide Image Placeholder 1"/>
+          <p:cNvSpPr>
+            <a:spLocks noGrp="1" noRot="1" noChangeAspect="1"/>
+          </p:cNvSpPr>
+          <p:nvPr>
+            <p:ph type="sldImg"/>
+          </p:nvPr>
+        </p:nvSpPr>
+        <p:spPr/>
+      </p:sp>
+      <p:sp>
+        <p:nvSpPr>
+          <p:cNvPr id="3" name="Notes Placeholder 2"/>
+          <p:cNvSpPr>
+            <a:spLocks noGrp="1"/>
+          </p:cNvSpPr>
+          <p:nvPr>
+            <p:ph type="body" idx="1"/>
+          </p:nvPr>
+        </p:nvSpPr>
+        <p:spPr/>
+        <p:txBody>
+          <a:bodyPr/>
+          <a:lstStyle/>
+          <a:p>
+            <a:r>
+              <a:rPr lang="en-US" dirty="0"/>
+              <a:t/>
+            </a:r>
+            <a:endParaRPr lang="en-US" dirty="0"/>
+          </a:p>
+        </p:txBody>
+      </p:sp>
+      <p:sp>
+        <p:nvSpPr>
+          <p:cNvPr id="4" name="Slide Number Placeholder 3"/>
+          <p:cNvSpPr>
+            <a:spLocks noGrp="1"/>
+          </p:cNvSpPr>
+          <p:nvPr>
+            <p:ph type="sldNum" sz="quarter" idx="10"/>
+          </p:nvPr>
+        </p:nvSpPr>
+        <p:spPr/>
+        <p:txBody>
+          <a:bodyPr/>
+          <a:lstStyle/>
+          <a:p>
+            <a:fld id="{F7021451-1387-4CA6-816F-3879F97B5CBC}" type="slidenum">
+              <a:rPr lang="en-US"/>
+              <a:t>16</a:t>
             </a:fld>
             <a:endParaRPr lang="en-US"/>
           </a:p>
@@ -2100,194 +2456,6 @@
         </p:nvSpPr>
         <p:spPr>
           <a:xfrm>
-            <a:off x="406301" y="1223963"/>
-            <a:ext cx="8498026" cy="274290"/>
-          </a:xfrm>
-          <a:prstGeom prst="rect">
-            <a:avLst/>
-          </a:prstGeom>
-          <a:noFill/>
-          <a:ln/>
-        </p:spPr>
-        <p:txBody>
-          <a:bodyPr wrap="square" lIns="0" tIns="0" rIns="0" bIns="0" rtlCol="0" anchor="t"/>
-          <a:lstStyle/>
-          <a:p>
-            <a:pPr algn="l" indent="0" marL="0">
-              <a:lnSpc>
-                <a:spcPts val="2160"/>
-              </a:lnSpc>
-              <a:spcBef>
-                <a:spcPts val="600"/>
-              </a:spcBef>
-              <a:spcAft>
-                <a:spcPts val="800"/>
-              </a:spcAft>
-              <a:buNone/>
-            </a:pPr>
-            <a:r>
-              <a:rPr lang="en-US" sz="1800" b="1" dirty="0">
-                <a:solidFill>
-                  <a:srgbClr val="FE4447"/>
-                </a:solidFill>
-                <a:latin typeface="Georgia" pitchFamily="34" charset="0"/>
-                <a:ea typeface="Georgia" pitchFamily="34" charset="-122"/>
-                <a:cs typeface="Georgia" pitchFamily="34" charset="-120"/>
-              </a:rPr>
-              <a:t>Learning objective</a:t>
-            </a:r>
-            <a:endParaRPr lang="en-US" sz="1800" dirty="0"/>
-          </a:p>
-        </p:txBody>
-      </p:sp>
-      <p:sp>
-        <p:nvSpPr>
-          <p:cNvPr id="6" name="Text 4"/>
-          <p:cNvSpPr/>
-          <p:nvPr/>
-        </p:nvSpPr>
-        <p:spPr>
-          <a:xfrm>
-            <a:off x="406301" y="1637854"/>
-            <a:ext cx="8498026" cy="426541"/>
-          </a:xfrm>
-          <a:prstGeom prst="rect">
-            <a:avLst/>
-          </a:prstGeom>
-          <a:noFill/>
-          <a:ln/>
-        </p:spPr>
-        <p:txBody>
-          <a:bodyPr wrap="square" lIns="0" tIns="0" rIns="0" bIns="0" rtlCol="0" anchor="t"/>
-          <a:lstStyle/>
-          <a:p>
-            <a:pPr algn="l" indent="0" marL="0">
-              <a:lnSpc>
-                <a:spcPts val="1680"/>
-              </a:lnSpc>
-              <a:spcBef>
-                <a:spcPts val="300"/>
-              </a:spcBef>
-              <a:spcAft>
-                <a:spcPts val="300"/>
-              </a:spcAft>
-              <a:buNone/>
-            </a:pPr>
-            <a:r>
-              <a:rPr lang="en-US" sz="1200" dirty="0">
-                <a:solidFill>
-                  <a:srgbClr val="1C2833"/>
-                </a:solidFill>
-                <a:latin typeface="Arial" pitchFamily="34" charset="0"/>
-                <a:ea typeface="Arial" pitchFamily="34" charset="-122"/>
-                <a:cs typeface="Arial" pitchFamily="34" charset="-120"/>
-              </a:rPr>
-              <a:t>By the end of this lesson, students have a one-page plan for their </a:t>
-            </a:r>
-            <a:pPr algn="l" indent="0" marL="0">
-              <a:lnSpc>
-                <a:spcPts val="1680"/>
-              </a:lnSpc>
-              <a:spcBef>
-                <a:spcPts val="300"/>
-              </a:spcBef>
-              <a:spcAft>
-                <a:spcPts val="300"/>
-              </a:spcAft>
-              <a:buNone/>
-            </a:pPr>
-            <a:r>
-              <a:rPr lang="en-US" sz="1200" i="1" dirty="0">
-                <a:solidFill>
-                  <a:srgbClr val="1C2833"/>
-                </a:solidFill>
-                <a:latin typeface="Arial" pitchFamily="34" charset="0"/>
-                <a:ea typeface="Arial" pitchFamily="34" charset="-122"/>
-                <a:cs typeface="Arial" pitchFamily="34" charset="-120"/>
-              </a:rPr>
-              <a:t>5-day doṣa-aware week</a:t>
-            </a:r>
-            <a:pPr algn="l" indent="0" marL="0">
-              <a:lnSpc>
-                <a:spcPts val="1680"/>
-              </a:lnSpc>
-              <a:spcBef>
-                <a:spcPts val="300"/>
-              </a:spcBef>
-              <a:spcAft>
-                <a:spcPts val="300"/>
-              </a:spcAft>
-              <a:buNone/>
-            </a:pPr>
-            <a:r>
-              <a:rPr lang="en-US" sz="1200" dirty="0">
-                <a:solidFill>
-                  <a:srgbClr val="1C2833"/>
-                </a:solidFill>
-                <a:latin typeface="Arial" pitchFamily="34" charset="0"/>
-                <a:ea typeface="Arial" pitchFamily="34" charset="-122"/>
-                <a:cs typeface="Arial" pitchFamily="34" charset="-120"/>
-              </a:rPr>
-              <a:t> project, with a chosen target </a:t>
-            </a:r>
-            <a:pPr algn="l" indent="0" marL="0">
-              <a:lnSpc>
-                <a:spcPts val="1680"/>
-              </a:lnSpc>
-              <a:spcBef>
-                <a:spcPts val="300"/>
-              </a:spcBef>
-              <a:spcAft>
-                <a:spcPts val="300"/>
-              </a:spcAft>
-              <a:buNone/>
-            </a:pPr>
-            <a:r>
-              <a:rPr lang="en-US" sz="1200" i="1" dirty="0">
-                <a:solidFill>
-                  <a:srgbClr val="1C2833"/>
-                </a:solidFill>
-                <a:latin typeface="Arial" pitchFamily="34" charset="0"/>
-                <a:ea typeface="Arial" pitchFamily="34" charset="-122"/>
-                <a:cs typeface="Arial" pitchFamily="34" charset="-120"/>
-              </a:rPr>
-              <a:t>doṣa</a:t>
-            </a:r>
-            <a:pPr algn="l" indent="0" marL="0">
-              <a:lnSpc>
-                <a:spcPts val="1680"/>
-              </a:lnSpc>
-              <a:spcBef>
-                <a:spcPts val="300"/>
-              </a:spcBef>
-              <a:spcAft>
-                <a:spcPts val="300"/>
-              </a:spcAft>
-              <a:buNone/>
-            </a:pPr>
-            <a:r>
-              <a:rPr lang="en-US" sz="1200" dirty="0">
-                <a:solidFill>
-                  <a:srgbClr val="1C2833"/>
-                </a:solidFill>
-                <a:latin typeface="Arial" pitchFamily="34" charset="0"/>
-                <a:ea typeface="Arial" pitchFamily="34" charset="-122"/>
-                <a:cs typeface="Arial" pitchFamily="34" charset="-120"/>
-              </a:rPr>
-              <a:t> tendency, three concrete daily changes, and the citation they will use.</a:t>
-            </a:r>
-            <a:endParaRPr lang="en-US" sz="1200" dirty="0"/>
-          </a:p>
-        </p:txBody>
-      </p:sp>
-      <p:sp>
-        <p:nvSpPr>
-          <p:cNvPr id="7" name="Text 5"/>
-          <p:cNvSpPr/>
-          <p:nvPr/>
-        </p:nvSpPr>
-        <p:spPr>
-          <a:xfrm>
             <a:off x="406301" y="4434929"/>
             <a:ext cx="8498026" cy="213271"/>
           </a:xfrm>
@@ -2432,7 +2600,7 @@
                 <a:ea typeface="Georgia" pitchFamily="34" charset="-122"/>
                 <a:cs typeface="Georgia" pitchFamily="34" charset="-120"/>
               </a:rPr>
-              <a:t>Differentiation</a:t>
+              <a:t>Activity (30 min) — Plan writing (cont.)</a:t>
             </a:r>
             <a:endParaRPr lang="en-US" sz="1800" dirty="0"/>
           </a:p>
@@ -2446,8 +2614,8 @@
         </p:nvSpPr>
         <p:spPr>
           <a:xfrm>
-            <a:off x="634901" y="883593"/>
-            <a:ext cx="8102798" cy="525661"/>
+            <a:off x="406301" y="870942"/>
+            <a:ext cx="8498026" cy="213271"/>
           </a:xfrm>
           <a:prstGeom prst="rect">
             <a:avLst/>
@@ -2459,18 +2627,20 @@
           <a:bodyPr wrap="square" lIns="0" tIns="0" rIns="0" bIns="0" rtlCol="0" anchor="t"/>
           <a:lstStyle/>
           <a:p>
-            <a:pPr algn="l" marL="342900" indent="-342900">
-              <a:lnSpc>
-                <a:spcPts val="1620"/>
-              </a:lnSpc>
-              <a:spcAft>
-                <a:spcPts val="300"/>
-              </a:spcAft>
-              <a:buSzPct val="100000"/>
-              <a:buChar char="•"/>
-            </a:pPr>
-            <a:r>
-              <a:rPr lang="en-US" sz="1200" b="1" dirty="0">
+            <a:pPr algn="l" indent="0" marL="0">
+              <a:lnSpc>
+                <a:spcPts val="1680"/>
+              </a:lnSpc>
+              <a:spcBef>
+                <a:spcPts val="300"/>
+              </a:spcBef>
+              <a:spcAft>
+                <a:spcPts val="300"/>
+              </a:spcAft>
+              <a:buNone/>
+            </a:pPr>
+            <a:r>
+              <a:rPr lang="en-US" sz="1200" dirty="0">
                 <a:solidFill>
                   <a:srgbClr val="1C2833"/>
                 </a:solidFill>
@@ -2478,16 +2648,42 @@
                 <a:ea typeface="Arial" pitchFamily="34" charset="-122"/>
                 <a:cs typeface="Arial" pitchFamily="34" charset="-120"/>
               </a:rPr>
-              <a:t>One tier up:</a:t>
-            </a:r>
-            <a:pPr algn="l" indent="0" marL="0">
+              <a:t>Teacher walks around. Quick interventions:</a:t>
+            </a:r>
+            <a:endParaRPr lang="en-US" sz="1200" dirty="0"/>
+          </a:p>
+        </p:txBody>
+      </p:sp>
+      <p:sp>
+        <p:nvSpPr>
+          <p:cNvPr id="5" name="Text 3"/>
+          <p:cNvSpPr/>
+          <p:nvPr/>
+        </p:nvSpPr>
+        <p:spPr>
+          <a:xfrm>
+            <a:off x="634901" y="1173063"/>
+            <a:ext cx="8102798" cy="769441"/>
+          </a:xfrm>
+          <a:prstGeom prst="rect">
+            <a:avLst/>
+          </a:prstGeom>
+          <a:noFill/>
+          <a:ln/>
+        </p:spPr>
+        <p:txBody>
+          <a:bodyPr wrap="square" lIns="0" tIns="0" rIns="0" bIns="0" rtlCol="0" anchor="t"/>
+          <a:lstStyle/>
+          <a:p>
+            <a:pPr algn="l" marL="342900" indent="-342900">
               <a:lnSpc>
                 <a:spcPts val="1620"/>
               </a:lnSpc>
               <a:spcAft>
                 <a:spcPts val="300"/>
               </a:spcAft>
-              <a:buNone/>
+              <a:buSzPct val="100000"/>
+              <a:buChar char="•"/>
             </a:pPr>
             <a:r>
               <a:rPr lang="en-US" sz="1200" dirty="0">
@@ -2498,7 +2694,7 @@
                 <a:ea typeface="Arial" pitchFamily="34" charset="-122"/>
                 <a:cs typeface="Arial" pitchFamily="34" charset="-120"/>
               </a:rPr>
-              <a:t> Add a Day 6 — a "what I'll change if Day 5 doesn't work" contingency. Forces metacognition.</a:t>
+              <a:t>Students writing extreme plans ("fast for 5 days") — redirect to small + realistic.</a:t>
             </a:r>
             <a:endParaRPr lang="en-US" sz="1200" dirty="0"/>
           </a:p>
@@ -2514,7 +2710,7 @@
               <a:buChar char="•"/>
             </a:pPr>
             <a:r>
-              <a:rPr lang="en-US" sz="1200" b="1" dirty="0">
+              <a:rPr lang="en-US" sz="1200" dirty="0">
                 <a:solidFill>
                   <a:srgbClr val="1C2833"/>
                 </a:solidFill>
@@ -2522,16 +2718,20 @@
                 <a:ea typeface="Arial" pitchFamily="34" charset="-122"/>
                 <a:cs typeface="Arial" pitchFamily="34" charset="-120"/>
               </a:rPr>
-              <a:t>One tier down:</a:t>
-            </a:r>
-            <a:pPr algn="l" indent="0" marL="0">
+              <a:t>Students with no plan — sit with them, walk through one example.</a:t>
+            </a:r>
+            <a:endParaRPr lang="en-US" sz="1200" dirty="0"/>
+          </a:p>
+          <a:p>
+            <a:pPr algn="l" marL="342900" indent="-342900">
               <a:lnSpc>
                 <a:spcPts val="1620"/>
               </a:lnSpc>
               <a:spcAft>
                 <a:spcPts val="300"/>
               </a:spcAft>
-              <a:buNone/>
+              <a:buSzPct val="100000"/>
+              <a:buChar char="•"/>
             </a:pPr>
             <a:r>
               <a:rPr lang="en-US" sz="1200" dirty="0">
@@ -2542,7 +2742,7 @@
                 <a:ea typeface="Arial" pitchFamily="34" charset="-122"/>
                 <a:cs typeface="Arial" pitchFamily="34" charset="-120"/>
               </a:rPr>
-              <a:t> Stick to ONE change repeated daily. Five repetitions of the same change.</a:t>
+              <a:t>Students who finish quickly — sketch the visual layout of their poster.</a:t>
             </a:r>
             <a:endParaRPr lang="en-US" sz="1200" dirty="0"/>
           </a:p>
@@ -2550,7 +2750,7 @@
       </p:sp>
       <p:sp>
         <p:nvSpPr>
-          <p:cNvPr id="5" name="Text 3"/>
+          <p:cNvPr id="6" name="Text 4"/>
           <p:cNvSpPr/>
           <p:nvPr/>
         </p:nvSpPr>
@@ -2700,7 +2900,7 @@
                 <a:ea typeface="Georgia" pitchFamily="34" charset="-122"/>
                 <a:cs typeface="Georgia" pitchFamily="34" charset="-120"/>
               </a:rPr>
-              <a:t>Teacher notes</a:t>
+              <a:t>Wrap-up (5 min)</a:t>
             </a:r>
             <a:endParaRPr lang="en-US" sz="1800" dirty="0"/>
           </a:p>
@@ -2714,8 +2914,8 @@
         </p:nvSpPr>
         <p:spPr>
           <a:xfrm>
-            <a:off x="406301" y="870942"/>
-            <a:ext cx="8498026" cy="853083"/>
+            <a:off x="634901" y="883593"/>
+            <a:ext cx="8102798" cy="769441"/>
           </a:xfrm>
           <a:prstGeom prst="rect">
             <a:avLst/>
@@ -2727,17 +2927,15 @@
           <a:bodyPr wrap="square" lIns="0" tIns="0" rIns="0" bIns="0" rtlCol="0" anchor="t"/>
           <a:lstStyle/>
           <a:p>
-            <a:pPr algn="l" indent="0" marL="0">
-              <a:lnSpc>
-                <a:spcPts val="1680"/>
-              </a:lnSpc>
-              <a:spcBef>
-                <a:spcPts val="300"/>
-              </a:spcBef>
-              <a:spcAft>
-                <a:spcPts val="300"/>
-              </a:spcAft>
-              <a:buNone/>
+            <a:pPr algn="l" marL="342900" indent="-342900">
+              <a:lnSpc>
+                <a:spcPts val="1620"/>
+              </a:lnSpc>
+              <a:spcAft>
+                <a:spcPts val="300"/>
+              </a:spcAft>
+              <a:buSzPct val="100000"/>
+              <a:buChar char="•"/>
             </a:pPr>
             <a:r>
               <a:rPr lang="en-US" sz="1200" dirty="0">
@@ -2748,22 +2946,19 @@
                 <a:ea typeface="Arial" pitchFamily="34" charset="-122"/>
                 <a:cs typeface="Arial" pitchFamily="34" charset="-120"/>
               </a:rPr>
-              <a:t>– Reject plans involving medication, fasting beyond skipping one snack, intense exercise programmes, or anything that touches existing care. – Some students will copy their friend's plan. Each plan must be </a:t>
-            </a:r>
-            <a:pPr algn="l" indent="0" marL="0">
-              <a:lnSpc>
-                <a:spcPts val="1680"/>
-              </a:lnSpc>
-              <a:spcBef>
-                <a:spcPts val="300"/>
-              </a:spcBef>
-              <a:spcAft>
-                <a:spcPts val="300"/>
-              </a:spcAft>
-              <a:buNone/>
-            </a:pPr>
-            <a:r>
-              <a:rPr lang="en-US" sz="1200" i="1" dirty="0">
+              <a:t>Each student reads aloud their </a:t>
+            </a:r>
+            <a:pPr algn="l" indent="0" marL="0">
+              <a:lnSpc>
+                <a:spcPts val="1620"/>
+              </a:lnSpc>
+              <a:spcAft>
+                <a:spcPts val="300"/>
+              </a:spcAft>
+              <a:buNone/>
+            </a:pPr>
+            <a:r>
+              <a:rPr lang="en-US" sz="1200" b="1" dirty="0">
                 <a:solidFill>
                   <a:srgbClr val="1C2833"/>
                 </a:solidFill>
@@ -2771,15 +2966,12 @@
                 <a:ea typeface="Arial" pitchFamily="34" charset="-122"/>
                 <a:cs typeface="Arial" pitchFamily="34" charset="-120"/>
               </a:rPr>
-              <a:t>theirs</a:t>
-            </a:r>
-            <a:pPr algn="l" indent="0" marL="0">
-              <a:lnSpc>
-                <a:spcPts val="1680"/>
-              </a:lnSpc>
-              <a:spcBef>
-                <a:spcPts val="300"/>
-              </a:spcBef>
+              <a:t>Day 1</a:t>
+            </a:r>
+            <a:pPr algn="l" indent="0" marL="0">
+              <a:lnSpc>
+                <a:spcPts val="1620"/>
+              </a:lnSpc>
               <a:spcAft>
                 <a:spcPts val="300"/>
               </a:spcAft>
@@ -2794,22 +2986,23 @@
                 <a:ea typeface="Arial" pitchFamily="34" charset="-122"/>
                 <a:cs typeface="Arial" pitchFamily="34" charset="-120"/>
               </a:rPr>
-              <a:t> (anchored to their own self-observation). Pair-work is fine if both partners agree on the target </a:t>
-            </a:r>
-            <a:pPr algn="l" indent="0" marL="0">
-              <a:lnSpc>
-                <a:spcPts val="1680"/>
-              </a:lnSpc>
-              <a:spcBef>
-                <a:spcPts val="300"/>
-              </a:spcBef>
-              <a:spcAft>
-                <a:spcPts val="300"/>
-              </a:spcAft>
-              <a:buNone/>
-            </a:pPr>
-            <a:r>
-              <a:rPr lang="en-US" sz="1200" i="1" dirty="0">
+              <a:t> change to a partner. Partner gives one piece of feedback.</a:t>
+            </a:r>
+            <a:endParaRPr lang="en-US" sz="1200" dirty="0"/>
+          </a:p>
+          <a:p>
+            <a:pPr algn="l" marL="342900" indent="-342900">
+              <a:lnSpc>
+                <a:spcPts val="1620"/>
+              </a:lnSpc>
+              <a:spcAft>
+                <a:spcPts val="300"/>
+              </a:spcAft>
+              <a:buSzPct val="100000"/>
+              <a:buChar char="•"/>
+            </a:pPr>
+            <a:r>
+              <a:rPr lang="en-US" sz="1200" dirty="0">
                 <a:solidFill>
                   <a:srgbClr val="1C2833"/>
                 </a:solidFill>
@@ -2817,19 +3010,20 @@
                 <a:ea typeface="Arial" pitchFamily="34" charset="-122"/>
                 <a:cs typeface="Arial" pitchFamily="34" charset="-120"/>
               </a:rPr>
-              <a:t>doṣa</a:t>
-            </a:r>
-            <a:pPr algn="l" indent="0" marL="0">
-              <a:lnSpc>
-                <a:spcPts val="1680"/>
-              </a:lnSpc>
-              <a:spcBef>
-                <a:spcPts val="300"/>
-              </a:spcBef>
-              <a:spcAft>
-                <a:spcPts val="300"/>
-              </a:spcAft>
-              <a:buNone/>
+              <a:t>Photograph or scan each plan before they leave. (Submitted as "draft 1.")</a:t>
+            </a:r>
+            <a:endParaRPr lang="en-US" sz="1200" dirty="0"/>
+          </a:p>
+          <a:p>
+            <a:pPr algn="l" marL="342900" indent="-342900">
+              <a:lnSpc>
+                <a:spcPts val="1620"/>
+              </a:lnSpc>
+              <a:spcAft>
+                <a:spcPts val="300"/>
+              </a:spcAft>
+              <a:buSzPct val="100000"/>
+              <a:buChar char="•"/>
             </a:pPr>
             <a:r>
               <a:rPr lang="en-US" sz="1200" dirty="0">
@@ -2840,7 +3034,27 @@
                 <a:ea typeface="Arial" pitchFamily="34" charset="-122"/>
                 <a:cs typeface="Arial" pitchFamily="34" charset="-120"/>
               </a:rPr>
-              <a:t>. – The "one thing I will NOT do" prompt is important — it forces the safety lens.</a:t>
+              <a:t>Preview Day 9: </a:t>
+            </a:r>
+            <a:pPr algn="l" indent="0" marL="0">
+              <a:lnSpc>
+                <a:spcPts val="1620"/>
+              </a:lnSpc>
+              <a:spcAft>
+                <a:spcPts val="300"/>
+              </a:spcAft>
+              <a:buNone/>
+            </a:pPr>
+            <a:r>
+              <a:rPr lang="en-US" sz="1200" i="1" dirty="0">
+                <a:solidFill>
+                  <a:srgbClr val="1C2833"/>
+                </a:solidFill>
+                <a:latin typeface="Arial" pitchFamily="34" charset="0"/>
+                <a:ea typeface="Arial" pitchFamily="34" charset="-122"/>
+                <a:cs typeface="Arial" pitchFamily="34" charset="-120"/>
+              </a:rPr>
+              <a:t>"Tomorrow — refine and start building the actual artefact."</a:t>
             </a:r>
             <a:endParaRPr lang="en-US" sz="1200" dirty="0"/>
           </a:p>
@@ -2998,7 +3212,7 @@
                 <a:ea typeface="Georgia" pitchFamily="34" charset="-122"/>
                 <a:cs typeface="Georgia" pitchFamily="34" charset="-120"/>
               </a:rPr>
-              <a:t>Citation(s) used in this lesson</a:t>
+              <a:t>Student-facing content</a:t>
             </a:r>
             <a:endParaRPr lang="en-US" sz="1800" dirty="0"/>
           </a:p>
@@ -3012,8 +3226,299 @@
         </p:nvSpPr>
         <p:spPr>
           <a:xfrm>
-            <a:off x="406301" y="870942"/>
-            <a:ext cx="8498026" cy="222796"/>
+            <a:off x="406301" y="883593"/>
+            <a:ext cx="8331398" cy="2112169"/>
+          </a:xfrm>
+          <a:prstGeom prst="rect">
+            <a:avLst/>
+          </a:prstGeom>
+          <a:solidFill>
+            <a:srgbClr val="F4F8F9"/>
+          </a:solidFill>
+          <a:ln/>
+        </p:spPr>
+        <p:txBody>
+          <a:bodyPr wrap="square" rtlCol="0" anchor="ctr"/>
+          <a:lstStyle/>
+          <a:p>
+            <a:pPr indent="0" marL="0">
+              <a:buNone/>
+            </a:pPr>
+            <a:endParaRPr lang="en-US" dirty="0"/>
+          </a:p>
+        </p:txBody>
+      </p:sp>
+      <p:sp>
+        <p:nvSpPr>
+          <p:cNvPr id="5" name="Shape 3"/>
+          <p:cNvSpPr/>
+          <p:nvPr/>
+        </p:nvSpPr>
+        <p:spPr>
+          <a:xfrm>
+            <a:off x="434876" y="883593"/>
+            <a:ext cx="0" cy="2112169"/>
+          </a:xfrm>
+          <a:prstGeom prst="line">
+            <a:avLst/>
+          </a:prstGeom>
+          <a:noFill/>
+          <a:ln w="57150">
+            <a:solidFill>
+              <a:srgbClr val="FE4447"/>
+            </a:solidFill>
+            <a:prstDash val="solid"/>
+          </a:ln>
+        </p:spPr>
+      </p:sp>
+      <p:sp>
+        <p:nvSpPr>
+          <p:cNvPr id="6" name="Text 4"/>
+          <p:cNvSpPr/>
+          <p:nvPr/>
+        </p:nvSpPr>
+        <p:spPr>
+          <a:xfrm>
+            <a:off x="692051" y="1074093"/>
+            <a:ext cx="7973389" cy="230981"/>
+          </a:xfrm>
+          <a:prstGeom prst="rect">
+            <a:avLst/>
+          </a:prstGeom>
+          <a:noFill/>
+          <a:ln/>
+        </p:spPr>
+        <p:txBody>
+          <a:bodyPr wrap="square" lIns="0" tIns="0" rIns="0" bIns="0" rtlCol="0" anchor="t"/>
+          <a:lstStyle/>
+          <a:p>
+            <a:pPr algn="l" indent="0" marL="0">
+              <a:lnSpc>
+                <a:spcPts val="1820"/>
+              </a:lnSpc>
+              <a:spcBef>
+                <a:spcPts val="300"/>
+              </a:spcBef>
+              <a:spcAft>
+                <a:spcPts val="300"/>
+              </a:spcAft>
+              <a:buNone/>
+            </a:pPr>
+            <a:r>
+              <a:rPr lang="en-US" sz="1300" b="1" i="1" dirty="0">
+                <a:solidFill>
+                  <a:srgbClr val="1C2833"/>
+                </a:solidFill>
+                <a:latin typeface="Georgia" pitchFamily="34" charset="0"/>
+                <a:ea typeface="Georgia" pitchFamily="34" charset="-122"/>
+                <a:cs typeface="Georgia" pitchFamily="34" charset="-120"/>
+              </a:rPr>
+              <a:t>The project, in one paragraph:</a:t>
+            </a:r>
+            <a:endParaRPr lang="en-US" sz="1300" dirty="0"/>
+          </a:p>
+        </p:txBody>
+      </p:sp>
+      <p:sp>
+        <p:nvSpPr>
+          <p:cNvPr id="7" name="Text 5"/>
+          <p:cNvSpPr/>
+          <p:nvPr/>
+        </p:nvSpPr>
+        <p:spPr>
+          <a:xfrm>
+            <a:off x="692051" y="1343174"/>
+            <a:ext cx="7973389" cy="692944"/>
+          </a:xfrm>
+          <a:prstGeom prst="rect">
+            <a:avLst/>
+          </a:prstGeom>
+          <a:noFill/>
+          <a:ln/>
+        </p:spPr>
+        <p:txBody>
+          <a:bodyPr wrap="square" lIns="0" tIns="0" rIns="0" bIns="0" rtlCol="0" anchor="t"/>
+          <a:lstStyle/>
+          <a:p>
+            <a:pPr algn="l" indent="0" marL="0">
+              <a:lnSpc>
+                <a:spcPts val="1820"/>
+              </a:lnSpc>
+              <a:spcBef>
+                <a:spcPts val="300"/>
+              </a:spcBef>
+              <a:spcAft>
+                <a:spcPts val="300"/>
+              </a:spcAft>
+              <a:buNone/>
+            </a:pPr>
+            <a:r>
+              <a:rPr lang="en-US" sz="1300" i="1" dirty="0">
+                <a:solidFill>
+                  <a:srgbClr val="1C2833"/>
+                </a:solidFill>
+                <a:latin typeface="Georgia" pitchFamily="34" charset="0"/>
+                <a:ea typeface="Georgia" pitchFamily="34" charset="-122"/>
+                <a:cs typeface="Georgia" pitchFamily="34" charset="-120"/>
+              </a:rPr>
+              <a:t>Design a 5-day doṣa-aware week for yourself. Pick ONE doṣa tendency from your self-observation. Plan 5 small, realistic daily changes that would support balance for that doṣa. Explain each change with the underlying concept. Cite one classical source. Present in 3 minutes on Day 10.</a:t>
+            </a:r>
+            <a:endParaRPr lang="en-US" sz="1300" dirty="0"/>
+          </a:p>
+        </p:txBody>
+      </p:sp>
+      <p:sp>
+        <p:nvSpPr>
+          <p:cNvPr id="8" name="Text 6"/>
+          <p:cNvSpPr/>
+          <p:nvPr/>
+        </p:nvSpPr>
+        <p:spPr>
+          <a:xfrm>
+            <a:off x="692051" y="2074218"/>
+            <a:ext cx="7973389" cy="230981"/>
+          </a:xfrm>
+          <a:prstGeom prst="rect">
+            <a:avLst/>
+          </a:prstGeom>
+          <a:noFill/>
+          <a:ln/>
+        </p:spPr>
+        <p:txBody>
+          <a:bodyPr wrap="square" lIns="0" tIns="0" rIns="0" bIns="0" rtlCol="0" anchor="t"/>
+          <a:lstStyle/>
+          <a:p>
+            <a:pPr algn="l" indent="0" marL="0">
+              <a:lnSpc>
+                <a:spcPts val="1820"/>
+              </a:lnSpc>
+              <a:spcBef>
+                <a:spcPts val="300"/>
+              </a:spcBef>
+              <a:spcAft>
+                <a:spcPts val="300"/>
+              </a:spcAft>
+              <a:buNone/>
+            </a:pPr>
+            <a:r>
+              <a:rPr lang="en-US" sz="1300" b="1" i="1" dirty="0">
+                <a:solidFill>
+                  <a:srgbClr val="1C2833"/>
+                </a:solidFill>
+                <a:latin typeface="Georgia" pitchFamily="34" charset="0"/>
+                <a:ea typeface="Georgia" pitchFamily="34" charset="-122"/>
+                <a:cs typeface="Georgia" pitchFamily="34" charset="-120"/>
+              </a:rPr>
+              <a:t>The principle behind the project:</a:t>
+            </a:r>
+            <a:endParaRPr lang="en-US" sz="1300" dirty="0"/>
+          </a:p>
+        </p:txBody>
+      </p:sp>
+      <p:sp>
+        <p:nvSpPr>
+          <p:cNvPr id="9" name="Text 7"/>
+          <p:cNvSpPr/>
+          <p:nvPr/>
+        </p:nvSpPr>
+        <p:spPr>
+          <a:xfrm>
+            <a:off x="692051" y="2343299"/>
+            <a:ext cx="7973389" cy="461963"/>
+          </a:xfrm>
+          <a:prstGeom prst="rect">
+            <a:avLst/>
+          </a:prstGeom>
+          <a:noFill/>
+          <a:ln/>
+        </p:spPr>
+        <p:txBody>
+          <a:bodyPr wrap="square" lIns="0" tIns="0" rIns="0" bIns="0" rtlCol="0" anchor="t"/>
+          <a:lstStyle/>
+          <a:p>
+            <a:pPr algn="l" indent="0" marL="0">
+              <a:lnSpc>
+                <a:spcPts val="1820"/>
+              </a:lnSpc>
+              <a:spcBef>
+                <a:spcPts val="300"/>
+              </a:spcBef>
+              <a:spcAft>
+                <a:spcPts val="300"/>
+              </a:spcAft>
+              <a:buNone/>
+            </a:pPr>
+            <a:r>
+              <a:rPr lang="en-US" sz="1300" dirty="0">
+                <a:solidFill>
+                  <a:srgbClr val="1C2833"/>
+                </a:solidFill>
+                <a:latin typeface="Georgia" pitchFamily="34" charset="0"/>
+                <a:ea typeface="Georgia" pitchFamily="34" charset="-122"/>
+                <a:cs typeface="Georgia" pitchFamily="34" charset="-120"/>
+              </a:rPr>
+              <a:t>The doṣa framework is most useful when it changes what you </a:t>
+            </a:r>
+            <a:pPr algn="l" indent="0" marL="0">
+              <a:lnSpc>
+                <a:spcPts val="1820"/>
+              </a:lnSpc>
+              <a:spcBef>
+                <a:spcPts val="300"/>
+              </a:spcBef>
+              <a:spcAft>
+                <a:spcPts val="300"/>
+              </a:spcAft>
+              <a:buNone/>
+            </a:pPr>
+            <a:r>
+              <a:rPr lang="en-US" sz="1300" i="1" dirty="0">
+                <a:solidFill>
+                  <a:srgbClr val="1C2833"/>
+                </a:solidFill>
+                <a:latin typeface="Georgia" pitchFamily="34" charset="0"/>
+                <a:ea typeface="Georgia" pitchFamily="34" charset="-122"/>
+                <a:cs typeface="Georgia" pitchFamily="34" charset="-120"/>
+              </a:rPr>
+              <a:t>do</a:t>
+            </a:r>
+            <a:pPr algn="l" indent="0" marL="0">
+              <a:lnSpc>
+                <a:spcPts val="1820"/>
+              </a:lnSpc>
+              <a:spcBef>
+                <a:spcPts val="300"/>
+              </a:spcBef>
+              <a:spcAft>
+                <a:spcPts val="300"/>
+              </a:spcAft>
+              <a:buNone/>
+            </a:pPr>
+            <a:r>
+              <a:rPr lang="en-US" sz="1300" dirty="0">
+                <a:solidFill>
+                  <a:srgbClr val="1C2833"/>
+                </a:solidFill>
+                <a:latin typeface="Georgia" pitchFamily="34" charset="0"/>
+                <a:ea typeface="Georgia" pitchFamily="34" charset="-122"/>
+                <a:cs typeface="Georgia" pitchFamily="34" charset="-120"/>
+              </a:rPr>
+              <a:t> — even a little. Designing a plan is the test of whether you've understood it.</a:t>
+            </a:r>
+            <a:endParaRPr lang="en-US" sz="1300" dirty="0"/>
+          </a:p>
+        </p:txBody>
+      </p:sp>
+      <p:sp>
+        <p:nvSpPr>
+          <p:cNvPr id="10" name="Text 8"/>
+          <p:cNvSpPr/>
+          <p:nvPr/>
+        </p:nvSpPr>
+        <p:spPr>
+          <a:xfrm>
+            <a:off x="406301" y="4434929"/>
+            <a:ext cx="8498026" cy="213271"/>
           </a:xfrm>
           <a:prstGeom prst="rect">
             <a:avLst/>
@@ -3046,19 +3551,152 @@
                 <a:ea typeface="Arial" pitchFamily="34" charset="-122"/>
                 <a:cs typeface="Arial" pitchFamily="34" charset="-120"/>
               </a:rPr>
-              <a:t>– No new citations today. Students choose from </a:t>
-            </a:r>
-            <a:pPr algn="l" indent="0" marL="0">
-              <a:lnSpc>
-                <a:spcPts val="1680"/>
+              <a:t>Middle ·  · IKS Curriculum</a:t>
+            </a:r>
+            <a:endParaRPr lang="en-US" sz="1200" dirty="0"/>
+          </a:p>
+        </p:txBody>
+      </p:sp>
+    </p:spTree>
+  </p:cSld>
+  <p:clrMapOvr>
+    <a:masterClrMapping/>
+  </p:clrMapOvr>
+</p:sld>
+</file>
+
+<file path=ppt/slides/slide13.xml><?xml version="1.0" encoding="utf-8"?>
+<p:sld xmlns:a="http://schemas.openxmlformats.org/drawingml/2006/main" xmlns:r="http://schemas.openxmlformats.org/officeDocument/2006/relationships" xmlns:p="http://schemas.openxmlformats.org/presentationml/2006/main">
+  <p:cSld name="Slide 13">
+    <p:bg>
+      <p:bgPr>
+        <a:solidFill>
+          <a:srgbClr val="FFFFFF"/>
+        </a:solidFill>
+      </p:bgPr>
+    </p:bg>
+    <p:spTree>
+      <p:nvGrpSpPr>
+        <p:cNvPr id="1" name=""/>
+        <p:cNvGrpSpPr/>
+        <p:nvPr/>
+      </p:nvGrpSpPr>
+      <p:grpSpPr>
+        <a:xfrm>
+          <a:off x="0" y="0"/>
+          <a:ext cx="0" cy="0"/>
+          <a:chOff x="0" y="0"/>
+          <a:chExt cx="0" cy="0"/>
+        </a:xfrm>
+      </p:grpSpPr>
+      <p:sp>
+        <p:nvSpPr>
+          <p:cNvPr id="2" name="Text 0"/>
+          <p:cNvSpPr/>
+          <p:nvPr/>
+        </p:nvSpPr>
+        <p:spPr>
+          <a:xfrm>
+            <a:off x="0" y="0"/>
+            <a:ext cx="9144000" cy="101501"/>
+          </a:xfrm>
+          <a:prstGeom prst="rect">
+            <a:avLst/>
+          </a:prstGeom>
+          <a:solidFill>
+            <a:srgbClr val="277884"/>
+          </a:solidFill>
+          <a:ln/>
+        </p:spPr>
+        <p:txBody>
+          <a:bodyPr wrap="square" rtlCol="0" anchor="ctr"/>
+          <a:lstStyle/>
+          <a:p>
+            <a:pPr indent="0" marL="0">
+              <a:buNone/>
+            </a:pPr>
+            <a:endParaRPr lang="en-US" dirty="0"/>
+          </a:p>
+        </p:txBody>
+      </p:sp>
+      <p:sp>
+        <p:nvSpPr>
+          <p:cNvPr id="3" name="Text 1"/>
+          <p:cNvSpPr/>
+          <p:nvPr/>
+        </p:nvSpPr>
+        <p:spPr>
+          <a:xfrm>
+            <a:off x="406301" y="457051"/>
+            <a:ext cx="8498026" cy="274290"/>
+          </a:xfrm>
+          <a:prstGeom prst="rect">
+            <a:avLst/>
+          </a:prstGeom>
+          <a:noFill/>
+          <a:ln/>
+        </p:spPr>
+        <p:txBody>
+          <a:bodyPr wrap="square" lIns="0" tIns="0" rIns="0" bIns="0" rtlCol="0" anchor="t"/>
+          <a:lstStyle/>
+          <a:p>
+            <a:pPr algn="l" indent="0" marL="0">
+              <a:lnSpc>
+                <a:spcPts val="2160"/>
               </a:lnSpc>
               <a:spcBef>
-                <a:spcPts val="300"/>
+                <a:spcPts val="600"/>
               </a:spcBef>
               <a:spcAft>
-                <a:spcPts val="300"/>
-              </a:spcAft>
-              <a:buNone/>
+                <a:spcPts val="800"/>
+              </a:spcAft>
+              <a:buNone/>
+            </a:pPr>
+            <a:r>
+              <a:rPr lang="en-US" sz="1800" b="1" dirty="0">
+                <a:solidFill>
+                  <a:srgbClr val="FE4447"/>
+                </a:solidFill>
+                <a:latin typeface="Georgia" pitchFamily="34" charset="0"/>
+                <a:ea typeface="Georgia" pitchFamily="34" charset="-122"/>
+                <a:cs typeface="Georgia" pitchFamily="34" charset="-120"/>
+              </a:rPr>
+              <a:t>Homework</a:t>
+            </a:r>
+            <a:endParaRPr lang="en-US" sz="1800" dirty="0"/>
+          </a:p>
+        </p:txBody>
+      </p:sp>
+      <p:sp>
+        <p:nvSpPr>
+          <p:cNvPr id="4" name="Text 2"/>
+          <p:cNvSpPr/>
+          <p:nvPr/>
+        </p:nvSpPr>
+        <p:spPr>
+          <a:xfrm>
+            <a:off x="634901" y="883593"/>
+            <a:ext cx="8102798" cy="281880"/>
+          </a:xfrm>
+          <a:prstGeom prst="rect">
+            <a:avLst/>
+          </a:prstGeom>
+          <a:noFill/>
+          <a:ln/>
+        </p:spPr>
+        <p:txBody>
+          <a:bodyPr wrap="square" lIns="0" tIns="0" rIns="0" bIns="0" rtlCol="0" anchor="t"/>
+          <a:lstStyle/>
+          <a:p>
+            <a:pPr algn="l" marL="342900" indent="-342900">
+              <a:lnSpc>
+                <a:spcPts val="1620"/>
+              </a:lnSpc>
+              <a:spcAft>
+                <a:spcPts val="300"/>
+              </a:spcAft>
+              <a:buSzPct val="100000"/>
+              <a:buChar char="•"/>
             </a:pPr>
             <a:r>
               <a:rPr lang="en-US" sz="1200" dirty="0">
@@ -3069,15 +3707,836 @@
                 <a:ea typeface="Arial" pitchFamily="34" charset="-122"/>
                 <a:cs typeface="Arial" pitchFamily="34" charset="-120"/>
               </a:rPr>
+              <a:t>Refine your plan. Sleep on it. Cross out anything that won't fit your actual week. Bring two extra ideas tomorrow.</a:t>
+            </a:r>
+            <a:endParaRPr lang="en-US" sz="1200" dirty="0"/>
+          </a:p>
+        </p:txBody>
+      </p:sp>
+      <p:sp>
+        <p:nvSpPr>
+          <p:cNvPr id="5" name="Text 3"/>
+          <p:cNvSpPr/>
+          <p:nvPr/>
+        </p:nvSpPr>
+        <p:spPr>
+          <a:xfrm>
+            <a:off x="406301" y="4434929"/>
+            <a:ext cx="8498026" cy="213271"/>
+          </a:xfrm>
+          <a:prstGeom prst="rect">
+            <a:avLst/>
+          </a:prstGeom>
+          <a:noFill/>
+          <a:ln/>
+        </p:spPr>
+        <p:txBody>
+          <a:bodyPr wrap="square" lIns="0" tIns="0" rIns="0" bIns="0" rtlCol="0" anchor="t"/>
+          <a:lstStyle/>
+          <a:p>
+            <a:pPr algn="l" indent="0" marL="0">
+              <a:lnSpc>
+                <a:spcPts val="1680"/>
+              </a:lnSpc>
+              <a:spcBef>
+                <a:spcPts val="300"/>
+              </a:spcBef>
+              <a:spcAft>
+                <a:spcPts val="300"/>
+              </a:spcAft>
+              <a:buNone/>
+            </a:pPr>
+            <a:r>
+              <a:rPr lang="en-US" sz="1200" dirty="0">
+                <a:solidFill>
+                  <a:srgbClr val="1C2833"/>
+                </a:solidFill>
+                <a:latin typeface="Arial" pitchFamily="34" charset="0"/>
+                <a:ea typeface="Arial" pitchFamily="34" charset="-122"/>
+                <a:cs typeface="Arial" pitchFamily="34" charset="-120"/>
+              </a:rPr>
+              <a:t>Middle ·  · IKS Curriculum</a:t>
+            </a:r>
+            <a:endParaRPr lang="en-US" sz="1200" dirty="0"/>
+          </a:p>
+        </p:txBody>
+      </p:sp>
+    </p:spTree>
+  </p:cSld>
+  <p:clrMapOvr>
+    <a:masterClrMapping/>
+  </p:clrMapOvr>
+</p:sld>
+</file>
+
+<file path=ppt/slides/slide14.xml><?xml version="1.0" encoding="utf-8"?>
+<p:sld xmlns:a="http://schemas.openxmlformats.org/drawingml/2006/main" xmlns:r="http://schemas.openxmlformats.org/officeDocument/2006/relationships" xmlns:p="http://schemas.openxmlformats.org/presentationml/2006/main">
+  <p:cSld name="Slide 14">
+    <p:bg>
+      <p:bgPr>
+        <a:solidFill>
+          <a:srgbClr val="FFFFFF"/>
+        </a:solidFill>
+      </p:bgPr>
+    </p:bg>
+    <p:spTree>
+      <p:nvGrpSpPr>
+        <p:cNvPr id="1" name=""/>
+        <p:cNvGrpSpPr/>
+        <p:nvPr/>
+      </p:nvGrpSpPr>
+      <p:grpSpPr>
+        <a:xfrm>
+          <a:off x="0" y="0"/>
+          <a:ext cx="0" cy="0"/>
+          <a:chOff x="0" y="0"/>
+          <a:chExt cx="0" cy="0"/>
+        </a:xfrm>
+      </p:grpSpPr>
+      <p:sp>
+        <p:nvSpPr>
+          <p:cNvPr id="2" name="Text 0"/>
+          <p:cNvSpPr/>
+          <p:nvPr/>
+        </p:nvSpPr>
+        <p:spPr>
+          <a:xfrm>
+            <a:off x="0" y="0"/>
+            <a:ext cx="9144000" cy="101501"/>
+          </a:xfrm>
+          <a:prstGeom prst="rect">
+            <a:avLst/>
+          </a:prstGeom>
+          <a:solidFill>
+            <a:srgbClr val="277884"/>
+          </a:solidFill>
+          <a:ln/>
+        </p:spPr>
+        <p:txBody>
+          <a:bodyPr wrap="square" rtlCol="0" anchor="ctr"/>
+          <a:lstStyle/>
+          <a:p>
+            <a:pPr indent="0" marL="0">
+              <a:buNone/>
+            </a:pPr>
+            <a:endParaRPr lang="en-US" dirty="0"/>
+          </a:p>
+        </p:txBody>
+      </p:sp>
+      <p:sp>
+        <p:nvSpPr>
+          <p:cNvPr id="3" name="Text 1"/>
+          <p:cNvSpPr/>
+          <p:nvPr/>
+        </p:nvSpPr>
+        <p:spPr>
+          <a:xfrm>
+            <a:off x="406301" y="457051"/>
+            <a:ext cx="8498026" cy="274290"/>
+          </a:xfrm>
+          <a:prstGeom prst="rect">
+            <a:avLst/>
+          </a:prstGeom>
+          <a:noFill/>
+          <a:ln/>
+        </p:spPr>
+        <p:txBody>
+          <a:bodyPr wrap="square" lIns="0" tIns="0" rIns="0" bIns="0" rtlCol="0" anchor="t"/>
+          <a:lstStyle/>
+          <a:p>
+            <a:pPr algn="l" indent="0" marL="0">
+              <a:lnSpc>
+                <a:spcPts val="2160"/>
+              </a:lnSpc>
+              <a:spcBef>
+                <a:spcPts val="600"/>
+              </a:spcBef>
+              <a:spcAft>
+                <a:spcPts val="800"/>
+              </a:spcAft>
+              <a:buNone/>
+            </a:pPr>
+            <a:r>
+              <a:rPr lang="en-US" sz="1800" b="1" dirty="0">
+                <a:solidFill>
+                  <a:srgbClr val="FE4447"/>
+                </a:solidFill>
+                <a:latin typeface="Georgia" pitchFamily="34" charset="0"/>
+                <a:ea typeface="Georgia" pitchFamily="34" charset="-122"/>
+                <a:cs typeface="Georgia" pitchFamily="34" charset="-120"/>
+              </a:rPr>
+              <a:t>Differentiation</a:t>
+            </a:r>
+            <a:endParaRPr lang="en-US" sz="1800" dirty="0"/>
+          </a:p>
+        </p:txBody>
+      </p:sp>
+      <p:sp>
+        <p:nvSpPr>
+          <p:cNvPr id="4" name="Text 2"/>
+          <p:cNvSpPr/>
+          <p:nvPr/>
+        </p:nvSpPr>
+        <p:spPr>
+          <a:xfrm>
+            <a:off x="634901" y="883593"/>
+            <a:ext cx="8102798" cy="525661"/>
+          </a:xfrm>
+          <a:prstGeom prst="rect">
+            <a:avLst/>
+          </a:prstGeom>
+          <a:noFill/>
+          <a:ln/>
+        </p:spPr>
+        <p:txBody>
+          <a:bodyPr wrap="square" lIns="0" tIns="0" rIns="0" bIns="0" rtlCol="0" anchor="t"/>
+          <a:lstStyle/>
+          <a:p>
+            <a:pPr algn="l" marL="342900" indent="-342900">
+              <a:lnSpc>
+                <a:spcPts val="1620"/>
+              </a:lnSpc>
+              <a:spcAft>
+                <a:spcPts val="300"/>
+              </a:spcAft>
+              <a:buSzPct val="100000"/>
+              <a:buChar char="•"/>
+            </a:pPr>
+            <a:r>
+              <a:rPr lang="en-US" sz="1200" b="1" dirty="0">
+                <a:solidFill>
+                  <a:srgbClr val="1C2833"/>
+                </a:solidFill>
+                <a:latin typeface="Arial" pitchFamily="34" charset="0"/>
+                <a:ea typeface="Arial" pitchFamily="34" charset="-122"/>
+                <a:cs typeface="Arial" pitchFamily="34" charset="-120"/>
+              </a:rPr>
+              <a:t>One tier up:</a:t>
+            </a:r>
+            <a:pPr algn="l" indent="0" marL="0">
+              <a:lnSpc>
+                <a:spcPts val="1620"/>
+              </a:lnSpc>
+              <a:spcAft>
+                <a:spcPts val="300"/>
+              </a:spcAft>
+              <a:buNone/>
+            </a:pPr>
+            <a:r>
+              <a:rPr lang="en-US" sz="1200" dirty="0">
+                <a:solidFill>
+                  <a:srgbClr val="1C2833"/>
+                </a:solidFill>
+                <a:latin typeface="Arial" pitchFamily="34" charset="0"/>
+                <a:ea typeface="Arial" pitchFamily="34" charset="-122"/>
+                <a:cs typeface="Arial" pitchFamily="34" charset="-120"/>
+              </a:rPr>
+              <a:t> Add a Day 6 — a "what I'll change if Day 5 doesn't work" contingency. Forces metacognition.</a:t>
+            </a:r>
+            <a:endParaRPr lang="en-US" sz="1200" dirty="0"/>
+          </a:p>
+          <a:p>
+            <a:pPr algn="l" marL="342900" indent="-342900">
+              <a:lnSpc>
+                <a:spcPts val="1620"/>
+              </a:lnSpc>
+              <a:spcAft>
+                <a:spcPts val="300"/>
+              </a:spcAft>
+              <a:buSzPct val="100000"/>
+              <a:buChar char="•"/>
+            </a:pPr>
+            <a:r>
+              <a:rPr lang="en-US" sz="1200" b="1" dirty="0">
+                <a:solidFill>
+                  <a:srgbClr val="1C2833"/>
+                </a:solidFill>
+                <a:latin typeface="Arial" pitchFamily="34" charset="0"/>
+                <a:ea typeface="Arial" pitchFamily="34" charset="-122"/>
+                <a:cs typeface="Arial" pitchFamily="34" charset="-120"/>
+              </a:rPr>
+              <a:t>One tier down:</a:t>
+            </a:r>
+            <a:pPr algn="l" indent="0" marL="0">
+              <a:lnSpc>
+                <a:spcPts val="1620"/>
+              </a:lnSpc>
+              <a:spcAft>
+                <a:spcPts val="300"/>
+              </a:spcAft>
+              <a:buNone/>
+            </a:pPr>
+            <a:r>
+              <a:rPr lang="en-US" sz="1200" dirty="0">
+                <a:solidFill>
+                  <a:srgbClr val="1C2833"/>
+                </a:solidFill>
+                <a:latin typeface="Arial" pitchFamily="34" charset="0"/>
+                <a:ea typeface="Arial" pitchFamily="34" charset="-122"/>
+                <a:cs typeface="Arial" pitchFamily="34" charset="-120"/>
+              </a:rPr>
+              <a:t> Stick to ONE change repeated daily. Five repetitions of the same change.</a:t>
+            </a:r>
+            <a:endParaRPr lang="en-US" sz="1200" dirty="0"/>
+          </a:p>
+        </p:txBody>
+      </p:sp>
+      <p:sp>
+        <p:nvSpPr>
+          <p:cNvPr id="5" name="Text 3"/>
+          <p:cNvSpPr/>
+          <p:nvPr/>
+        </p:nvSpPr>
+        <p:spPr>
+          <a:xfrm>
+            <a:off x="406301" y="4434929"/>
+            <a:ext cx="8498026" cy="213271"/>
+          </a:xfrm>
+          <a:prstGeom prst="rect">
+            <a:avLst/>
+          </a:prstGeom>
+          <a:noFill/>
+          <a:ln/>
+        </p:spPr>
+        <p:txBody>
+          <a:bodyPr wrap="square" lIns="0" tIns="0" rIns="0" bIns="0" rtlCol="0" anchor="t"/>
+          <a:lstStyle/>
+          <a:p>
+            <a:pPr algn="l" indent="0" marL="0">
+              <a:lnSpc>
+                <a:spcPts val="1680"/>
+              </a:lnSpc>
+              <a:spcBef>
+                <a:spcPts val="300"/>
+              </a:spcBef>
+              <a:spcAft>
+                <a:spcPts val="300"/>
+              </a:spcAft>
+              <a:buNone/>
+            </a:pPr>
+            <a:r>
+              <a:rPr lang="en-US" sz="1200" dirty="0">
+                <a:solidFill>
+                  <a:srgbClr val="1C2833"/>
+                </a:solidFill>
+                <a:latin typeface="Arial" pitchFamily="34" charset="0"/>
+                <a:ea typeface="Arial" pitchFamily="34" charset="-122"/>
+                <a:cs typeface="Arial" pitchFamily="34" charset="-120"/>
+              </a:rPr>
+              <a:t>Middle ·  · IKS Curriculum</a:t>
+            </a:r>
+            <a:endParaRPr lang="en-US" sz="1200" dirty="0"/>
+          </a:p>
+        </p:txBody>
+      </p:sp>
+    </p:spTree>
+  </p:cSld>
+  <p:clrMapOvr>
+    <a:masterClrMapping/>
+  </p:clrMapOvr>
+</p:sld>
+</file>
+
+<file path=ppt/slides/slide15.xml><?xml version="1.0" encoding="utf-8"?>
+<p:sld xmlns:a="http://schemas.openxmlformats.org/drawingml/2006/main" xmlns:r="http://schemas.openxmlformats.org/officeDocument/2006/relationships" xmlns:p="http://schemas.openxmlformats.org/presentationml/2006/main">
+  <p:cSld name="Slide 15">
+    <p:bg>
+      <p:bgPr>
+        <a:solidFill>
+          <a:srgbClr val="FFFFFF"/>
+        </a:solidFill>
+      </p:bgPr>
+    </p:bg>
+    <p:spTree>
+      <p:nvGrpSpPr>
+        <p:cNvPr id="1" name=""/>
+        <p:cNvGrpSpPr/>
+        <p:nvPr/>
+      </p:nvGrpSpPr>
+      <p:grpSpPr>
+        <a:xfrm>
+          <a:off x="0" y="0"/>
+          <a:ext cx="0" cy="0"/>
+          <a:chOff x="0" y="0"/>
+          <a:chExt cx="0" cy="0"/>
+        </a:xfrm>
+      </p:grpSpPr>
+      <p:sp>
+        <p:nvSpPr>
+          <p:cNvPr id="2" name="Text 0"/>
+          <p:cNvSpPr/>
+          <p:nvPr/>
+        </p:nvSpPr>
+        <p:spPr>
+          <a:xfrm>
+            <a:off x="0" y="0"/>
+            <a:ext cx="9144000" cy="101501"/>
+          </a:xfrm>
+          <a:prstGeom prst="rect">
+            <a:avLst/>
+          </a:prstGeom>
+          <a:solidFill>
+            <a:srgbClr val="277884"/>
+          </a:solidFill>
+          <a:ln/>
+        </p:spPr>
+        <p:txBody>
+          <a:bodyPr wrap="square" rtlCol="0" anchor="ctr"/>
+          <a:lstStyle/>
+          <a:p>
+            <a:pPr indent="0" marL="0">
+              <a:buNone/>
+            </a:pPr>
+            <a:endParaRPr lang="en-US" dirty="0"/>
+          </a:p>
+        </p:txBody>
+      </p:sp>
+      <p:sp>
+        <p:nvSpPr>
+          <p:cNvPr id="3" name="Text 1"/>
+          <p:cNvSpPr/>
+          <p:nvPr/>
+        </p:nvSpPr>
+        <p:spPr>
+          <a:xfrm>
+            <a:off x="406301" y="457051"/>
+            <a:ext cx="8498026" cy="274290"/>
+          </a:xfrm>
+          <a:prstGeom prst="rect">
+            <a:avLst/>
+          </a:prstGeom>
+          <a:noFill/>
+          <a:ln/>
+        </p:spPr>
+        <p:txBody>
+          <a:bodyPr wrap="square" lIns="0" tIns="0" rIns="0" bIns="0" rtlCol="0" anchor="t"/>
+          <a:lstStyle/>
+          <a:p>
+            <a:pPr algn="l" indent="0" marL="0">
+              <a:lnSpc>
+                <a:spcPts val="2160"/>
+              </a:lnSpc>
+              <a:spcBef>
+                <a:spcPts val="600"/>
+              </a:spcBef>
+              <a:spcAft>
+                <a:spcPts val="800"/>
+              </a:spcAft>
+              <a:buNone/>
+            </a:pPr>
+            <a:r>
+              <a:rPr lang="en-US" sz="1800" b="1" dirty="0">
+                <a:solidFill>
+                  <a:srgbClr val="FE4447"/>
+                </a:solidFill>
+                <a:latin typeface="Georgia" pitchFamily="34" charset="0"/>
+                <a:ea typeface="Georgia" pitchFamily="34" charset="-122"/>
+                <a:cs typeface="Georgia" pitchFamily="34" charset="-120"/>
+              </a:rPr>
+              <a:t>Teacher notes</a:t>
+            </a:r>
+            <a:endParaRPr lang="en-US" sz="1800" dirty="0"/>
+          </a:p>
+        </p:txBody>
+      </p:sp>
+      <p:sp>
+        <p:nvSpPr>
+          <p:cNvPr id="4" name="Text 2"/>
+          <p:cNvSpPr/>
+          <p:nvPr/>
+        </p:nvSpPr>
+        <p:spPr>
+          <a:xfrm>
+            <a:off x="634901" y="883593"/>
+            <a:ext cx="8102798" cy="1180802"/>
+          </a:xfrm>
+          <a:prstGeom prst="rect">
+            <a:avLst/>
+          </a:prstGeom>
+          <a:noFill/>
+          <a:ln/>
+        </p:spPr>
+        <p:txBody>
+          <a:bodyPr wrap="square" lIns="0" tIns="0" rIns="0" bIns="0" rtlCol="0" anchor="t"/>
+          <a:lstStyle/>
+          <a:p>
+            <a:pPr algn="l" marL="342900" indent="-342900">
+              <a:lnSpc>
+                <a:spcPts val="1620"/>
+              </a:lnSpc>
+              <a:spcAft>
+                <a:spcPts val="300"/>
+              </a:spcAft>
+              <a:buSzPct val="100000"/>
+              <a:buChar char="•"/>
+            </a:pPr>
+            <a:r>
+              <a:rPr lang="en-US" sz="1200" dirty="0">
+                <a:solidFill>
+                  <a:srgbClr val="1C2833"/>
+                </a:solidFill>
+                <a:latin typeface="Arial" pitchFamily="34" charset="0"/>
+                <a:ea typeface="Arial" pitchFamily="34" charset="-122"/>
+                <a:cs typeface="Arial" pitchFamily="34" charset="-120"/>
+              </a:rPr>
+              <a:t>Reject plans involving medication, fasting beyond skipping one snack, intense exercise programmes, or anything that touches existing care.</a:t>
+            </a:r>
+            <a:endParaRPr lang="en-US" sz="1200" dirty="0"/>
+          </a:p>
+          <a:p>
+            <a:pPr algn="l" marL="342900" indent="-342900">
+              <a:lnSpc>
+                <a:spcPts val="1620"/>
+              </a:lnSpc>
+              <a:spcAft>
+                <a:spcPts val="300"/>
+              </a:spcAft>
+              <a:buSzPct val="100000"/>
+              <a:buChar char="•"/>
+            </a:pPr>
+            <a:r>
+              <a:rPr lang="en-US" sz="1200" dirty="0">
+                <a:solidFill>
+                  <a:srgbClr val="1C2833"/>
+                </a:solidFill>
+                <a:latin typeface="Arial" pitchFamily="34" charset="0"/>
+                <a:ea typeface="Arial" pitchFamily="34" charset="-122"/>
+                <a:cs typeface="Arial" pitchFamily="34" charset="-120"/>
+              </a:rPr>
+              <a:t>Some students will copy their friend's plan. Each plan must be </a:t>
+            </a:r>
+            <a:pPr algn="l" indent="0" marL="0">
+              <a:lnSpc>
+                <a:spcPts val="1620"/>
+              </a:lnSpc>
+              <a:spcAft>
+                <a:spcPts val="300"/>
+              </a:spcAft>
+              <a:buNone/>
+            </a:pPr>
+            <a:r>
+              <a:rPr lang="en-US" sz="1200" i="1" dirty="0">
+                <a:solidFill>
+                  <a:srgbClr val="1C2833"/>
+                </a:solidFill>
+                <a:latin typeface="Arial" pitchFamily="34" charset="0"/>
+                <a:ea typeface="Arial" pitchFamily="34" charset="-122"/>
+                <a:cs typeface="Arial" pitchFamily="34" charset="-120"/>
+              </a:rPr>
+              <a:t>theirs</a:t>
+            </a:r>
+            <a:pPr algn="l" indent="0" marL="0">
+              <a:lnSpc>
+                <a:spcPts val="1620"/>
+              </a:lnSpc>
+              <a:spcAft>
+                <a:spcPts val="300"/>
+              </a:spcAft>
+              <a:buNone/>
+            </a:pPr>
+            <a:r>
+              <a:rPr lang="en-US" sz="1200" dirty="0">
+                <a:solidFill>
+                  <a:srgbClr val="1C2833"/>
+                </a:solidFill>
+                <a:latin typeface="Arial" pitchFamily="34" charset="0"/>
+                <a:ea typeface="Arial" pitchFamily="34" charset="-122"/>
+                <a:cs typeface="Arial" pitchFamily="34" charset="-120"/>
+              </a:rPr>
+              <a:t> (anchored to their own self-observation). Pair-work is fine if both partners agree on the target </a:t>
+            </a:r>
+            <a:pPr algn="l" indent="0" marL="0">
+              <a:lnSpc>
+                <a:spcPts val="1620"/>
+              </a:lnSpc>
+              <a:spcAft>
+                <a:spcPts val="300"/>
+              </a:spcAft>
+              <a:buNone/>
+            </a:pPr>
+            <a:r>
+              <a:rPr lang="en-US" sz="1200" i="1" dirty="0">
+                <a:solidFill>
+                  <a:srgbClr val="1C2833"/>
+                </a:solidFill>
+                <a:latin typeface="Arial" pitchFamily="34" charset="0"/>
+                <a:ea typeface="Arial" pitchFamily="34" charset="-122"/>
+                <a:cs typeface="Arial" pitchFamily="34" charset="-120"/>
+              </a:rPr>
+              <a:t>doṣa</a:t>
+            </a:r>
+            <a:pPr algn="l" indent="0" marL="0">
+              <a:lnSpc>
+                <a:spcPts val="1620"/>
+              </a:lnSpc>
+              <a:spcAft>
+                <a:spcPts val="300"/>
+              </a:spcAft>
+              <a:buNone/>
+            </a:pPr>
+            <a:r>
+              <a:rPr lang="en-US" sz="1200" dirty="0">
+                <a:solidFill>
+                  <a:srgbClr val="1C2833"/>
+                </a:solidFill>
+                <a:latin typeface="Arial" pitchFamily="34" charset="0"/>
+                <a:ea typeface="Arial" pitchFamily="34" charset="-122"/>
+                <a:cs typeface="Arial" pitchFamily="34" charset="-120"/>
+              </a:rPr>
+              <a:t>.</a:t>
+            </a:r>
+            <a:endParaRPr lang="en-US" sz="1200" dirty="0"/>
+          </a:p>
+          <a:p>
+            <a:pPr algn="l" marL="342900" indent="-342900">
+              <a:lnSpc>
+                <a:spcPts val="1620"/>
+              </a:lnSpc>
+              <a:spcAft>
+                <a:spcPts val="300"/>
+              </a:spcAft>
+              <a:buSzPct val="100000"/>
+              <a:buChar char="•"/>
+            </a:pPr>
+            <a:r>
+              <a:rPr lang="en-US" sz="1200" dirty="0">
+                <a:solidFill>
+                  <a:srgbClr val="1C2833"/>
+                </a:solidFill>
+                <a:latin typeface="Arial" pitchFamily="34" charset="0"/>
+                <a:ea typeface="Arial" pitchFamily="34" charset="-122"/>
+                <a:cs typeface="Arial" pitchFamily="34" charset="-120"/>
+              </a:rPr>
+              <a:t>The "one thing I will NOT do" prompt is important — it forces the safety lens.</a:t>
+            </a:r>
+            <a:endParaRPr lang="en-US" sz="1200" dirty="0"/>
+          </a:p>
+        </p:txBody>
+      </p:sp>
+      <p:sp>
+        <p:nvSpPr>
+          <p:cNvPr id="5" name="Text 3"/>
+          <p:cNvSpPr/>
+          <p:nvPr/>
+        </p:nvSpPr>
+        <p:spPr>
+          <a:xfrm>
+            <a:off x="406301" y="4434929"/>
+            <a:ext cx="8498026" cy="213271"/>
+          </a:xfrm>
+          <a:prstGeom prst="rect">
+            <a:avLst/>
+          </a:prstGeom>
+          <a:noFill/>
+          <a:ln/>
+        </p:spPr>
+        <p:txBody>
+          <a:bodyPr wrap="square" lIns="0" tIns="0" rIns="0" bIns="0" rtlCol="0" anchor="t"/>
+          <a:lstStyle/>
+          <a:p>
+            <a:pPr algn="l" indent="0" marL="0">
+              <a:lnSpc>
+                <a:spcPts val="1680"/>
+              </a:lnSpc>
+              <a:spcBef>
+                <a:spcPts val="300"/>
+              </a:spcBef>
+              <a:spcAft>
+                <a:spcPts val="300"/>
+              </a:spcAft>
+              <a:buNone/>
+            </a:pPr>
+            <a:r>
+              <a:rPr lang="en-US" sz="1200" dirty="0">
+                <a:solidFill>
+                  <a:srgbClr val="1C2833"/>
+                </a:solidFill>
+                <a:latin typeface="Arial" pitchFamily="34" charset="0"/>
+                <a:ea typeface="Arial" pitchFamily="34" charset="-122"/>
+                <a:cs typeface="Arial" pitchFamily="34" charset="-120"/>
+              </a:rPr>
+              <a:t>Middle ·  · IKS Curriculum</a:t>
+            </a:r>
+            <a:endParaRPr lang="en-US" sz="1200" dirty="0"/>
+          </a:p>
+        </p:txBody>
+      </p:sp>
+    </p:spTree>
+  </p:cSld>
+  <p:clrMapOvr>
+    <a:masterClrMapping/>
+  </p:clrMapOvr>
+</p:sld>
+</file>
+
+<file path=ppt/slides/slide16.xml><?xml version="1.0" encoding="utf-8"?>
+<p:sld xmlns:a="http://schemas.openxmlformats.org/drawingml/2006/main" xmlns:r="http://schemas.openxmlformats.org/officeDocument/2006/relationships" xmlns:p="http://schemas.openxmlformats.org/presentationml/2006/main">
+  <p:cSld name="Slide 16">
+    <p:bg>
+      <p:bgPr>
+        <a:solidFill>
+          <a:srgbClr val="FFFFFF"/>
+        </a:solidFill>
+      </p:bgPr>
+    </p:bg>
+    <p:spTree>
+      <p:nvGrpSpPr>
+        <p:cNvPr id="1" name=""/>
+        <p:cNvGrpSpPr/>
+        <p:nvPr/>
+      </p:nvGrpSpPr>
+      <p:grpSpPr>
+        <a:xfrm>
+          <a:off x="0" y="0"/>
+          <a:ext cx="0" cy="0"/>
+          <a:chOff x="0" y="0"/>
+          <a:chExt cx="0" cy="0"/>
+        </a:xfrm>
+      </p:grpSpPr>
+      <p:sp>
+        <p:nvSpPr>
+          <p:cNvPr id="2" name="Text 0"/>
+          <p:cNvSpPr/>
+          <p:nvPr/>
+        </p:nvSpPr>
+        <p:spPr>
+          <a:xfrm>
+            <a:off x="0" y="0"/>
+            <a:ext cx="9144000" cy="101501"/>
+          </a:xfrm>
+          <a:prstGeom prst="rect">
+            <a:avLst/>
+          </a:prstGeom>
+          <a:solidFill>
+            <a:srgbClr val="277884"/>
+          </a:solidFill>
+          <a:ln/>
+        </p:spPr>
+        <p:txBody>
+          <a:bodyPr wrap="square" rtlCol="0" anchor="ctr"/>
+          <a:lstStyle/>
+          <a:p>
+            <a:pPr indent="0" marL="0">
+              <a:buNone/>
+            </a:pPr>
+            <a:endParaRPr lang="en-US" dirty="0"/>
+          </a:p>
+        </p:txBody>
+      </p:sp>
+      <p:sp>
+        <p:nvSpPr>
+          <p:cNvPr id="3" name="Text 1"/>
+          <p:cNvSpPr/>
+          <p:nvPr/>
+        </p:nvSpPr>
+        <p:spPr>
+          <a:xfrm>
+            <a:off x="406301" y="457051"/>
+            <a:ext cx="8498026" cy="274290"/>
+          </a:xfrm>
+          <a:prstGeom prst="rect">
+            <a:avLst/>
+          </a:prstGeom>
+          <a:noFill/>
+          <a:ln/>
+        </p:spPr>
+        <p:txBody>
+          <a:bodyPr wrap="square" lIns="0" tIns="0" rIns="0" bIns="0" rtlCol="0" anchor="t"/>
+          <a:lstStyle/>
+          <a:p>
+            <a:pPr algn="l" indent="0" marL="0">
+              <a:lnSpc>
+                <a:spcPts val="2160"/>
+              </a:lnSpc>
+              <a:spcBef>
+                <a:spcPts val="600"/>
+              </a:spcBef>
+              <a:spcAft>
+                <a:spcPts val="800"/>
+              </a:spcAft>
+              <a:buNone/>
+            </a:pPr>
+            <a:r>
+              <a:rPr lang="en-US" sz="1800" b="1" dirty="0">
+                <a:solidFill>
+                  <a:srgbClr val="FE4447"/>
+                </a:solidFill>
+                <a:latin typeface="Georgia" pitchFamily="34" charset="0"/>
+                <a:ea typeface="Georgia" pitchFamily="34" charset="-122"/>
+                <a:cs typeface="Georgia" pitchFamily="34" charset="-120"/>
+              </a:rPr>
+              <a:t>Citation(s) used in this lesson</a:t>
+            </a:r>
+            <a:endParaRPr lang="en-US" sz="1800" dirty="0"/>
+          </a:p>
+        </p:txBody>
+      </p:sp>
+      <p:sp>
+        <p:nvSpPr>
+          <p:cNvPr id="4" name="Text 2"/>
+          <p:cNvSpPr/>
+          <p:nvPr/>
+        </p:nvSpPr>
+        <p:spPr>
+          <a:xfrm>
+            <a:off x="634901" y="883593"/>
+            <a:ext cx="8102798" cy="300930"/>
+          </a:xfrm>
+          <a:prstGeom prst="rect">
+            <a:avLst/>
+          </a:prstGeom>
+          <a:noFill/>
+          <a:ln/>
+        </p:spPr>
+        <p:txBody>
+          <a:bodyPr wrap="square" lIns="0" tIns="0" rIns="0" bIns="0" rtlCol="0" anchor="t"/>
+          <a:lstStyle/>
+          <a:p>
+            <a:pPr algn="l" marL="342900" indent="-342900">
+              <a:lnSpc>
+                <a:spcPts val="1620"/>
+              </a:lnSpc>
+              <a:spcAft>
+                <a:spcPts val="300"/>
+              </a:spcAft>
+              <a:buSzPct val="100000"/>
+              <a:buChar char="•"/>
+            </a:pPr>
+            <a:r>
+              <a:rPr lang="en-US" sz="1200" dirty="0">
+                <a:solidFill>
+                  <a:srgbClr val="1C2833"/>
+                </a:solidFill>
+                <a:latin typeface="Arial" pitchFamily="34" charset="0"/>
+                <a:ea typeface="Arial" pitchFamily="34" charset="-122"/>
+                <a:cs typeface="Arial" pitchFamily="34" charset="-120"/>
+              </a:rPr>
+              <a:t>No new citations today. Students choose from </a:t>
+            </a:r>
+            <a:pPr algn="l" indent="0" marL="0">
+              <a:lnSpc>
+                <a:spcPts val="1620"/>
+              </a:lnSpc>
+              <a:spcAft>
+                <a:spcPts val="300"/>
+              </a:spcAft>
+              <a:buNone/>
+            </a:pPr>
+            <a:r>
+              <a:rPr lang="en-US" sz="1200" dirty="0">
+                <a:solidFill>
+                  <a:srgbClr val="1C2833"/>
+                </a:solidFill>
+                <a:latin typeface="Arial" pitchFamily="34" charset="0"/>
+                <a:ea typeface="Arial" pitchFamily="34" charset="-122"/>
+                <a:cs typeface="Arial" pitchFamily="34" charset="-120"/>
+              </a:rPr>
               <a:t>sources.md</a:t>
             </a:r>
             <a:pPr algn="l" indent="0" marL="0">
               <a:lnSpc>
-                <a:spcPts val="1680"/>
-              </a:lnSpc>
-              <a:spcBef>
-                <a:spcPts val="300"/>
-              </a:spcBef>
+                <a:spcPts val="1620"/>
+              </a:lnSpc>
               <a:spcAft>
                 <a:spcPts val="300"/>
               </a:spcAft>
@@ -3250,7 +4709,7 @@
                 <a:ea typeface="Georgia" pitchFamily="34" charset="-122"/>
                 <a:cs typeface="Georgia" pitchFamily="34" charset="-120"/>
               </a:rPr>
-              <a:t>Materials</a:t>
+              <a:t>Learning objective</a:t>
             </a:r>
             <a:endParaRPr lang="en-US" sz="1800" dirty="0"/>
           </a:p>
@@ -3265,7 +4724,7 @@
         <p:spPr>
           <a:xfrm>
             <a:off x="406301" y="870942"/>
-            <a:ext cx="8498026" cy="445591"/>
+            <a:ext cx="8498026" cy="426541"/>
           </a:xfrm>
           <a:prstGeom prst="rect">
             <a:avLst/>
@@ -3298,7 +4757,7 @@
                 <a:ea typeface="Arial" pitchFamily="34" charset="-122"/>
                 <a:cs typeface="Arial" pitchFamily="34" charset="-120"/>
               </a:rPr>
-              <a:t>– Project brief printed (one per student) — see </a:t>
+              <a:t>By the end of this lesson, students have a one-page plan for their </a:t>
             </a:r>
             <a:pPr algn="l" indent="0" marL="0">
               <a:lnSpc>
@@ -3313,7 +4772,7 @@
               <a:buNone/>
             </a:pPr>
             <a:r>
-              <a:rPr lang="en-US" sz="1200" dirty="0">
+              <a:rPr lang="en-US" sz="1200" i="1" dirty="0">
                 <a:solidFill>
                   <a:srgbClr val="1C2833"/>
                 </a:solidFill>
@@ -3321,7 +4780,7 @@
                 <a:ea typeface="Arial" pitchFamily="34" charset="-122"/>
                 <a:cs typeface="Arial" pitchFamily="34" charset="-120"/>
               </a:rPr>
-              <a:t>assessments/project-brief.md</a:t>
+              <a:t>5-day doṣa-aware week</a:t>
             </a:r>
             <a:pPr algn="l" indent="0" marL="0">
               <a:lnSpc>
@@ -3344,7 +4803,7 @@
                 <a:ea typeface="Arial" pitchFamily="34" charset="-122"/>
                 <a:cs typeface="Arial" pitchFamily="34" charset="-120"/>
               </a:rPr>
-              <a:t> – Rubric printed (one per student) — see </a:t>
+              <a:t> project, with a chosen target </a:t>
             </a:r>
             <a:pPr algn="l" indent="0" marL="0">
               <a:lnSpc>
@@ -3359,7 +4818,7 @@
               <a:buNone/>
             </a:pPr>
             <a:r>
-              <a:rPr lang="en-US" sz="1200" dirty="0">
+              <a:rPr lang="en-US" sz="1200" i="1" dirty="0">
                 <a:solidFill>
                   <a:srgbClr val="1C2833"/>
                 </a:solidFill>
@@ -3367,7 +4826,7 @@
                 <a:ea typeface="Arial" pitchFamily="34" charset="-122"/>
                 <a:cs typeface="Arial" pitchFamily="34" charset="-120"/>
               </a:rPr>
-              <a:t>assessments/rubric.md</a:t>
+              <a:t>doṣa</a:t>
             </a:r>
             <a:pPr algn="l" indent="0" marL="0">
               <a:lnSpc>
@@ -3390,7 +4849,7 @@
                 <a:ea typeface="Arial" pitchFamily="34" charset="-122"/>
                 <a:cs typeface="Arial" pitchFamily="34" charset="-120"/>
               </a:rPr>
-              <a:t> – Lined paper for the plan – Coloured pens</a:t>
+              <a:t> tendency, three concrete daily changes, and the citation they will use.</a:t>
             </a:r>
             <a:endParaRPr lang="en-US" sz="1200" dirty="0"/>
           </a:p>
@@ -3548,7 +5007,7 @@
                 <a:ea typeface="Georgia" pitchFamily="34" charset="-122"/>
                 <a:cs typeface="Georgia" pitchFamily="34" charset="-120"/>
               </a:rPr>
-              <a:t>Lesson flow</a:t>
+              <a:t>Materials</a:t>
             </a:r>
             <a:endParaRPr lang="en-US" sz="1800" dirty="0"/>
           </a:p>
@@ -3557,6 +5016,164 @@
       <p:sp>
         <p:nvSpPr>
           <p:cNvPr id="4" name="Text 2"/>
+          <p:cNvSpPr/>
+          <p:nvPr/>
+        </p:nvSpPr>
+        <p:spPr>
+          <a:xfrm>
+            <a:off x="634901" y="883593"/>
+            <a:ext cx="8102798" cy="1051322"/>
+          </a:xfrm>
+          <a:prstGeom prst="rect">
+            <a:avLst/>
+          </a:prstGeom>
+          <a:noFill/>
+          <a:ln/>
+        </p:spPr>
+        <p:txBody>
+          <a:bodyPr wrap="square" lIns="0" tIns="0" rIns="0" bIns="0" rtlCol="0" anchor="t"/>
+          <a:lstStyle/>
+          <a:p>
+            <a:pPr algn="l" marL="342900" indent="-342900">
+              <a:lnSpc>
+                <a:spcPts val="1620"/>
+              </a:lnSpc>
+              <a:spcAft>
+                <a:spcPts val="300"/>
+              </a:spcAft>
+              <a:buSzPct val="100000"/>
+              <a:buChar char="•"/>
+            </a:pPr>
+            <a:r>
+              <a:rPr lang="en-US" sz="1200" dirty="0">
+                <a:solidFill>
+                  <a:srgbClr val="1C2833"/>
+                </a:solidFill>
+                <a:latin typeface="Arial" pitchFamily="34" charset="0"/>
+                <a:ea typeface="Arial" pitchFamily="34" charset="-122"/>
+                <a:cs typeface="Arial" pitchFamily="34" charset="-120"/>
+              </a:rPr>
+              <a:t>Project brief printed (one per student) — see </a:t>
+            </a:r>
+            <a:pPr algn="l" indent="0" marL="0">
+              <a:lnSpc>
+                <a:spcPts val="1620"/>
+              </a:lnSpc>
+              <a:spcAft>
+                <a:spcPts val="300"/>
+              </a:spcAft>
+              <a:buNone/>
+            </a:pPr>
+            <a:r>
+              <a:rPr lang="en-US" sz="1200" dirty="0">
+                <a:solidFill>
+                  <a:srgbClr val="1C2833"/>
+                </a:solidFill>
+                <a:latin typeface="Arial" pitchFamily="34" charset="0"/>
+                <a:ea typeface="Arial" pitchFamily="34" charset="-122"/>
+                <a:cs typeface="Arial" pitchFamily="34" charset="-120"/>
+              </a:rPr>
+              <a:t>assessments/project-brief.md</a:t>
+            </a:r>
+            <a:endParaRPr lang="en-US" sz="1200" dirty="0"/>
+          </a:p>
+          <a:p>
+            <a:pPr algn="l" marL="342900" indent="-342900">
+              <a:lnSpc>
+                <a:spcPts val="1620"/>
+              </a:lnSpc>
+              <a:spcAft>
+                <a:spcPts val="300"/>
+              </a:spcAft>
+              <a:buSzPct val="100000"/>
+              <a:buChar char="•"/>
+            </a:pPr>
+            <a:r>
+              <a:rPr lang="en-US" sz="1200" dirty="0">
+                <a:solidFill>
+                  <a:srgbClr val="1C2833"/>
+                </a:solidFill>
+                <a:latin typeface="Arial" pitchFamily="34" charset="0"/>
+                <a:ea typeface="Arial" pitchFamily="34" charset="-122"/>
+                <a:cs typeface="Arial" pitchFamily="34" charset="-120"/>
+              </a:rPr>
+              <a:t>Rubric printed (one per student) — see </a:t>
+            </a:r>
+            <a:pPr algn="l" indent="0" marL="0">
+              <a:lnSpc>
+                <a:spcPts val="1620"/>
+              </a:lnSpc>
+              <a:spcAft>
+                <a:spcPts val="300"/>
+              </a:spcAft>
+              <a:buNone/>
+            </a:pPr>
+            <a:r>
+              <a:rPr lang="en-US" sz="1200" dirty="0">
+                <a:solidFill>
+                  <a:srgbClr val="1C2833"/>
+                </a:solidFill>
+                <a:latin typeface="Arial" pitchFamily="34" charset="0"/>
+                <a:ea typeface="Arial" pitchFamily="34" charset="-122"/>
+                <a:cs typeface="Arial" pitchFamily="34" charset="-120"/>
+              </a:rPr>
+              <a:t>assessments/rubric.md</a:t>
+            </a:r>
+            <a:endParaRPr lang="en-US" sz="1200" dirty="0"/>
+          </a:p>
+          <a:p>
+            <a:pPr algn="l" marL="342900" indent="-342900">
+              <a:lnSpc>
+                <a:spcPts val="1620"/>
+              </a:lnSpc>
+              <a:spcAft>
+                <a:spcPts val="300"/>
+              </a:spcAft>
+              <a:buSzPct val="100000"/>
+              <a:buChar char="•"/>
+            </a:pPr>
+            <a:r>
+              <a:rPr lang="en-US" sz="1200" dirty="0">
+                <a:solidFill>
+                  <a:srgbClr val="1C2833"/>
+                </a:solidFill>
+                <a:latin typeface="Arial" pitchFamily="34" charset="0"/>
+                <a:ea typeface="Arial" pitchFamily="34" charset="-122"/>
+                <a:cs typeface="Arial" pitchFamily="34" charset="-120"/>
+              </a:rPr>
+              <a:t>Lined paper for the plan</a:t>
+            </a:r>
+            <a:endParaRPr lang="en-US" sz="1200" dirty="0"/>
+          </a:p>
+          <a:p>
+            <a:pPr algn="l" marL="342900" indent="-342900">
+              <a:lnSpc>
+                <a:spcPts val="1620"/>
+              </a:lnSpc>
+              <a:spcAft>
+                <a:spcPts val="300"/>
+              </a:spcAft>
+              <a:buSzPct val="100000"/>
+              <a:buChar char="•"/>
+            </a:pPr>
+            <a:r>
+              <a:rPr lang="en-US" sz="1200" dirty="0">
+                <a:solidFill>
+                  <a:srgbClr val="1C2833"/>
+                </a:solidFill>
+                <a:latin typeface="Arial" pitchFamily="34" charset="0"/>
+                <a:ea typeface="Arial" pitchFamily="34" charset="-122"/>
+                <a:cs typeface="Arial" pitchFamily="34" charset="-120"/>
+              </a:rPr>
+              <a:t>Coloured pens</a:t>
+            </a:r>
+            <a:endParaRPr lang="en-US" sz="1200" dirty="0"/>
+          </a:p>
+        </p:txBody>
+      </p:sp>
+      <p:sp>
+        <p:nvSpPr>
+          <p:cNvPr id="5" name="Text 3"/>
           <p:cNvSpPr/>
           <p:nvPr/>
         </p:nvSpPr>
@@ -3706,7 +5323,7 @@
                 <a:ea typeface="Georgia" pitchFamily="34" charset="-122"/>
                 <a:cs typeface="Georgia" pitchFamily="34" charset="-120"/>
               </a:rPr>
-              <a:t>Warm-up (5 min)</a:t>
+              <a:t>Lesson flow</a:t>
             </a:r>
             <a:endParaRPr lang="en-US" sz="1800" dirty="0"/>
           </a:p>
@@ -3715,100 +5332,6 @@
       <p:sp>
         <p:nvSpPr>
           <p:cNvPr id="4" name="Text 2"/>
-          <p:cNvSpPr/>
-          <p:nvPr/>
-        </p:nvSpPr>
-        <p:spPr>
-          <a:xfrm>
-            <a:off x="406301" y="870942"/>
-            <a:ext cx="8498026" cy="213271"/>
-          </a:xfrm>
-          <a:prstGeom prst="rect">
-            <a:avLst/>
-          </a:prstGeom>
-          <a:noFill/>
-          <a:ln/>
-        </p:spPr>
-        <p:txBody>
-          <a:bodyPr wrap="square" lIns="0" tIns="0" rIns="0" bIns="0" rtlCol="0" anchor="t"/>
-          <a:lstStyle/>
-          <a:p>
-            <a:pPr algn="l" indent="0" marL="0">
-              <a:lnSpc>
-                <a:spcPts val="1680"/>
-              </a:lnSpc>
-              <a:spcBef>
-                <a:spcPts val="300"/>
-              </a:spcBef>
-              <a:spcAft>
-                <a:spcPts val="300"/>
-              </a:spcAft>
-              <a:buNone/>
-            </a:pPr>
-            <a:r>
-              <a:rPr lang="en-US" sz="1200" dirty="0">
-                <a:solidFill>
-                  <a:srgbClr val="1C2833"/>
-                </a:solidFill>
-                <a:latin typeface="Arial" pitchFamily="34" charset="0"/>
-                <a:ea typeface="Arial" pitchFamily="34" charset="-122"/>
-                <a:cs typeface="Arial" pitchFamily="34" charset="-120"/>
-              </a:rPr>
-              <a:t>– Read aloud the project brief, top half. Take 2 student questions.</a:t>
-            </a:r>
-            <a:endParaRPr lang="en-US" sz="1200" dirty="0"/>
-          </a:p>
-        </p:txBody>
-      </p:sp>
-      <p:sp>
-        <p:nvSpPr>
-          <p:cNvPr id="5" name="Text 3"/>
-          <p:cNvSpPr/>
-          <p:nvPr/>
-        </p:nvSpPr>
-        <p:spPr>
-          <a:xfrm>
-            <a:off x="634901" y="1173063"/>
-            <a:ext cx="8102798" cy="281880"/>
-          </a:xfrm>
-          <a:prstGeom prst="rect">
-            <a:avLst/>
-          </a:prstGeom>
-          <a:noFill/>
-          <a:ln/>
-        </p:spPr>
-        <p:txBody>
-          <a:bodyPr wrap="square" lIns="0" tIns="0" rIns="0" bIns="0" rtlCol="0" anchor="t"/>
-          <a:lstStyle/>
-          <a:p>
-            <a:pPr algn="l" marL="342900" indent="-342900">
-              <a:lnSpc>
-                <a:spcPts val="1620"/>
-              </a:lnSpc>
-              <a:spcAft>
-                <a:spcPts val="300"/>
-              </a:spcAft>
-              <a:buSzPct val="100000"/>
-              <a:buChar char="•"/>
-            </a:pPr>
-            <a:r>
-              <a:rPr lang="en-US" sz="1200" i="1" dirty="0">
-                <a:solidFill>
-                  <a:srgbClr val="1C2833"/>
-                </a:solidFill>
-                <a:latin typeface="Arial" pitchFamily="34" charset="0"/>
-                <a:ea typeface="Arial" pitchFamily="34" charset="-122"/>
-                <a:cs typeface="Arial" pitchFamily="34" charset="-120"/>
-              </a:rPr>
-              <a:t>"By the end of today, every one of you walks out with a written plan paragraph + a list of three changes."</a:t>
-            </a:r>
-            <a:endParaRPr lang="en-US" sz="1200" dirty="0"/>
-          </a:p>
-        </p:txBody>
-      </p:sp>
-      <p:sp>
-        <p:nvSpPr>
-          <p:cNvPr id="6" name="Text 4"/>
           <p:cNvSpPr/>
           <p:nvPr/>
         </p:nvSpPr>
@@ -3958,7 +5481,7 @@
                 <a:ea typeface="Georgia" pitchFamily="34" charset="-122"/>
                 <a:cs typeface="Georgia" pitchFamily="34" charset="-120"/>
               </a:rPr>
-              <a:t>Core (5 min)</a:t>
+              <a:t>Warm-up (5 min)</a:t>
             </a:r>
             <a:endParaRPr lang="en-US" sz="1800" dirty="0"/>
           </a:p>
@@ -3973,7 +5496,7 @@
         <p:spPr>
           <a:xfrm>
             <a:off x="634901" y="883593"/>
-            <a:ext cx="8102798" cy="281880"/>
+            <a:ext cx="8102798" cy="525661"/>
           </a:xfrm>
           <a:prstGeom prst="rect">
             <a:avLst/>
@@ -3996,7 +5519,7 @@
               <a:buChar char="•"/>
             </a:pPr>
             <a:r>
-              <a:rPr lang="en-US" sz="1200" b="1" dirty="0">
+              <a:rPr lang="en-US" sz="1200" dirty="0">
                 <a:solidFill>
                   <a:srgbClr val="1C2833"/>
                 </a:solidFill>
@@ -4004,47 +5527,23 @@
                 <a:ea typeface="Arial" pitchFamily="34" charset="-122"/>
                 <a:cs typeface="Arial" pitchFamily="34" charset="-120"/>
               </a:rPr>
-              <a:t>The structure of the project — recap:</a:t>
+              <a:t>Read aloud the project brief, top half. Take 2 student questions.</a:t>
             </a:r>
             <a:endParaRPr lang="en-US" sz="1200" dirty="0"/>
           </a:p>
-        </p:txBody>
-      </p:sp>
-      <p:sp>
-        <p:nvSpPr>
-          <p:cNvPr id="5" name="Text 3"/>
-          <p:cNvSpPr/>
-          <p:nvPr/>
-        </p:nvSpPr>
-        <p:spPr>
-          <a:xfrm>
-            <a:off x="406301" y="1254323"/>
-            <a:ext cx="8498026" cy="649337"/>
-          </a:xfrm>
-          <a:prstGeom prst="rect">
-            <a:avLst/>
-          </a:prstGeom>
-          <a:noFill/>
-          <a:ln/>
-        </p:spPr>
-        <p:txBody>
-          <a:bodyPr wrap="square" lIns="0" tIns="0" rIns="0" bIns="0" rtlCol="0" anchor="t"/>
-          <a:lstStyle/>
-          <a:p>
-            <a:pPr algn="l" indent="0" marL="0">
-              <a:lnSpc>
-                <a:spcPts val="1680"/>
-              </a:lnSpc>
-              <a:spcBef>
-                <a:spcPts val="300"/>
-              </a:spcBef>
-              <a:spcAft>
-                <a:spcPts val="300"/>
-              </a:spcAft>
-              <a:buNone/>
-            </a:pPr>
-            <a:r>
-              <a:rPr lang="en-US" sz="1200" dirty="0">
+          <a:p>
+            <a:pPr algn="l" marL="342900" indent="-342900">
+              <a:lnSpc>
+                <a:spcPts val="1620"/>
+              </a:lnSpc>
+              <a:spcAft>
+                <a:spcPts val="300"/>
+              </a:spcAft>
+              <a:buSzPct val="100000"/>
+              <a:buChar char="•"/>
+            </a:pPr>
+            <a:r>
+              <a:rPr lang="en-US" sz="1200" i="1" dirty="0">
                 <a:solidFill>
                   <a:srgbClr val="1C2833"/>
                 </a:solidFill>
@@ -4052,237 +5551,7 @@
                 <a:ea typeface="Arial" pitchFamily="34" charset="-122"/>
                 <a:cs typeface="Arial" pitchFamily="34" charset="-120"/>
               </a:rPr>
-              <a:t>– Pick ONE </a:t>
-            </a:r>
-            <a:pPr algn="l" indent="0" marL="0">
-              <a:lnSpc>
-                <a:spcPts val="1680"/>
-              </a:lnSpc>
-              <a:spcBef>
-                <a:spcPts val="300"/>
-              </a:spcBef>
-              <a:spcAft>
-                <a:spcPts val="300"/>
-              </a:spcAft>
-              <a:buNone/>
-            </a:pPr>
-            <a:r>
-              <a:rPr lang="en-US" sz="1200" i="1" dirty="0">
-                <a:solidFill>
-                  <a:srgbClr val="1C2833"/>
-                </a:solidFill>
-                <a:latin typeface="Arial" pitchFamily="34" charset="0"/>
-                <a:ea typeface="Arial" pitchFamily="34" charset="-122"/>
-                <a:cs typeface="Arial" pitchFamily="34" charset="-120"/>
-              </a:rPr>
-              <a:t>doṣa</a:t>
-            </a:r>
-            <a:pPr algn="l" indent="0" marL="0">
-              <a:lnSpc>
-                <a:spcPts val="1680"/>
-              </a:lnSpc>
-              <a:spcBef>
-                <a:spcPts val="300"/>
-              </a:spcBef>
-              <a:spcAft>
-                <a:spcPts val="300"/>
-              </a:spcAft>
-              <a:buNone/>
-            </a:pPr>
-            <a:r>
-              <a:rPr lang="en-US" sz="1200" dirty="0">
-                <a:solidFill>
-                  <a:srgbClr val="1C2833"/>
-                </a:solidFill>
-                <a:latin typeface="Arial" pitchFamily="34" charset="0"/>
-                <a:ea typeface="Arial" pitchFamily="34" charset="-122"/>
-                <a:cs typeface="Arial" pitchFamily="34" charset="-120"/>
-              </a:rPr>
-              <a:t> tendency you've noticed in yourself (from Day 3 worksheet — privately). – Design 5 days of small, realistic changes that would </a:t>
-            </a:r>
-            <a:pPr algn="l" indent="0" marL="0">
-              <a:lnSpc>
-                <a:spcPts val="1680"/>
-              </a:lnSpc>
-              <a:spcBef>
-                <a:spcPts val="300"/>
-              </a:spcBef>
-              <a:spcAft>
-                <a:spcPts val="300"/>
-              </a:spcAft>
-              <a:buNone/>
-            </a:pPr>
-            <a:r>
-              <a:rPr lang="en-US" sz="1200" i="1" dirty="0">
-                <a:solidFill>
-                  <a:srgbClr val="1C2833"/>
-                </a:solidFill>
-                <a:latin typeface="Arial" pitchFamily="34" charset="0"/>
-                <a:ea typeface="Arial" pitchFamily="34" charset="-122"/>
-                <a:cs typeface="Arial" pitchFamily="34" charset="-120"/>
-              </a:rPr>
-              <a:t>support balance</a:t>
-            </a:r>
-            <a:pPr algn="l" indent="0" marL="0">
-              <a:lnSpc>
-                <a:spcPts val="1680"/>
-              </a:lnSpc>
-              <a:spcBef>
-                <a:spcPts val="300"/>
-              </a:spcBef>
-              <a:spcAft>
-                <a:spcPts val="300"/>
-              </a:spcAft>
-              <a:buNone/>
-            </a:pPr>
-            <a:r>
-              <a:rPr lang="en-US" sz="1200" dirty="0">
-                <a:solidFill>
-                  <a:srgbClr val="1C2833"/>
-                </a:solidFill>
-                <a:latin typeface="Arial" pitchFamily="34" charset="0"/>
-                <a:ea typeface="Arial" pitchFamily="34" charset="-122"/>
-                <a:cs typeface="Arial" pitchFamily="34" charset="-120"/>
-              </a:rPr>
-              <a:t> for that </a:t>
-            </a:r>
-            <a:pPr algn="l" indent="0" marL="0">
-              <a:lnSpc>
-                <a:spcPts val="1680"/>
-              </a:lnSpc>
-              <a:spcBef>
-                <a:spcPts val="300"/>
-              </a:spcBef>
-              <a:spcAft>
-                <a:spcPts val="300"/>
-              </a:spcAft>
-              <a:buNone/>
-            </a:pPr>
-            <a:r>
-              <a:rPr lang="en-US" sz="1200" i="1" dirty="0">
-                <a:solidFill>
-                  <a:srgbClr val="1C2833"/>
-                </a:solidFill>
-                <a:latin typeface="Arial" pitchFamily="34" charset="0"/>
-                <a:ea typeface="Arial" pitchFamily="34" charset="-122"/>
-                <a:cs typeface="Arial" pitchFamily="34" charset="-120"/>
-              </a:rPr>
-              <a:t>doṣa</a:t>
-            </a:r>
-            <a:pPr algn="l" indent="0" marL="0">
-              <a:lnSpc>
-                <a:spcPts val="1680"/>
-              </a:lnSpc>
-              <a:spcBef>
-                <a:spcPts val="300"/>
-              </a:spcBef>
-              <a:spcAft>
-                <a:spcPts val="300"/>
-              </a:spcAft>
-              <a:buNone/>
-            </a:pPr>
-            <a:r>
-              <a:rPr lang="en-US" sz="1200" dirty="0">
-                <a:solidFill>
-                  <a:srgbClr val="1C2833"/>
-                </a:solidFill>
-                <a:latin typeface="Arial" pitchFamily="34" charset="0"/>
-                <a:ea typeface="Arial" pitchFamily="34" charset="-122"/>
-                <a:cs typeface="Arial" pitchFamily="34" charset="-120"/>
-              </a:rPr>
-              <a:t>. – Show: (a) what each change is, (b) which </a:t>
-            </a:r>
-            <a:pPr algn="l" indent="0" marL="0">
-              <a:lnSpc>
-                <a:spcPts val="1680"/>
-              </a:lnSpc>
-              <a:spcBef>
-                <a:spcPts val="300"/>
-              </a:spcBef>
-              <a:spcAft>
-                <a:spcPts val="300"/>
-              </a:spcAft>
-              <a:buNone/>
-            </a:pPr>
-            <a:r>
-              <a:rPr lang="en-US" sz="1200" i="1" dirty="0">
-                <a:solidFill>
-                  <a:srgbClr val="1C2833"/>
-                </a:solidFill>
-                <a:latin typeface="Arial" pitchFamily="34" charset="0"/>
-                <a:ea typeface="Arial" pitchFamily="34" charset="-122"/>
-                <a:cs typeface="Arial" pitchFamily="34" charset="-120"/>
-              </a:rPr>
-              <a:t>doṣa</a:t>
-            </a:r>
-            <a:pPr algn="l" indent="0" marL="0">
-              <a:lnSpc>
-                <a:spcPts val="1680"/>
-              </a:lnSpc>
-              <a:spcBef>
-                <a:spcPts val="300"/>
-              </a:spcBef>
-              <a:spcAft>
-                <a:spcPts val="300"/>
-              </a:spcAft>
-              <a:buNone/>
-            </a:pPr>
-            <a:r>
-              <a:rPr lang="en-US" sz="1200" dirty="0">
-                <a:solidFill>
-                  <a:srgbClr val="1C2833"/>
-                </a:solidFill>
-                <a:latin typeface="Arial" pitchFamily="34" charset="0"/>
-                <a:ea typeface="Arial" pitchFamily="34" charset="-122"/>
-                <a:cs typeface="Arial" pitchFamily="34" charset="-120"/>
-              </a:rPr>
-              <a:t> concept it relates to, (c) one citation from </a:t>
-            </a:r>
-            <a:pPr algn="l" indent="0" marL="0">
-              <a:lnSpc>
-                <a:spcPts val="1680"/>
-              </a:lnSpc>
-              <a:spcBef>
-                <a:spcPts val="300"/>
-              </a:spcBef>
-              <a:spcAft>
-                <a:spcPts val="300"/>
-              </a:spcAft>
-              <a:buNone/>
-            </a:pPr>
-            <a:r>
-              <a:rPr lang="en-US" sz="1200" dirty="0">
-                <a:solidFill>
-                  <a:srgbClr val="1C2833"/>
-                </a:solidFill>
-                <a:latin typeface="Arial" pitchFamily="34" charset="0"/>
-                <a:ea typeface="Arial" pitchFamily="34" charset="-122"/>
-                <a:cs typeface="Arial" pitchFamily="34" charset="-120"/>
-              </a:rPr>
-              <a:t>sources.md</a:t>
-            </a:r>
-            <a:pPr algn="l" indent="0" marL="0">
-              <a:lnSpc>
-                <a:spcPts val="1680"/>
-              </a:lnSpc>
-              <a:spcBef>
-                <a:spcPts val="300"/>
-              </a:spcBef>
-              <a:spcAft>
-                <a:spcPts val="300"/>
-              </a:spcAft>
-              <a:buNone/>
-            </a:pPr>
-            <a:r>
-              <a:rPr lang="en-US" sz="1200" dirty="0">
-                <a:solidFill>
-                  <a:srgbClr val="1C2833"/>
-                </a:solidFill>
-                <a:latin typeface="Arial" pitchFamily="34" charset="0"/>
-                <a:ea typeface="Arial" pitchFamily="34" charset="-122"/>
-                <a:cs typeface="Arial" pitchFamily="34" charset="-120"/>
-              </a:rPr>
-              <a:t>. – Present in 3 minutes on Day 10.</a:t>
+              <a:t>"By the end of today, every one of you walks out with a written plan paragraph + a list of three changes."</a:t>
             </a:r>
             <a:endParaRPr lang="en-US" sz="1200" dirty="0"/>
           </a:p>
@@ -4290,159 +5559,7 @@
       </p:sp>
       <p:sp>
         <p:nvSpPr>
-          <p:cNvPr id="6" name="Text 4"/>
-          <p:cNvSpPr/>
-          <p:nvPr/>
-        </p:nvSpPr>
-        <p:spPr>
-          <a:xfrm>
-            <a:off x="634901" y="1992511"/>
-            <a:ext cx="8102798" cy="487561"/>
-          </a:xfrm>
-          <a:prstGeom prst="rect">
-            <a:avLst/>
-          </a:prstGeom>
-          <a:noFill/>
-          <a:ln/>
-        </p:spPr>
-        <p:txBody>
-          <a:bodyPr wrap="square" lIns="0" tIns="0" rIns="0" bIns="0" rtlCol="0" anchor="t"/>
-          <a:lstStyle/>
-          <a:p>
-            <a:pPr algn="l" marL="342900" indent="-342900">
-              <a:lnSpc>
-                <a:spcPts val="1620"/>
-              </a:lnSpc>
-              <a:spcAft>
-                <a:spcPts val="300"/>
-              </a:spcAft>
-              <a:buSzPct val="100000"/>
-              <a:buChar char="•"/>
-            </a:pPr>
-            <a:r>
-              <a:rPr lang="en-US" sz="1200" b="1" dirty="0">
-                <a:solidFill>
-                  <a:srgbClr val="1C2833"/>
-                </a:solidFill>
-                <a:latin typeface="Arial" pitchFamily="34" charset="0"/>
-                <a:ea typeface="Arial" pitchFamily="34" charset="-122"/>
-                <a:cs typeface="Arial" pitchFamily="34" charset="-120"/>
-              </a:rPr>
-              <a:t>Realistic, not heroic.</a:t>
-            </a:r>
-            <a:pPr algn="l" indent="0" marL="0">
-              <a:lnSpc>
-                <a:spcPts val="1620"/>
-              </a:lnSpc>
-              <a:spcAft>
-                <a:spcPts val="300"/>
-              </a:spcAft>
-              <a:buNone/>
-            </a:pPr>
-            <a:r>
-              <a:rPr lang="en-US" sz="1200" dirty="0">
-                <a:solidFill>
-                  <a:srgbClr val="1C2833"/>
-                </a:solidFill>
-                <a:latin typeface="Arial" pitchFamily="34" charset="0"/>
-                <a:ea typeface="Arial" pitchFamily="34" charset="-122"/>
-                <a:cs typeface="Arial" pitchFamily="34" charset="-120"/>
-              </a:rPr>
-              <a:t> </a:t>
-            </a:r>
-            <a:pPr algn="l" indent="0" marL="0">
-              <a:lnSpc>
-                <a:spcPts val="1620"/>
-              </a:lnSpc>
-              <a:spcAft>
-                <a:spcPts val="300"/>
-              </a:spcAft>
-              <a:buNone/>
-            </a:pPr>
-            <a:r>
-              <a:rPr lang="en-US" sz="1200" i="1" dirty="0">
-                <a:solidFill>
-                  <a:srgbClr val="1C2833"/>
-                </a:solidFill>
-                <a:latin typeface="Arial" pitchFamily="34" charset="0"/>
-                <a:ea typeface="Arial" pitchFamily="34" charset="-122"/>
-                <a:cs typeface="Arial" pitchFamily="34" charset="-120"/>
-              </a:rPr>
-              <a:t>"Don't write '5 am wake' if you currently wake at 7 am. The point is honest small adjustment — not transformation."</a:t>
-            </a:r>
-            <a:endParaRPr lang="en-US" sz="1200" dirty="0"/>
-          </a:p>
-        </p:txBody>
-      </p:sp>
-      <p:sp>
-        <p:nvSpPr>
-          <p:cNvPr id="7" name="Text 5"/>
-          <p:cNvSpPr/>
-          <p:nvPr/>
-        </p:nvSpPr>
-        <p:spPr>
-          <a:xfrm>
-            <a:off x="634901" y="2581573"/>
-            <a:ext cx="8102798" cy="487561"/>
-          </a:xfrm>
-          <a:prstGeom prst="rect">
-            <a:avLst/>
-          </a:prstGeom>
-          <a:noFill/>
-          <a:ln/>
-        </p:spPr>
-        <p:txBody>
-          <a:bodyPr wrap="square" lIns="0" tIns="0" rIns="0" bIns="0" rtlCol="0" anchor="t"/>
-          <a:lstStyle/>
-          <a:p>
-            <a:pPr algn="l" marL="342900" indent="-342900">
-              <a:lnSpc>
-                <a:spcPts val="1620"/>
-              </a:lnSpc>
-              <a:spcAft>
-                <a:spcPts val="300"/>
-              </a:spcAft>
-              <a:buSzPct val="100000"/>
-              <a:buChar char="•"/>
-            </a:pPr>
-            <a:r>
-              <a:rPr lang="en-US" sz="1200" b="1" dirty="0">
-                <a:solidFill>
-                  <a:srgbClr val="1C2833"/>
-                </a:solidFill>
-                <a:latin typeface="Arial" pitchFamily="34" charset="0"/>
-                <a:ea typeface="Arial" pitchFamily="34" charset="-122"/>
-                <a:cs typeface="Arial" pitchFamily="34" charset="-120"/>
-              </a:rPr>
-              <a:t>Show the rubric.</a:t>
-            </a:r>
-            <a:pPr algn="l" indent="0" marL="0">
-              <a:lnSpc>
-                <a:spcPts val="1620"/>
-              </a:lnSpc>
-              <a:spcAft>
-                <a:spcPts val="300"/>
-              </a:spcAft>
-              <a:buNone/>
-            </a:pPr>
-            <a:r>
-              <a:rPr lang="en-US" sz="1200" dirty="0">
-                <a:solidFill>
-                  <a:srgbClr val="1C2833"/>
-                </a:solidFill>
-                <a:latin typeface="Arial" pitchFamily="34" charset="0"/>
-                <a:ea typeface="Arial" pitchFamily="34" charset="-122"/>
-                <a:cs typeface="Arial" pitchFamily="34" charset="-120"/>
-              </a:rPr>
-              <a:t> Walk through quickly. Highlight the "Use of sources" criterion — they must cite Caraka or Aṣṭāṅga Hṛdaya by reference. Paraphrase OK.</a:t>
-            </a:r>
-            <a:endParaRPr lang="en-US" sz="1200" dirty="0"/>
-          </a:p>
-        </p:txBody>
-      </p:sp>
-      <p:sp>
-        <p:nvSpPr>
-          <p:cNvPr id="8" name="Text 6"/>
+          <p:cNvPr id="5" name="Text 3"/>
           <p:cNvSpPr/>
           <p:nvPr/>
         </p:nvSpPr>
@@ -4592,7 +5709,7 @@
                 <a:ea typeface="Georgia" pitchFamily="34" charset="-122"/>
                 <a:cs typeface="Georgia" pitchFamily="34" charset="-120"/>
               </a:rPr>
-              <a:t>Activity (30 min) — Plan writing</a:t>
+              <a:t>Core (5 min)</a:t>
             </a:r>
             <a:endParaRPr lang="en-US" sz="1800" dirty="0"/>
           </a:p>
@@ -4606,8 +5723,8 @@
         </p:nvSpPr>
         <p:spPr>
           <a:xfrm>
-            <a:off x="406301" y="870942"/>
-            <a:ext cx="8498026" cy="213271"/>
+            <a:off x="634901" y="883593"/>
+            <a:ext cx="8102798" cy="281880"/>
           </a:xfrm>
           <a:prstGeom prst="rect">
             <a:avLst/>
@@ -4619,20 +5736,18 @@
           <a:bodyPr wrap="square" lIns="0" tIns="0" rIns="0" bIns="0" rtlCol="0" anchor="t"/>
           <a:lstStyle/>
           <a:p>
-            <a:pPr algn="l" indent="0" marL="0">
-              <a:lnSpc>
-                <a:spcPts val="1680"/>
-              </a:lnSpc>
-              <a:spcBef>
-                <a:spcPts val="300"/>
-              </a:spcBef>
-              <a:spcAft>
-                <a:spcPts val="300"/>
-              </a:spcAft>
-              <a:buNone/>
-            </a:pPr>
-            <a:r>
-              <a:rPr lang="en-US" sz="1200" dirty="0">
+            <a:pPr algn="l" marL="342900" indent="-342900">
+              <a:lnSpc>
+                <a:spcPts val="1620"/>
+              </a:lnSpc>
+              <a:spcAft>
+                <a:spcPts val="300"/>
+              </a:spcAft>
+              <a:buSzPct val="100000"/>
+              <a:buChar char="•"/>
+            </a:pPr>
+            <a:r>
+              <a:rPr lang="en-US" sz="1200" b="1" dirty="0">
                 <a:solidFill>
                   <a:srgbClr val="1C2833"/>
                 </a:solidFill>
@@ -4640,22 +5755,45 @@
                 <a:ea typeface="Arial" pitchFamily="34" charset="-122"/>
                 <a:cs typeface="Arial" pitchFamily="34" charset="-120"/>
               </a:rPr>
-              <a:t>Students work individually (or in pairs if their target </a:t>
-            </a:r>
-            <a:pPr algn="l" indent="0" marL="0">
-              <a:lnSpc>
-                <a:spcPts val="1680"/>
-              </a:lnSpc>
-              <a:spcBef>
-                <a:spcPts val="300"/>
-              </a:spcBef>
-              <a:spcAft>
-                <a:spcPts val="300"/>
-              </a:spcAft>
-              <a:buNone/>
-            </a:pPr>
-            <a:r>
-              <a:rPr lang="en-US" sz="1200" i="1" dirty="0">
+              <a:t>The structure of the project — recap:</a:t>
+            </a:r>
+            <a:endParaRPr lang="en-US" sz="1200" dirty="0"/>
+          </a:p>
+        </p:txBody>
+      </p:sp>
+      <p:sp>
+        <p:nvSpPr>
+          <p:cNvPr id="5" name="Text 3"/>
+          <p:cNvSpPr/>
+          <p:nvPr/>
+        </p:nvSpPr>
+        <p:spPr>
+          <a:xfrm>
+            <a:off x="634901" y="1266974"/>
+            <a:ext cx="8102798" cy="1032272"/>
+          </a:xfrm>
+          <a:prstGeom prst="rect">
+            <a:avLst/>
+          </a:prstGeom>
+          <a:noFill/>
+          <a:ln/>
+        </p:spPr>
+        <p:txBody>
+          <a:bodyPr wrap="square" lIns="0" tIns="0" rIns="0" bIns="0" rtlCol="0" anchor="t"/>
+          <a:lstStyle/>
+          <a:p>
+            <a:pPr algn="l" marL="342900" indent="-342900">
+              <a:lnSpc>
+                <a:spcPts val="1620"/>
+              </a:lnSpc>
+              <a:spcAft>
+                <a:spcPts val="300"/>
+              </a:spcAft>
+              <a:buSzPct val="100000"/>
+              <a:buChar char="•"/>
+            </a:pPr>
+            <a:r>
+              <a:rPr lang="en-US" sz="1200" dirty="0">
                 <a:solidFill>
                   <a:srgbClr val="1C2833"/>
                 </a:solidFill>
@@ -4663,22 +5801,19 @@
                 <a:ea typeface="Arial" pitchFamily="34" charset="-122"/>
                 <a:cs typeface="Arial" pitchFamily="34" charset="-120"/>
               </a:rPr>
-              <a:t>doṣa</a:t>
-            </a:r>
-            <a:pPr algn="l" indent="0" marL="0">
-              <a:lnSpc>
-                <a:spcPts val="1680"/>
-              </a:lnSpc>
-              <a:spcBef>
-                <a:spcPts val="300"/>
-              </a:spcBef>
-              <a:spcAft>
-                <a:spcPts val="300"/>
-              </a:spcAft>
-              <a:buNone/>
-            </a:pPr>
-            <a:r>
-              <a:rPr lang="en-US" sz="1200" dirty="0">
+              <a:t>Pick ONE </a:t>
+            </a:r>
+            <a:pPr algn="l" indent="0" marL="0">
+              <a:lnSpc>
+                <a:spcPts val="1620"/>
+              </a:lnSpc>
+              <a:spcAft>
+                <a:spcPts val="300"/>
+              </a:spcAft>
+              <a:buNone/>
+            </a:pPr>
+            <a:r>
+              <a:rPr lang="en-US" sz="1200" i="1" dirty="0">
                 <a:solidFill>
                   <a:srgbClr val="1C2833"/>
                 </a:solidFill>
@@ -4686,47 +5821,19 @@
                 <a:ea typeface="Arial" pitchFamily="34" charset="-122"/>
                 <a:cs typeface="Arial" pitchFamily="34" charset="-120"/>
               </a:rPr>
-              <a:t> is the same).</a:t>
-            </a:r>
-            <a:endParaRPr lang="en-US" sz="1200" dirty="0"/>
-          </a:p>
-        </p:txBody>
-      </p:sp>
-      <p:sp>
-        <p:nvSpPr>
-          <p:cNvPr id="5" name="Text 3"/>
-          <p:cNvSpPr/>
-          <p:nvPr/>
-        </p:nvSpPr>
-        <p:spPr>
-          <a:xfrm>
-            <a:off x="406301" y="1160413"/>
-            <a:ext cx="8498026" cy="213271"/>
-          </a:xfrm>
-          <a:prstGeom prst="rect">
-            <a:avLst/>
-          </a:prstGeom>
-          <a:noFill/>
-          <a:ln/>
-        </p:spPr>
-        <p:txBody>
-          <a:bodyPr wrap="square" lIns="0" tIns="0" rIns="0" bIns="0" rtlCol="0" anchor="t"/>
-          <a:lstStyle/>
-          <a:p>
-            <a:pPr algn="l" indent="0" marL="0">
-              <a:lnSpc>
-                <a:spcPts val="1680"/>
-              </a:lnSpc>
-              <a:spcBef>
-                <a:spcPts val="300"/>
-              </a:spcBef>
-              <a:spcAft>
-                <a:spcPts val="300"/>
-              </a:spcAft>
-              <a:buNone/>
-            </a:pPr>
-            <a:r>
-              <a:rPr lang="en-US" sz="1200" b="1" dirty="0">
+              <a:t>doṣa</a:t>
+            </a:r>
+            <a:pPr algn="l" indent="0" marL="0">
+              <a:lnSpc>
+                <a:spcPts val="1620"/>
+              </a:lnSpc>
+              <a:spcAft>
+                <a:spcPts val="300"/>
+              </a:spcAft>
+              <a:buNone/>
+            </a:pPr>
+            <a:r>
+              <a:rPr lang="en-US" sz="1200" dirty="0">
                 <a:solidFill>
                   <a:srgbClr val="1C2833"/>
                 </a:solidFill>
@@ -4734,19 +5841,20 @@
                 <a:ea typeface="Arial" pitchFamily="34" charset="-122"/>
                 <a:cs typeface="Arial" pitchFamily="34" charset="-120"/>
               </a:rPr>
-              <a:t>The plan template</a:t>
-            </a:r>
-            <a:pPr algn="l" indent="0" marL="0">
-              <a:lnSpc>
-                <a:spcPts val="1680"/>
-              </a:lnSpc>
-              <a:spcBef>
-                <a:spcPts val="300"/>
-              </a:spcBef>
-              <a:spcAft>
-                <a:spcPts val="300"/>
-              </a:spcAft>
-              <a:buNone/>
+              <a:t> tendency you've noticed in yourself (from Day 3 worksheet — privately).</a:t>
+            </a:r>
+            <a:endParaRPr lang="en-US" sz="1200" dirty="0"/>
+          </a:p>
+          <a:p>
+            <a:pPr algn="l" marL="342900" indent="-342900">
+              <a:lnSpc>
+                <a:spcPts val="1620"/>
+              </a:lnSpc>
+              <a:spcAft>
+                <a:spcPts val="300"/>
+              </a:spcAft>
+              <a:buSzPct val="100000"/>
+              <a:buChar char="•"/>
             </a:pPr>
             <a:r>
               <a:rPr lang="en-US" sz="1200" dirty="0">
@@ -4757,1444 +5865,19 @@
                 <a:ea typeface="Arial" pitchFamily="34" charset="-122"/>
                 <a:cs typeface="Arial" pitchFamily="34" charset="-120"/>
               </a:rPr>
-              <a:t> (write on the board for students to copy onto their plan page):</a:t>
-            </a:r>
-            <a:endParaRPr lang="en-US" sz="1200" dirty="0"/>
-          </a:p>
-        </p:txBody>
-      </p:sp>
-      <p:sp>
-        <p:nvSpPr>
-          <p:cNvPr id="6" name="Text 4"/>
-          <p:cNvSpPr/>
-          <p:nvPr/>
-        </p:nvSpPr>
-        <p:spPr>
-          <a:xfrm>
-            <a:off x="406301" y="1462534"/>
-            <a:ext cx="8331398" cy="7062341"/>
-          </a:xfrm>
-          <a:prstGeom prst="rect">
-            <a:avLst/>
-          </a:prstGeom>
-          <a:solidFill>
-            <a:srgbClr val="F4F8F9"/>
-          </a:solidFill>
-          <a:ln/>
-        </p:spPr>
-        <p:txBody>
-          <a:bodyPr wrap="square" rtlCol="0" anchor="ctr"/>
-          <a:lstStyle/>
-          <a:p>
-            <a:pPr indent="0" marL="0">
-              <a:buNone/>
-            </a:pPr>
-            <a:endParaRPr lang="en-US" dirty="0"/>
-          </a:p>
-        </p:txBody>
-      </p:sp>
-      <p:sp>
-        <p:nvSpPr>
-          <p:cNvPr id="7" name="Shape 5"/>
-          <p:cNvSpPr/>
-          <p:nvPr/>
-        </p:nvSpPr>
-        <p:spPr>
-          <a:xfrm>
-            <a:off x="430113" y="1462534"/>
-            <a:ext cx="0" cy="7062341"/>
-          </a:xfrm>
-          <a:prstGeom prst="line">
-            <a:avLst/>
-          </a:prstGeom>
-          <a:noFill/>
-          <a:ln w="47625">
-            <a:solidFill>
-              <a:srgbClr val="277884"/>
-            </a:solidFill>
-            <a:prstDash val="solid"/>
-          </a:ln>
-        </p:spPr>
-      </p:sp>
-      <p:sp>
-        <p:nvSpPr>
-          <p:cNvPr id="8" name="Text 6"/>
-          <p:cNvSpPr/>
-          <p:nvPr/>
-        </p:nvSpPr>
-        <p:spPr>
-          <a:xfrm>
-            <a:off x="631627" y="1589484"/>
-            <a:ext cx="8086939" cy="174575"/>
-          </a:xfrm>
-          <a:prstGeom prst="rect">
-            <a:avLst/>
-          </a:prstGeom>
-          <a:noFill/>
-          <a:ln/>
-        </p:spPr>
-        <p:txBody>
-          <a:bodyPr wrap="square" lIns="0" tIns="0" rIns="0" bIns="0" rtlCol="0" anchor="t"/>
-          <a:lstStyle/>
-          <a:p>
-            <a:pPr algn="l" indent="0" marL="0">
-              <a:lnSpc>
-                <a:spcPts val="1375"/>
-              </a:lnSpc>
-              <a:buNone/>
-            </a:pPr>
-            <a:r>
-              <a:rPr lang="en-US" sz="1100" dirty="0">
-                <a:solidFill>
-                  <a:srgbClr val="1C2833"/>
-                </a:solidFill>
-                <a:latin typeface="Courier New" pitchFamily="34" charset="0"/>
-                <a:ea typeface="Courier New" pitchFamily="34" charset="-122"/>
-                <a:cs typeface="Courier New" pitchFamily="34" charset="-120"/>
-              </a:rPr>
-              <a:t>1. My target tendency (e.g. "I notice some Vāta excess in winter — dry skin, light sleep"):</a:t>
-            </a:r>
-            <a:endParaRPr lang="en-US" sz="1100" dirty="0"/>
-          </a:p>
-        </p:txBody>
-      </p:sp>
-      <p:sp>
-        <p:nvSpPr>
-          <p:cNvPr id="9" name="Text 7"/>
-          <p:cNvSpPr/>
-          <p:nvPr/>
-        </p:nvSpPr>
-        <p:spPr>
-          <a:xfrm>
-            <a:off x="631627" y="1764060"/>
-            <a:ext cx="8086939" cy="174575"/>
-          </a:xfrm>
-          <a:prstGeom prst="rect">
-            <a:avLst/>
-          </a:prstGeom>
-          <a:noFill/>
-          <a:ln/>
-        </p:spPr>
-        <p:txBody>
-          <a:bodyPr wrap="square" lIns="0" tIns="0" rIns="0" bIns="0" rtlCol="0" anchor="t"/>
-          <a:lstStyle/>
-          <a:p>
-            <a:pPr algn="l" indent="0" marL="0">
-              <a:lnSpc>
-                <a:spcPts val="1375"/>
-              </a:lnSpc>
-              <a:buNone/>
-            </a:pPr>
-            <a:r>
-              <a:rPr lang="en-US" sz="1100" dirty="0">
-                <a:solidFill>
-                  <a:srgbClr val="1C2833"/>
-                </a:solidFill>
-                <a:latin typeface="Courier New" pitchFamily="34" charset="0"/>
-                <a:ea typeface="Courier New" pitchFamily="34" charset="-122"/>
-                <a:cs typeface="Courier New" pitchFamily="34" charset="-120"/>
-              </a:rPr>
-              <a:t>__________________________________________________________</a:t>
-            </a:r>
-            <a:endParaRPr lang="en-US" sz="1100" dirty="0"/>
-          </a:p>
-        </p:txBody>
-      </p:sp>
-      <p:sp>
-        <p:nvSpPr>
-          <p:cNvPr id="10" name="Text 8"/>
-          <p:cNvSpPr/>
-          <p:nvPr/>
-        </p:nvSpPr>
-        <p:spPr>
-          <a:xfrm>
-            <a:off x="631627" y="2113211"/>
-            <a:ext cx="8086939" cy="174575"/>
-          </a:xfrm>
-          <a:prstGeom prst="rect">
-            <a:avLst/>
-          </a:prstGeom>
-          <a:noFill/>
-          <a:ln/>
-        </p:spPr>
-        <p:txBody>
-          <a:bodyPr wrap="square" lIns="0" tIns="0" rIns="0" bIns="0" rtlCol="0" anchor="t"/>
-          <a:lstStyle/>
-          <a:p>
-            <a:pPr algn="l" indent="0" marL="0">
-              <a:lnSpc>
-                <a:spcPts val="1375"/>
-              </a:lnSpc>
-              <a:buNone/>
-            </a:pPr>
-            <a:r>
-              <a:rPr lang="en-US" sz="1100" dirty="0">
-                <a:solidFill>
-                  <a:srgbClr val="1C2833"/>
-                </a:solidFill>
-                <a:latin typeface="Courier New" pitchFamily="34" charset="0"/>
-                <a:ea typeface="Courier New" pitchFamily="34" charset="-122"/>
-                <a:cs typeface="Courier New" pitchFamily="34" charset="-120"/>
-              </a:rPr>
-              <a:t>2. Three qualities I'll lean toward to balance:</a:t>
-            </a:r>
-            <a:endParaRPr lang="en-US" sz="1100" dirty="0"/>
-          </a:p>
-        </p:txBody>
-      </p:sp>
-      <p:sp>
-        <p:nvSpPr>
-          <p:cNvPr id="11" name="Text 9"/>
-          <p:cNvSpPr/>
-          <p:nvPr/>
-        </p:nvSpPr>
-        <p:spPr>
-          <a:xfrm>
-            <a:off x="631627" y="2287786"/>
-            <a:ext cx="8086939" cy="174575"/>
-          </a:xfrm>
-          <a:prstGeom prst="rect">
-            <a:avLst/>
-          </a:prstGeom>
-          <a:noFill/>
-          <a:ln/>
-        </p:spPr>
-        <p:txBody>
-          <a:bodyPr wrap="square" lIns="0" tIns="0" rIns="0" bIns="0" rtlCol="0" anchor="t"/>
-          <a:lstStyle/>
-          <a:p>
-            <a:pPr algn="l" indent="0" marL="0">
-              <a:lnSpc>
-                <a:spcPts val="1375"/>
-              </a:lnSpc>
-              <a:buNone/>
-            </a:pPr>
-            <a:r>
-              <a:rPr lang="en-US" sz="1100" dirty="0">
-                <a:solidFill>
-                  <a:srgbClr val="1C2833"/>
-                </a:solidFill>
-                <a:latin typeface="Courier New" pitchFamily="34" charset="0"/>
-                <a:ea typeface="Courier New" pitchFamily="34" charset="-122"/>
-                <a:cs typeface="Courier New" pitchFamily="34" charset="-120"/>
-              </a:rPr>
-              <a:t>(e.g. for vāta: warm, oily, grounding)</a:t>
-            </a:r>
-            <a:endParaRPr lang="en-US" sz="1100" dirty="0"/>
-          </a:p>
-        </p:txBody>
-      </p:sp>
-      <p:sp>
-        <p:nvSpPr>
-          <p:cNvPr id="12" name="Text 10"/>
-          <p:cNvSpPr/>
-          <p:nvPr/>
-        </p:nvSpPr>
-        <p:spPr>
-          <a:xfrm>
-            <a:off x="631627" y="2462361"/>
-            <a:ext cx="8086939" cy="174575"/>
-          </a:xfrm>
-          <a:prstGeom prst="rect">
-            <a:avLst/>
-          </a:prstGeom>
-          <a:noFill/>
-          <a:ln/>
-        </p:spPr>
-        <p:txBody>
-          <a:bodyPr wrap="square" lIns="0" tIns="0" rIns="0" bIns="0" rtlCol="0" anchor="t"/>
-          <a:lstStyle/>
-          <a:p>
-            <a:pPr algn="l" indent="0" marL="0">
-              <a:lnSpc>
-                <a:spcPts val="1375"/>
-              </a:lnSpc>
-              <a:buNone/>
-            </a:pPr>
-            <a:r>
-              <a:rPr lang="en-US" sz="1100" dirty="0">
-                <a:solidFill>
-                  <a:srgbClr val="1C2833"/>
-                </a:solidFill>
-                <a:latin typeface="Courier New" pitchFamily="34" charset="0"/>
-                <a:ea typeface="Courier New" pitchFamily="34" charset="-122"/>
-                <a:cs typeface="Courier New" pitchFamily="34" charset="-120"/>
-              </a:rPr>
-              <a:t>– __________________________</a:t>
-            </a:r>
-            <a:endParaRPr lang="en-US" sz="1100" dirty="0"/>
-          </a:p>
-        </p:txBody>
-      </p:sp>
-      <p:sp>
-        <p:nvSpPr>
-          <p:cNvPr id="13" name="Text 11"/>
-          <p:cNvSpPr/>
-          <p:nvPr/>
-        </p:nvSpPr>
-        <p:spPr>
-          <a:xfrm>
-            <a:off x="631627" y="2636937"/>
-            <a:ext cx="8086939" cy="174575"/>
-          </a:xfrm>
-          <a:prstGeom prst="rect">
-            <a:avLst/>
-          </a:prstGeom>
-          <a:noFill/>
-          <a:ln/>
-        </p:spPr>
-        <p:txBody>
-          <a:bodyPr wrap="square" lIns="0" tIns="0" rIns="0" bIns="0" rtlCol="0" anchor="t"/>
-          <a:lstStyle/>
-          <a:p>
-            <a:pPr algn="l" indent="0" marL="0">
-              <a:lnSpc>
-                <a:spcPts val="1375"/>
-              </a:lnSpc>
-              <a:buNone/>
-            </a:pPr>
-            <a:r>
-              <a:rPr lang="en-US" sz="1100" dirty="0">
-                <a:solidFill>
-                  <a:srgbClr val="1C2833"/>
-                </a:solidFill>
-                <a:latin typeface="Courier New" pitchFamily="34" charset="0"/>
-                <a:ea typeface="Courier New" pitchFamily="34" charset="-122"/>
-                <a:cs typeface="Courier New" pitchFamily="34" charset="-120"/>
-              </a:rPr>
-              <a:t>– __________________________</a:t>
-            </a:r>
-            <a:endParaRPr lang="en-US" sz="1100" dirty="0"/>
-          </a:p>
-        </p:txBody>
-      </p:sp>
-      <p:sp>
-        <p:nvSpPr>
-          <p:cNvPr id="14" name="Text 12"/>
-          <p:cNvSpPr/>
-          <p:nvPr/>
-        </p:nvSpPr>
-        <p:spPr>
-          <a:xfrm>
-            <a:off x="631627" y="2811512"/>
-            <a:ext cx="8086939" cy="174575"/>
-          </a:xfrm>
-          <a:prstGeom prst="rect">
-            <a:avLst/>
-          </a:prstGeom>
-          <a:noFill/>
-          <a:ln/>
-        </p:spPr>
-        <p:txBody>
-          <a:bodyPr wrap="square" lIns="0" tIns="0" rIns="0" bIns="0" rtlCol="0" anchor="t"/>
-          <a:lstStyle/>
-          <a:p>
-            <a:pPr algn="l" indent="0" marL="0">
-              <a:lnSpc>
-                <a:spcPts val="1375"/>
-              </a:lnSpc>
-              <a:buNone/>
-            </a:pPr>
-            <a:r>
-              <a:rPr lang="en-US" sz="1100" dirty="0">
-                <a:solidFill>
-                  <a:srgbClr val="1C2833"/>
-                </a:solidFill>
-                <a:latin typeface="Courier New" pitchFamily="34" charset="0"/>
-                <a:ea typeface="Courier New" pitchFamily="34" charset="-122"/>
-                <a:cs typeface="Courier New" pitchFamily="34" charset="-120"/>
-              </a:rPr>
-              <a:t>– __________________________</a:t>
-            </a:r>
-            <a:endParaRPr lang="en-US" sz="1100" dirty="0"/>
-          </a:p>
-        </p:txBody>
-      </p:sp>
-      <p:sp>
-        <p:nvSpPr>
-          <p:cNvPr id="15" name="Text 13"/>
-          <p:cNvSpPr/>
-          <p:nvPr/>
-        </p:nvSpPr>
-        <p:spPr>
-          <a:xfrm>
-            <a:off x="631627" y="3160663"/>
-            <a:ext cx="8086939" cy="174575"/>
-          </a:xfrm>
-          <a:prstGeom prst="rect">
-            <a:avLst/>
-          </a:prstGeom>
-          <a:noFill/>
-          <a:ln/>
-        </p:spPr>
-        <p:txBody>
-          <a:bodyPr wrap="square" lIns="0" tIns="0" rIns="0" bIns="0" rtlCol="0" anchor="t"/>
-          <a:lstStyle/>
-          <a:p>
-            <a:pPr algn="l" indent="0" marL="0">
-              <a:lnSpc>
-                <a:spcPts val="1375"/>
-              </a:lnSpc>
-              <a:buNone/>
-            </a:pPr>
-            <a:r>
-              <a:rPr lang="en-US" sz="1100" dirty="0">
-                <a:solidFill>
-                  <a:srgbClr val="1C2833"/>
-                </a:solidFill>
-                <a:latin typeface="Courier New" pitchFamily="34" charset="0"/>
-                <a:ea typeface="Courier New" pitchFamily="34" charset="-122"/>
-                <a:cs typeface="Courier New" pitchFamily="34" charset="-120"/>
-              </a:rPr>
-              <a:t>3. Five days of small changes — ONE per day:</a:t>
-            </a:r>
-            <a:endParaRPr lang="en-US" sz="1100" dirty="0"/>
-          </a:p>
-        </p:txBody>
-      </p:sp>
-      <p:sp>
-        <p:nvSpPr>
-          <p:cNvPr id="16" name="Text 14"/>
-          <p:cNvSpPr/>
-          <p:nvPr/>
-        </p:nvSpPr>
-        <p:spPr>
-          <a:xfrm>
-            <a:off x="631627" y="3509814"/>
-            <a:ext cx="8086939" cy="174575"/>
-          </a:xfrm>
-          <a:prstGeom prst="rect">
-            <a:avLst/>
-          </a:prstGeom>
-          <a:noFill/>
-          <a:ln/>
-        </p:spPr>
-        <p:txBody>
-          <a:bodyPr wrap="square" lIns="0" tIns="0" rIns="0" bIns="0" rtlCol="0" anchor="t"/>
-          <a:lstStyle/>
-          <a:p>
-            <a:pPr algn="l" indent="0" marL="0">
-              <a:lnSpc>
-                <a:spcPts val="1375"/>
-              </a:lnSpc>
-              <a:buNone/>
-            </a:pPr>
-            <a:r>
-              <a:rPr lang="en-US" sz="1100" dirty="0">
-                <a:solidFill>
-                  <a:srgbClr val="1C2833"/>
-                </a:solidFill>
-                <a:latin typeface="Courier New" pitchFamily="34" charset="0"/>
-                <a:ea typeface="Courier New" pitchFamily="34" charset="-122"/>
-                <a:cs typeface="Courier New" pitchFamily="34" charset="-120"/>
-              </a:rPr>
-              <a:t>Day 1: _________________________________________________</a:t>
-            </a:r>
-            <a:endParaRPr lang="en-US" sz="1100" dirty="0"/>
-          </a:p>
-        </p:txBody>
-      </p:sp>
-      <p:sp>
-        <p:nvSpPr>
-          <p:cNvPr id="17" name="Text 15"/>
-          <p:cNvSpPr/>
-          <p:nvPr/>
-        </p:nvSpPr>
-        <p:spPr>
-          <a:xfrm>
-            <a:off x="631627" y="3684389"/>
-            <a:ext cx="8086939" cy="174575"/>
-          </a:xfrm>
-          <a:prstGeom prst="rect">
-            <a:avLst/>
-          </a:prstGeom>
-          <a:noFill/>
-          <a:ln/>
-        </p:spPr>
-        <p:txBody>
-          <a:bodyPr wrap="square" lIns="0" tIns="0" rIns="0" bIns="0" rtlCol="0" anchor="t"/>
-          <a:lstStyle/>
-          <a:p>
-            <a:pPr algn="l" indent="0" marL="0">
-              <a:lnSpc>
-                <a:spcPts val="1375"/>
-              </a:lnSpc>
-              <a:buNone/>
-            </a:pPr>
-            <a:r>
-              <a:rPr lang="en-US" sz="1100" dirty="0">
-                <a:solidFill>
-                  <a:srgbClr val="1C2833"/>
-                </a:solidFill>
-                <a:latin typeface="Courier New" pitchFamily="34" charset="0"/>
-                <a:ea typeface="Courier New" pitchFamily="34" charset="-122"/>
-                <a:cs typeface="Courier New" pitchFamily="34" charset="-120"/>
-              </a:rPr>
-              <a:t>Day 2: _________________________________________________</a:t>
-            </a:r>
-            <a:endParaRPr lang="en-US" sz="1100" dirty="0"/>
-          </a:p>
-        </p:txBody>
-      </p:sp>
-      <p:sp>
-        <p:nvSpPr>
-          <p:cNvPr id="18" name="Text 16"/>
-          <p:cNvSpPr/>
-          <p:nvPr/>
-        </p:nvSpPr>
-        <p:spPr>
-          <a:xfrm>
-            <a:off x="631627" y="3858964"/>
-            <a:ext cx="8086939" cy="174575"/>
-          </a:xfrm>
-          <a:prstGeom prst="rect">
-            <a:avLst/>
-          </a:prstGeom>
-          <a:noFill/>
-          <a:ln/>
-        </p:spPr>
-        <p:txBody>
-          <a:bodyPr wrap="square" lIns="0" tIns="0" rIns="0" bIns="0" rtlCol="0" anchor="t"/>
-          <a:lstStyle/>
-          <a:p>
-            <a:pPr algn="l" indent="0" marL="0">
-              <a:lnSpc>
-                <a:spcPts val="1375"/>
-              </a:lnSpc>
-              <a:buNone/>
-            </a:pPr>
-            <a:r>
-              <a:rPr lang="en-US" sz="1100" dirty="0">
-                <a:solidFill>
-                  <a:srgbClr val="1C2833"/>
-                </a:solidFill>
-                <a:latin typeface="Courier New" pitchFamily="34" charset="0"/>
-                <a:ea typeface="Courier New" pitchFamily="34" charset="-122"/>
-                <a:cs typeface="Courier New" pitchFamily="34" charset="-120"/>
-              </a:rPr>
-              <a:t>Day 3: _________________________________________________</a:t>
-            </a:r>
-            <a:endParaRPr lang="en-US" sz="1100" dirty="0"/>
-          </a:p>
-        </p:txBody>
-      </p:sp>
-      <p:sp>
-        <p:nvSpPr>
-          <p:cNvPr id="19" name="Text 17"/>
-          <p:cNvSpPr/>
-          <p:nvPr/>
-        </p:nvSpPr>
-        <p:spPr>
-          <a:xfrm>
-            <a:off x="631627" y="4033540"/>
-            <a:ext cx="8086939" cy="174575"/>
-          </a:xfrm>
-          <a:prstGeom prst="rect">
-            <a:avLst/>
-          </a:prstGeom>
-          <a:noFill/>
-          <a:ln/>
-        </p:spPr>
-        <p:txBody>
-          <a:bodyPr wrap="square" lIns="0" tIns="0" rIns="0" bIns="0" rtlCol="0" anchor="t"/>
-          <a:lstStyle/>
-          <a:p>
-            <a:pPr algn="l" indent="0" marL="0">
-              <a:lnSpc>
-                <a:spcPts val="1375"/>
-              </a:lnSpc>
-              <a:buNone/>
-            </a:pPr>
-            <a:r>
-              <a:rPr lang="en-US" sz="1100" dirty="0">
-                <a:solidFill>
-                  <a:srgbClr val="1C2833"/>
-                </a:solidFill>
-                <a:latin typeface="Courier New" pitchFamily="34" charset="0"/>
-                <a:ea typeface="Courier New" pitchFamily="34" charset="-122"/>
-                <a:cs typeface="Courier New" pitchFamily="34" charset="-120"/>
-              </a:rPr>
-              <a:t>Day 4: _________________________________________________</a:t>
-            </a:r>
-            <a:endParaRPr lang="en-US" sz="1100" dirty="0"/>
-          </a:p>
-        </p:txBody>
-      </p:sp>
-      <p:sp>
-        <p:nvSpPr>
-          <p:cNvPr id="20" name="Text 18"/>
-          <p:cNvSpPr/>
-          <p:nvPr/>
-        </p:nvSpPr>
-        <p:spPr>
-          <a:xfrm>
-            <a:off x="631627" y="4208115"/>
-            <a:ext cx="8086939" cy="174575"/>
-          </a:xfrm>
-          <a:prstGeom prst="rect">
-            <a:avLst/>
-          </a:prstGeom>
-          <a:noFill/>
-          <a:ln/>
-        </p:spPr>
-        <p:txBody>
-          <a:bodyPr wrap="square" lIns="0" tIns="0" rIns="0" bIns="0" rtlCol="0" anchor="t"/>
-          <a:lstStyle/>
-          <a:p>
-            <a:pPr algn="l" indent="0" marL="0">
-              <a:lnSpc>
-                <a:spcPts val="1375"/>
-              </a:lnSpc>
-              <a:buNone/>
-            </a:pPr>
-            <a:r>
-              <a:rPr lang="en-US" sz="1100" dirty="0">
-                <a:solidFill>
-                  <a:srgbClr val="1C2833"/>
-                </a:solidFill>
-                <a:latin typeface="Courier New" pitchFamily="34" charset="0"/>
-                <a:ea typeface="Courier New" pitchFamily="34" charset="-122"/>
-                <a:cs typeface="Courier New" pitchFamily="34" charset="-120"/>
-              </a:rPr>
-              <a:t>Day 5: _________________________________________________</a:t>
-            </a:r>
-            <a:endParaRPr lang="en-US" sz="1100" dirty="0"/>
-          </a:p>
-        </p:txBody>
-      </p:sp>
-      <p:sp>
-        <p:nvSpPr>
-          <p:cNvPr id="21" name="Text 19"/>
-          <p:cNvSpPr/>
-          <p:nvPr/>
-        </p:nvSpPr>
-        <p:spPr>
-          <a:xfrm>
-            <a:off x="631627" y="4557266"/>
-            <a:ext cx="8086939" cy="174575"/>
-          </a:xfrm>
-          <a:prstGeom prst="rect">
-            <a:avLst/>
-          </a:prstGeom>
-          <a:noFill/>
-          <a:ln/>
-        </p:spPr>
-        <p:txBody>
-          <a:bodyPr wrap="square" lIns="0" tIns="0" rIns="0" bIns="0" rtlCol="0" anchor="t"/>
-          <a:lstStyle/>
-          <a:p>
-            <a:pPr algn="l" indent="0" marL="0">
-              <a:lnSpc>
-                <a:spcPts val="1375"/>
-              </a:lnSpc>
-              <a:buNone/>
-            </a:pPr>
-            <a:r>
-              <a:rPr lang="en-US" sz="1100" dirty="0">
-                <a:solidFill>
-                  <a:srgbClr val="1C2833"/>
-                </a:solidFill>
-                <a:latin typeface="Courier New" pitchFamily="34" charset="0"/>
-                <a:ea typeface="Courier New" pitchFamily="34" charset="-122"/>
-                <a:cs typeface="Courier New" pitchFamily="34" charset="-120"/>
-              </a:rPr>
-              <a:t>4. For each change, the underlying doṣa concept:</a:t>
-            </a:r>
-            <a:endParaRPr lang="en-US" sz="1100" dirty="0"/>
-          </a:p>
-        </p:txBody>
-      </p:sp>
-      <p:sp>
-        <p:nvSpPr>
-          <p:cNvPr id="22" name="Text 20"/>
-          <p:cNvSpPr/>
-          <p:nvPr/>
-        </p:nvSpPr>
-        <p:spPr>
-          <a:xfrm>
-            <a:off x="631627" y="4731841"/>
-            <a:ext cx="8086939" cy="174575"/>
-          </a:xfrm>
-          <a:prstGeom prst="rect">
-            <a:avLst/>
-          </a:prstGeom>
-          <a:noFill/>
-          <a:ln/>
-        </p:spPr>
-        <p:txBody>
-          <a:bodyPr wrap="square" lIns="0" tIns="0" rIns="0" bIns="0" rtlCol="0" anchor="t"/>
-          <a:lstStyle/>
-          <a:p>
-            <a:pPr algn="l" indent="0" marL="0">
-              <a:lnSpc>
-                <a:spcPts val="1375"/>
-              </a:lnSpc>
-              <a:buNone/>
-            </a:pPr>
-            <a:r>
-              <a:rPr lang="en-US" sz="1100" dirty="0">
-                <a:solidFill>
-                  <a:srgbClr val="1C2833"/>
-                </a:solidFill>
-                <a:latin typeface="Courier New" pitchFamily="34" charset="0"/>
-                <a:ea typeface="Courier New" pitchFamily="34" charset="-122"/>
-                <a:cs typeface="Courier New" pitchFamily="34" charset="-120"/>
-              </a:rPr>
-              <a:t>Day 1 concept: __________________________________________</a:t>
-            </a:r>
-            <a:endParaRPr lang="en-US" sz="1100" dirty="0"/>
-          </a:p>
-        </p:txBody>
-      </p:sp>
-      <p:sp>
-        <p:nvSpPr>
-          <p:cNvPr id="23" name="Text 21"/>
-          <p:cNvSpPr/>
-          <p:nvPr/>
-        </p:nvSpPr>
-        <p:spPr>
-          <a:xfrm>
-            <a:off x="631627" y="4906417"/>
-            <a:ext cx="8086939" cy="174575"/>
-          </a:xfrm>
-          <a:prstGeom prst="rect">
-            <a:avLst/>
-          </a:prstGeom>
-          <a:noFill/>
-          <a:ln/>
-        </p:spPr>
-        <p:txBody>
-          <a:bodyPr wrap="square" lIns="0" tIns="0" rIns="0" bIns="0" rtlCol="0" anchor="t"/>
-          <a:lstStyle/>
-          <a:p>
-            <a:pPr algn="l" indent="0" marL="0">
-              <a:lnSpc>
-                <a:spcPts val="1375"/>
-              </a:lnSpc>
-              <a:buNone/>
-            </a:pPr>
-            <a:r>
-              <a:rPr lang="en-US" sz="1100" dirty="0">
-                <a:solidFill>
-                  <a:srgbClr val="1C2833"/>
-                </a:solidFill>
-                <a:latin typeface="Courier New" pitchFamily="34" charset="0"/>
-                <a:ea typeface="Courier New" pitchFamily="34" charset="-122"/>
-                <a:cs typeface="Courier New" pitchFamily="34" charset="-120"/>
-              </a:rPr>
-              <a:t>Day 2 concept: __________________________________________</a:t>
-            </a:r>
-            <a:endParaRPr lang="en-US" sz="1100" dirty="0"/>
-          </a:p>
-        </p:txBody>
-      </p:sp>
-      <p:sp>
-        <p:nvSpPr>
-          <p:cNvPr id="24" name="Text 22"/>
-          <p:cNvSpPr/>
-          <p:nvPr/>
-        </p:nvSpPr>
-        <p:spPr>
-          <a:xfrm>
-            <a:off x="631627" y="5080992"/>
-            <a:ext cx="8086939" cy="174575"/>
-          </a:xfrm>
-          <a:prstGeom prst="rect">
-            <a:avLst/>
-          </a:prstGeom>
-          <a:noFill/>
-          <a:ln/>
-        </p:spPr>
-        <p:txBody>
-          <a:bodyPr wrap="square" lIns="0" tIns="0" rIns="0" bIns="0" rtlCol="0" anchor="t"/>
-          <a:lstStyle/>
-          <a:p>
-            <a:pPr algn="l" indent="0" marL="0">
-              <a:lnSpc>
-                <a:spcPts val="1375"/>
-              </a:lnSpc>
-              <a:buNone/>
-            </a:pPr>
-            <a:r>
-              <a:rPr lang="en-US" sz="1100" dirty="0">
-                <a:solidFill>
-                  <a:srgbClr val="1C2833"/>
-                </a:solidFill>
-                <a:latin typeface="Courier New" pitchFamily="34" charset="0"/>
-                <a:ea typeface="Courier New" pitchFamily="34" charset="-122"/>
-                <a:cs typeface="Courier New" pitchFamily="34" charset="-120"/>
-              </a:rPr>
-              <a:t>Day 3 concept: __________________________________________</a:t>
-            </a:r>
-            <a:endParaRPr lang="en-US" sz="1100" dirty="0"/>
-          </a:p>
-        </p:txBody>
-      </p:sp>
-      <p:sp>
-        <p:nvSpPr>
-          <p:cNvPr id="25" name="Text 23"/>
-          <p:cNvSpPr/>
-          <p:nvPr/>
-        </p:nvSpPr>
-        <p:spPr>
-          <a:xfrm>
-            <a:off x="631627" y="5255568"/>
-            <a:ext cx="8086939" cy="174575"/>
-          </a:xfrm>
-          <a:prstGeom prst="rect">
-            <a:avLst/>
-          </a:prstGeom>
-          <a:noFill/>
-          <a:ln/>
-        </p:spPr>
-        <p:txBody>
-          <a:bodyPr wrap="square" lIns="0" tIns="0" rIns="0" bIns="0" rtlCol="0" anchor="t"/>
-          <a:lstStyle/>
-          <a:p>
-            <a:pPr algn="l" indent="0" marL="0">
-              <a:lnSpc>
-                <a:spcPts val="1375"/>
-              </a:lnSpc>
-              <a:buNone/>
-            </a:pPr>
-            <a:r>
-              <a:rPr lang="en-US" sz="1100" dirty="0">
-                <a:solidFill>
-                  <a:srgbClr val="1C2833"/>
-                </a:solidFill>
-                <a:latin typeface="Courier New" pitchFamily="34" charset="0"/>
-                <a:ea typeface="Courier New" pitchFamily="34" charset="-122"/>
-                <a:cs typeface="Courier New" pitchFamily="34" charset="-120"/>
-              </a:rPr>
-              <a:t>Day 4 concept: __________________________________________</a:t>
-            </a:r>
-            <a:endParaRPr lang="en-US" sz="1100" dirty="0"/>
-          </a:p>
-        </p:txBody>
-      </p:sp>
-      <p:sp>
-        <p:nvSpPr>
-          <p:cNvPr id="26" name="Text 24"/>
-          <p:cNvSpPr/>
-          <p:nvPr/>
-        </p:nvSpPr>
-        <p:spPr>
-          <a:xfrm>
-            <a:off x="631627" y="5430143"/>
-            <a:ext cx="8086939" cy="174575"/>
-          </a:xfrm>
-          <a:prstGeom prst="rect">
-            <a:avLst/>
-          </a:prstGeom>
-          <a:noFill/>
-          <a:ln/>
-        </p:spPr>
-        <p:txBody>
-          <a:bodyPr wrap="square" lIns="0" tIns="0" rIns="0" bIns="0" rtlCol="0" anchor="t"/>
-          <a:lstStyle/>
-          <a:p>
-            <a:pPr algn="l" indent="0" marL="0">
-              <a:lnSpc>
-                <a:spcPts val="1375"/>
-              </a:lnSpc>
-              <a:buNone/>
-            </a:pPr>
-            <a:r>
-              <a:rPr lang="en-US" sz="1100" dirty="0">
-                <a:solidFill>
-                  <a:srgbClr val="1C2833"/>
-                </a:solidFill>
-                <a:latin typeface="Courier New" pitchFamily="34" charset="0"/>
-                <a:ea typeface="Courier New" pitchFamily="34" charset="-122"/>
-                <a:cs typeface="Courier New" pitchFamily="34" charset="-120"/>
-              </a:rPr>
-              <a:t>Day 5 concept: __________________________________________</a:t>
-            </a:r>
-            <a:endParaRPr lang="en-US" sz="1100" dirty="0"/>
-          </a:p>
-        </p:txBody>
-      </p:sp>
-      <p:sp>
-        <p:nvSpPr>
-          <p:cNvPr id="27" name="Text 25"/>
-          <p:cNvSpPr/>
-          <p:nvPr/>
-        </p:nvSpPr>
-        <p:spPr>
-          <a:xfrm>
-            <a:off x="631627" y="5779294"/>
-            <a:ext cx="8086939" cy="174575"/>
-          </a:xfrm>
-          <a:prstGeom prst="rect">
-            <a:avLst/>
-          </a:prstGeom>
-          <a:noFill/>
-          <a:ln/>
-        </p:spPr>
-        <p:txBody>
-          <a:bodyPr wrap="square" lIns="0" tIns="0" rIns="0" bIns="0" rtlCol="0" anchor="t"/>
-          <a:lstStyle/>
-          <a:p>
-            <a:pPr algn="l" indent="0" marL="0">
-              <a:lnSpc>
-                <a:spcPts val="1375"/>
-              </a:lnSpc>
-              <a:buNone/>
-            </a:pPr>
-            <a:r>
-              <a:rPr lang="en-US" sz="1100" dirty="0">
-                <a:solidFill>
-                  <a:srgbClr val="1C2833"/>
-                </a:solidFill>
-                <a:latin typeface="Courier New" pitchFamily="34" charset="0"/>
-                <a:ea typeface="Courier New" pitchFamily="34" charset="-122"/>
-                <a:cs typeface="Courier New" pitchFamily="34" charset="-120"/>
-              </a:rPr>
-              <a:t>5. Citation I'll use:</a:t>
-            </a:r>
-            <a:endParaRPr lang="en-US" sz="1100" dirty="0"/>
-          </a:p>
-        </p:txBody>
-      </p:sp>
-      <p:sp>
-        <p:nvSpPr>
-          <p:cNvPr id="28" name="Text 26"/>
-          <p:cNvSpPr/>
-          <p:nvPr/>
-        </p:nvSpPr>
-        <p:spPr>
-          <a:xfrm>
-            <a:off x="631627" y="5953869"/>
-            <a:ext cx="8086939" cy="174575"/>
-          </a:xfrm>
-          <a:prstGeom prst="rect">
-            <a:avLst/>
-          </a:prstGeom>
-          <a:noFill/>
-          <a:ln/>
-        </p:spPr>
-        <p:txBody>
-          <a:bodyPr wrap="square" lIns="0" tIns="0" rIns="0" bIns="0" rtlCol="0" anchor="t"/>
-          <a:lstStyle/>
-          <a:p>
-            <a:pPr algn="l" indent="0" marL="0">
-              <a:lnSpc>
-                <a:spcPts val="1375"/>
-              </a:lnSpc>
-              <a:buNone/>
-            </a:pPr>
-            <a:r>
-              <a:rPr lang="en-US" sz="1100" dirty="0">
-                <a:solidFill>
-                  <a:srgbClr val="1C2833"/>
-                </a:solidFill>
-                <a:latin typeface="Courier New" pitchFamily="34" charset="0"/>
-                <a:ea typeface="Courier New" pitchFamily="34" charset="-122"/>
-                <a:cs typeface="Courier New" pitchFamily="34" charset="-120"/>
-              </a:rPr>
-              <a:t>(e.g. "Aṣṭāṅga Hṛdaya, Sūtrasthāna 1.6–7 — the doṣa-dhātu-mala framework")</a:t>
-            </a:r>
-            <a:endParaRPr lang="en-US" sz="1100" dirty="0"/>
-          </a:p>
-        </p:txBody>
-      </p:sp>
-      <p:sp>
-        <p:nvSpPr>
-          <p:cNvPr id="29" name="Text 27"/>
-          <p:cNvSpPr/>
-          <p:nvPr/>
-        </p:nvSpPr>
-        <p:spPr>
-          <a:xfrm>
-            <a:off x="631627" y="6128445"/>
-            <a:ext cx="8086939" cy="174575"/>
-          </a:xfrm>
-          <a:prstGeom prst="rect">
-            <a:avLst/>
-          </a:prstGeom>
-          <a:noFill/>
-          <a:ln/>
-        </p:spPr>
-        <p:txBody>
-          <a:bodyPr wrap="square" lIns="0" tIns="0" rIns="0" bIns="0" rtlCol="0" anchor="t"/>
-          <a:lstStyle/>
-          <a:p>
-            <a:pPr algn="l" indent="0" marL="0">
-              <a:lnSpc>
-                <a:spcPts val="1375"/>
-              </a:lnSpc>
-              <a:buNone/>
-            </a:pPr>
-            <a:r>
-              <a:rPr lang="en-US" sz="1100" dirty="0">
-                <a:solidFill>
-                  <a:srgbClr val="1C2833"/>
-                </a:solidFill>
-                <a:latin typeface="Courier New" pitchFamily="34" charset="0"/>
-                <a:ea typeface="Courier New" pitchFamily="34" charset="-122"/>
-                <a:cs typeface="Courier New" pitchFamily="34" charset="-120"/>
-              </a:rPr>
-              <a:t>__________________________________________________________</a:t>
-            </a:r>
-            <a:endParaRPr lang="en-US" sz="1100" dirty="0"/>
-          </a:p>
-        </p:txBody>
-      </p:sp>
-      <p:sp>
-        <p:nvSpPr>
-          <p:cNvPr id="30" name="Text 28"/>
-          <p:cNvSpPr/>
-          <p:nvPr/>
-        </p:nvSpPr>
-        <p:spPr>
-          <a:xfrm>
-            <a:off x="631627" y="6477595"/>
-            <a:ext cx="8086939" cy="174575"/>
-          </a:xfrm>
-          <a:prstGeom prst="rect">
-            <a:avLst/>
-          </a:prstGeom>
-          <a:noFill/>
-          <a:ln/>
-        </p:spPr>
-        <p:txBody>
-          <a:bodyPr wrap="square" lIns="0" tIns="0" rIns="0" bIns="0" rtlCol="0" anchor="t"/>
-          <a:lstStyle/>
-          <a:p>
-            <a:pPr algn="l" indent="0" marL="0">
-              <a:lnSpc>
-                <a:spcPts val="1375"/>
-              </a:lnSpc>
-              <a:buNone/>
-            </a:pPr>
-            <a:r>
-              <a:rPr lang="en-US" sz="1100" dirty="0">
-                <a:solidFill>
-                  <a:srgbClr val="1C2833"/>
-                </a:solidFill>
-                <a:latin typeface="Courier New" pitchFamily="34" charset="0"/>
-                <a:ea typeface="Courier New" pitchFamily="34" charset="-122"/>
-                <a:cs typeface="Courier New" pitchFamily="34" charset="-120"/>
-              </a:rPr>
-              <a:t>6. My presentation format:</a:t>
-            </a:r>
-            <a:endParaRPr lang="en-US" sz="1100" dirty="0"/>
-          </a:p>
-        </p:txBody>
-      </p:sp>
-      <p:sp>
-        <p:nvSpPr>
-          <p:cNvPr id="31" name="Text 29"/>
-          <p:cNvSpPr/>
-          <p:nvPr/>
-        </p:nvSpPr>
-        <p:spPr>
-          <a:xfrm>
-            <a:off x="631627" y="6652171"/>
-            <a:ext cx="8086939" cy="174575"/>
-          </a:xfrm>
-          <a:prstGeom prst="rect">
-            <a:avLst/>
-          </a:prstGeom>
-          <a:noFill/>
-          <a:ln/>
-        </p:spPr>
-        <p:txBody>
-          <a:bodyPr wrap="square" lIns="0" tIns="0" rIns="0" bIns="0" rtlCol="0" anchor="t"/>
-          <a:lstStyle/>
-          <a:p>
-            <a:pPr algn="l" indent="0" marL="0">
-              <a:lnSpc>
-                <a:spcPts val="1375"/>
-              </a:lnSpc>
-              <a:buNone/>
-            </a:pPr>
-            <a:r>
-              <a:rPr lang="en-US" sz="1100" dirty="0">
-                <a:solidFill>
-                  <a:srgbClr val="1C2833"/>
-                </a:solidFill>
-                <a:latin typeface="Courier New" pitchFamily="34" charset="0"/>
-                <a:ea typeface="Courier New" pitchFamily="34" charset="-122"/>
-                <a:cs typeface="Courier New" pitchFamily="34" charset="-120"/>
-              </a:rPr>
-              <a:t>☐ Poster (A2)</a:t>
-            </a:r>
-            <a:endParaRPr lang="en-US" sz="1100" dirty="0"/>
-          </a:p>
-        </p:txBody>
-      </p:sp>
-      <p:sp>
-        <p:nvSpPr>
-          <p:cNvPr id="32" name="Text 30"/>
-          <p:cNvSpPr/>
-          <p:nvPr/>
-        </p:nvSpPr>
-        <p:spPr>
-          <a:xfrm>
-            <a:off x="631627" y="6826746"/>
-            <a:ext cx="8086939" cy="174575"/>
-          </a:xfrm>
-          <a:prstGeom prst="rect">
-            <a:avLst/>
-          </a:prstGeom>
-          <a:noFill/>
-          <a:ln/>
-        </p:spPr>
-        <p:txBody>
-          <a:bodyPr wrap="square" lIns="0" tIns="0" rIns="0" bIns="0" rtlCol="0" anchor="t"/>
-          <a:lstStyle/>
-          <a:p>
-            <a:pPr algn="l" indent="0" marL="0">
-              <a:lnSpc>
-                <a:spcPts val="1375"/>
-              </a:lnSpc>
-              <a:buNone/>
-            </a:pPr>
-            <a:r>
-              <a:rPr lang="en-US" sz="1100" dirty="0">
-                <a:solidFill>
-                  <a:srgbClr val="1C2833"/>
-                </a:solidFill>
-                <a:latin typeface="Courier New" pitchFamily="34" charset="0"/>
-                <a:ea typeface="Courier New" pitchFamily="34" charset="-122"/>
-                <a:cs typeface="Courier New" pitchFamily="34" charset="-120"/>
-              </a:rPr>
-              <a:t>☐ Live demo (2 min)</a:t>
-            </a:r>
-            <a:endParaRPr lang="en-US" sz="1100" dirty="0"/>
-          </a:p>
-        </p:txBody>
-      </p:sp>
-      <p:sp>
-        <p:nvSpPr>
-          <p:cNvPr id="33" name="Text 31"/>
-          <p:cNvSpPr/>
-          <p:nvPr/>
-        </p:nvSpPr>
-        <p:spPr>
-          <a:xfrm>
-            <a:off x="631627" y="7001321"/>
-            <a:ext cx="8086939" cy="174575"/>
-          </a:xfrm>
-          <a:prstGeom prst="rect">
-            <a:avLst/>
-          </a:prstGeom>
-          <a:noFill/>
-          <a:ln/>
-        </p:spPr>
-        <p:txBody>
-          <a:bodyPr wrap="square" lIns="0" tIns="0" rIns="0" bIns="0" rtlCol="0" anchor="t"/>
-          <a:lstStyle/>
-          <a:p>
-            <a:pPr algn="l" indent="0" marL="0">
-              <a:lnSpc>
-                <a:spcPts val="1375"/>
-              </a:lnSpc>
-              <a:buNone/>
-            </a:pPr>
-            <a:r>
-              <a:rPr lang="en-US" sz="1100" dirty="0">
-                <a:solidFill>
-                  <a:srgbClr val="1C2833"/>
-                </a:solidFill>
-                <a:latin typeface="Courier New" pitchFamily="34" charset="0"/>
-                <a:ea typeface="Courier New" pitchFamily="34" charset="-122"/>
-                <a:cs typeface="Courier New" pitchFamily="34" charset="-120"/>
-              </a:rPr>
-              <a:t>☐ Short story (1 page)</a:t>
-            </a:r>
-            <a:endParaRPr lang="en-US" sz="1100" dirty="0"/>
-          </a:p>
-        </p:txBody>
-      </p:sp>
-      <p:sp>
-        <p:nvSpPr>
-          <p:cNvPr id="34" name="Text 32"/>
-          <p:cNvSpPr/>
-          <p:nvPr/>
-        </p:nvSpPr>
-        <p:spPr>
-          <a:xfrm>
-            <a:off x="631627" y="7175897"/>
-            <a:ext cx="8086939" cy="174575"/>
-          </a:xfrm>
-          <a:prstGeom prst="rect">
-            <a:avLst/>
-          </a:prstGeom>
-          <a:noFill/>
-          <a:ln/>
-        </p:spPr>
-        <p:txBody>
-          <a:bodyPr wrap="square" lIns="0" tIns="0" rIns="0" bIns="0" rtlCol="0" anchor="t"/>
-          <a:lstStyle/>
-          <a:p>
-            <a:pPr algn="l" indent="0" marL="0">
-              <a:lnSpc>
-                <a:spcPts val="1375"/>
-              </a:lnSpc>
-              <a:buNone/>
-            </a:pPr>
-            <a:r>
-              <a:rPr lang="en-US" sz="1100" dirty="0">
-                <a:solidFill>
-                  <a:srgbClr val="1C2833"/>
-                </a:solidFill>
-                <a:latin typeface="Courier New" pitchFamily="34" charset="0"/>
-                <a:ea typeface="Courier New" pitchFamily="34" charset="-122"/>
-                <a:cs typeface="Courier New" pitchFamily="34" charset="-120"/>
-              </a:rPr>
-              <a:t>☐ 90-sec video</a:t>
-            </a:r>
-            <a:endParaRPr lang="en-US" sz="1100" dirty="0"/>
-          </a:p>
-        </p:txBody>
-      </p:sp>
-      <p:sp>
-        <p:nvSpPr>
-          <p:cNvPr id="35" name="Text 33"/>
-          <p:cNvSpPr/>
-          <p:nvPr/>
-        </p:nvSpPr>
-        <p:spPr>
-          <a:xfrm>
-            <a:off x="631627" y="7350472"/>
-            <a:ext cx="8086939" cy="174575"/>
-          </a:xfrm>
-          <a:prstGeom prst="rect">
-            <a:avLst/>
-          </a:prstGeom>
-          <a:noFill/>
-          <a:ln/>
-        </p:spPr>
-        <p:txBody>
-          <a:bodyPr wrap="square" lIns="0" tIns="0" rIns="0" bIns="0" rtlCol="0" anchor="t"/>
-          <a:lstStyle/>
-          <a:p>
-            <a:pPr algn="l" indent="0" marL="0">
-              <a:lnSpc>
-                <a:spcPts val="1375"/>
-              </a:lnSpc>
-              <a:buNone/>
-            </a:pPr>
-            <a:r>
-              <a:rPr lang="en-US" sz="1100" dirty="0">
-                <a:solidFill>
-                  <a:srgbClr val="1C2833"/>
-                </a:solidFill>
-                <a:latin typeface="Courier New" pitchFamily="34" charset="0"/>
-                <a:ea typeface="Courier New" pitchFamily="34" charset="-122"/>
-                <a:cs typeface="Courier New" pitchFamily="34" charset="-120"/>
-              </a:rPr>
-              <a:t>☐ Infographic</a:t>
-            </a:r>
-            <a:endParaRPr lang="en-US" sz="1100" dirty="0"/>
-          </a:p>
-        </p:txBody>
-      </p:sp>
-      <p:sp>
-        <p:nvSpPr>
-          <p:cNvPr id="36" name="Text 34"/>
-          <p:cNvSpPr/>
-          <p:nvPr/>
-        </p:nvSpPr>
-        <p:spPr>
-          <a:xfrm>
-            <a:off x="631627" y="7525048"/>
-            <a:ext cx="8086939" cy="174575"/>
-          </a:xfrm>
-          <a:prstGeom prst="rect">
-            <a:avLst/>
-          </a:prstGeom>
-          <a:noFill/>
-          <a:ln/>
-        </p:spPr>
-        <p:txBody>
-          <a:bodyPr wrap="square" lIns="0" tIns="0" rIns="0" bIns="0" rtlCol="0" anchor="t"/>
-          <a:lstStyle/>
-          <a:p>
-            <a:pPr algn="l" indent="0" marL="0">
-              <a:lnSpc>
-                <a:spcPts val="1375"/>
-              </a:lnSpc>
-              <a:buNone/>
-            </a:pPr>
-            <a:r>
-              <a:rPr lang="en-US" sz="1100" dirty="0">
-                <a:solidFill>
-                  <a:srgbClr val="1C2833"/>
-                </a:solidFill>
-                <a:latin typeface="Courier New" pitchFamily="34" charset="0"/>
-                <a:ea typeface="Courier New" pitchFamily="34" charset="-122"/>
-                <a:cs typeface="Courier New" pitchFamily="34" charset="-120"/>
-              </a:rPr>
-              <a:t>☐ Original song / poem</a:t>
-            </a:r>
-            <a:endParaRPr lang="en-US" sz="1100" dirty="0"/>
-          </a:p>
-        </p:txBody>
-      </p:sp>
-      <p:sp>
-        <p:nvSpPr>
-          <p:cNvPr id="37" name="Text 35"/>
-          <p:cNvSpPr/>
-          <p:nvPr/>
-        </p:nvSpPr>
-        <p:spPr>
-          <a:xfrm>
-            <a:off x="631627" y="7699623"/>
-            <a:ext cx="8086939" cy="174575"/>
-          </a:xfrm>
-          <a:prstGeom prst="rect">
-            <a:avLst/>
-          </a:prstGeom>
-          <a:noFill/>
-          <a:ln/>
-        </p:spPr>
-        <p:txBody>
-          <a:bodyPr wrap="square" lIns="0" tIns="0" rIns="0" bIns="0" rtlCol="0" anchor="t"/>
-          <a:lstStyle/>
-          <a:p>
-            <a:pPr algn="l" indent="0" marL="0">
-              <a:lnSpc>
-                <a:spcPts val="1375"/>
-              </a:lnSpc>
-              <a:buNone/>
-            </a:pPr>
-            <a:r>
-              <a:rPr lang="en-US" sz="1100" dirty="0">
-                <a:solidFill>
-                  <a:srgbClr val="1C2833"/>
-                </a:solidFill>
-                <a:latin typeface="Courier New" pitchFamily="34" charset="0"/>
-                <a:ea typeface="Courier New" pitchFamily="34" charset="-122"/>
-                <a:cs typeface="Courier New" pitchFamily="34" charset="-120"/>
-              </a:rPr>
-              <a:t>☐ Other (teacher-approved): _____________________________</a:t>
-            </a:r>
-            <a:endParaRPr lang="en-US" sz="1100" dirty="0"/>
-          </a:p>
-        </p:txBody>
-      </p:sp>
-      <p:sp>
-        <p:nvSpPr>
-          <p:cNvPr id="38" name="Text 36"/>
-          <p:cNvSpPr/>
-          <p:nvPr/>
-        </p:nvSpPr>
-        <p:spPr>
-          <a:xfrm>
-            <a:off x="631627" y="8048774"/>
-            <a:ext cx="8086939" cy="174575"/>
-          </a:xfrm>
-          <a:prstGeom prst="rect">
-            <a:avLst/>
-          </a:prstGeom>
-          <a:noFill/>
-          <a:ln/>
-        </p:spPr>
-        <p:txBody>
-          <a:bodyPr wrap="square" lIns="0" tIns="0" rIns="0" bIns="0" rtlCol="0" anchor="t"/>
-          <a:lstStyle/>
-          <a:p>
-            <a:pPr algn="l" indent="0" marL="0">
-              <a:lnSpc>
-                <a:spcPts val="1375"/>
-              </a:lnSpc>
-              <a:buNone/>
-            </a:pPr>
-            <a:r>
-              <a:rPr lang="en-US" sz="1100" dirty="0">
-                <a:solidFill>
-                  <a:srgbClr val="1C2833"/>
-                </a:solidFill>
-                <a:latin typeface="Courier New" pitchFamily="34" charset="0"/>
-                <a:ea typeface="Courier New" pitchFamily="34" charset="-122"/>
-                <a:cs typeface="Courier New" pitchFamily="34" charset="-120"/>
-              </a:rPr>
-              <a:t>7. One thing I will NOT do (because it would be unsafe or unrealistic):</a:t>
-            </a:r>
-            <a:endParaRPr lang="en-US" sz="1100" dirty="0"/>
-          </a:p>
-        </p:txBody>
-      </p:sp>
-      <p:sp>
-        <p:nvSpPr>
-          <p:cNvPr id="39" name="Text 37"/>
-          <p:cNvSpPr/>
-          <p:nvPr/>
-        </p:nvSpPr>
-        <p:spPr>
-          <a:xfrm>
-            <a:off x="631627" y="8223349"/>
-            <a:ext cx="8086939" cy="174575"/>
-          </a:xfrm>
-          <a:prstGeom prst="rect">
-            <a:avLst/>
-          </a:prstGeom>
-          <a:noFill/>
-          <a:ln/>
-        </p:spPr>
-        <p:txBody>
-          <a:bodyPr wrap="square" lIns="0" tIns="0" rIns="0" bIns="0" rtlCol="0" anchor="t"/>
-          <a:lstStyle/>
-          <a:p>
-            <a:pPr algn="l" indent="0" marL="0">
-              <a:lnSpc>
-                <a:spcPts val="1375"/>
-              </a:lnSpc>
-              <a:buNone/>
-            </a:pPr>
-            <a:r>
-              <a:rPr lang="en-US" sz="1100" dirty="0">
-                <a:solidFill>
-                  <a:srgbClr val="1C2833"/>
-                </a:solidFill>
-                <a:latin typeface="Courier New" pitchFamily="34" charset="0"/>
-                <a:ea typeface="Courier New" pitchFamily="34" charset="-122"/>
-                <a:cs typeface="Courier New" pitchFamily="34" charset="-120"/>
-              </a:rPr>
-              <a:t>__________________________________________________________</a:t>
-            </a:r>
-            <a:endParaRPr lang="en-US" sz="1100" dirty="0"/>
-          </a:p>
-        </p:txBody>
-      </p:sp>
-      <p:sp>
-        <p:nvSpPr>
-          <p:cNvPr id="40" name="Text 38"/>
-          <p:cNvSpPr/>
-          <p:nvPr/>
-        </p:nvSpPr>
-        <p:spPr>
-          <a:xfrm>
-            <a:off x="406301" y="8613725"/>
-            <a:ext cx="8498026" cy="639812"/>
-          </a:xfrm>
-          <a:prstGeom prst="rect">
-            <a:avLst/>
-          </a:prstGeom>
-          <a:noFill/>
-          <a:ln/>
-        </p:spPr>
-        <p:txBody>
-          <a:bodyPr wrap="square" lIns="0" tIns="0" rIns="0" bIns="0" rtlCol="0" anchor="t"/>
-          <a:lstStyle/>
-          <a:p>
-            <a:pPr algn="l" indent="0" marL="0">
-              <a:lnSpc>
-                <a:spcPts val="1680"/>
-              </a:lnSpc>
-              <a:spcBef>
-                <a:spcPts val="300"/>
-              </a:spcBef>
-              <a:spcAft>
-                <a:spcPts val="300"/>
-              </a:spcAft>
-              <a:buNone/>
-            </a:pPr>
-            <a:r>
-              <a:rPr lang="en-US" sz="1200" dirty="0">
+              <a:t>Design 5 days of small, realistic changes that would </a:t>
+            </a:r>
+            <a:pPr algn="l" indent="0" marL="0">
+              <a:lnSpc>
+                <a:spcPts val="1620"/>
+              </a:lnSpc>
+              <a:spcAft>
+                <a:spcPts val="300"/>
+              </a:spcAft>
+              <a:buNone/>
+            </a:pPr>
+            <a:r>
+              <a:rPr lang="en-US" sz="1200" i="1" dirty="0">
                 <a:solidFill>
                   <a:srgbClr val="1C2833"/>
                 </a:solidFill>
@@ -6202,21 +5885,209 @@
                 <a:ea typeface="Arial" pitchFamily="34" charset="-122"/>
                 <a:cs typeface="Arial" pitchFamily="34" charset="-120"/>
               </a:rPr>
-              <a:t>Teacher walks around. Quick interventions: – Students writing extreme plans ("fast for 5 days") — redirect to small + realistic. – Students with no plan — sit with them, walk through one example. – Students who finish quickly — sketch the visual layout of their poster.</a:t>
+              <a:t>support balance</a:t>
+            </a:r>
+            <a:pPr algn="l" indent="0" marL="0">
+              <a:lnSpc>
+                <a:spcPts val="1620"/>
+              </a:lnSpc>
+              <a:spcAft>
+                <a:spcPts val="300"/>
+              </a:spcAft>
+              <a:buNone/>
+            </a:pPr>
+            <a:r>
+              <a:rPr lang="en-US" sz="1200" dirty="0">
+                <a:solidFill>
+                  <a:srgbClr val="1C2833"/>
+                </a:solidFill>
+                <a:latin typeface="Arial" pitchFamily="34" charset="0"/>
+                <a:ea typeface="Arial" pitchFamily="34" charset="-122"/>
+                <a:cs typeface="Arial" pitchFamily="34" charset="-120"/>
+              </a:rPr>
+              <a:t> for that </a:t>
+            </a:r>
+            <a:pPr algn="l" indent="0" marL="0">
+              <a:lnSpc>
+                <a:spcPts val="1620"/>
+              </a:lnSpc>
+              <a:spcAft>
+                <a:spcPts val="300"/>
+              </a:spcAft>
+              <a:buNone/>
+            </a:pPr>
+            <a:r>
+              <a:rPr lang="en-US" sz="1200" i="1" dirty="0">
+                <a:solidFill>
+                  <a:srgbClr val="1C2833"/>
+                </a:solidFill>
+                <a:latin typeface="Arial" pitchFamily="34" charset="0"/>
+                <a:ea typeface="Arial" pitchFamily="34" charset="-122"/>
+                <a:cs typeface="Arial" pitchFamily="34" charset="-120"/>
+              </a:rPr>
+              <a:t>doṣa</a:t>
+            </a:r>
+            <a:pPr algn="l" indent="0" marL="0">
+              <a:lnSpc>
+                <a:spcPts val="1620"/>
+              </a:lnSpc>
+              <a:spcAft>
+                <a:spcPts val="300"/>
+              </a:spcAft>
+              <a:buNone/>
+            </a:pPr>
+            <a:r>
+              <a:rPr lang="en-US" sz="1200" dirty="0">
+                <a:solidFill>
+                  <a:srgbClr val="1C2833"/>
+                </a:solidFill>
+                <a:latin typeface="Arial" pitchFamily="34" charset="0"/>
+                <a:ea typeface="Arial" pitchFamily="34" charset="-122"/>
+                <a:cs typeface="Arial" pitchFamily="34" charset="-120"/>
+              </a:rPr>
+              <a:t>.</a:t>
             </a:r>
             <a:endParaRPr lang="en-US" sz="1200" dirty="0"/>
           </a:p>
-        </p:txBody>
-      </p:sp>
-      <p:sp>
-        <p:nvSpPr>
-          <p:cNvPr id="41" name="Text 39"/>
-          <p:cNvSpPr/>
-          <p:nvPr/>
-        </p:nvSpPr>
-        <p:spPr>
-          <a:xfrm>
-            <a:off x="406301" y="9405938"/>
+          <a:p>
+            <a:pPr algn="l" marL="342900" indent="-342900">
+              <a:lnSpc>
+                <a:spcPts val="1620"/>
+              </a:lnSpc>
+              <a:spcAft>
+                <a:spcPts val="300"/>
+              </a:spcAft>
+              <a:buSzPct val="100000"/>
+              <a:buChar char="•"/>
+            </a:pPr>
+            <a:r>
+              <a:rPr lang="en-US" sz="1200" dirty="0">
+                <a:solidFill>
+                  <a:srgbClr val="1C2833"/>
+                </a:solidFill>
+                <a:latin typeface="Arial" pitchFamily="34" charset="0"/>
+                <a:ea typeface="Arial" pitchFamily="34" charset="-122"/>
+                <a:cs typeface="Arial" pitchFamily="34" charset="-120"/>
+              </a:rPr>
+              <a:t>Show: (a) what each change is, (b) which </a:t>
+            </a:r>
+            <a:pPr algn="l" indent="0" marL="0">
+              <a:lnSpc>
+                <a:spcPts val="1620"/>
+              </a:lnSpc>
+              <a:spcAft>
+                <a:spcPts val="300"/>
+              </a:spcAft>
+              <a:buNone/>
+            </a:pPr>
+            <a:r>
+              <a:rPr lang="en-US" sz="1200" i="1" dirty="0">
+                <a:solidFill>
+                  <a:srgbClr val="1C2833"/>
+                </a:solidFill>
+                <a:latin typeface="Arial" pitchFamily="34" charset="0"/>
+                <a:ea typeface="Arial" pitchFamily="34" charset="-122"/>
+                <a:cs typeface="Arial" pitchFamily="34" charset="-120"/>
+              </a:rPr>
+              <a:t>doṣa</a:t>
+            </a:r>
+            <a:pPr algn="l" indent="0" marL="0">
+              <a:lnSpc>
+                <a:spcPts val="1620"/>
+              </a:lnSpc>
+              <a:spcAft>
+                <a:spcPts val="300"/>
+              </a:spcAft>
+              <a:buNone/>
+            </a:pPr>
+            <a:r>
+              <a:rPr lang="en-US" sz="1200" dirty="0">
+                <a:solidFill>
+                  <a:srgbClr val="1C2833"/>
+                </a:solidFill>
+                <a:latin typeface="Arial" pitchFamily="34" charset="0"/>
+                <a:ea typeface="Arial" pitchFamily="34" charset="-122"/>
+                <a:cs typeface="Arial" pitchFamily="34" charset="-120"/>
+              </a:rPr>
+              <a:t> concept it relates to, (c) one citation from </a:t>
+            </a:r>
+            <a:pPr algn="l" indent="0" marL="0">
+              <a:lnSpc>
+                <a:spcPts val="1620"/>
+              </a:lnSpc>
+              <a:spcAft>
+                <a:spcPts val="300"/>
+              </a:spcAft>
+              <a:buNone/>
+            </a:pPr>
+            <a:r>
+              <a:rPr lang="en-US" sz="1200" dirty="0">
+                <a:solidFill>
+                  <a:srgbClr val="1C2833"/>
+                </a:solidFill>
+                <a:latin typeface="Arial" pitchFamily="34" charset="0"/>
+                <a:ea typeface="Arial" pitchFamily="34" charset="-122"/>
+                <a:cs typeface="Arial" pitchFamily="34" charset="-120"/>
+              </a:rPr>
+              <a:t>sources.md</a:t>
+            </a:r>
+            <a:pPr algn="l" indent="0" marL="0">
+              <a:lnSpc>
+                <a:spcPts val="1620"/>
+              </a:lnSpc>
+              <a:spcAft>
+                <a:spcPts val="300"/>
+              </a:spcAft>
+              <a:buNone/>
+            </a:pPr>
+            <a:r>
+              <a:rPr lang="en-US" sz="1200" dirty="0">
+                <a:solidFill>
+                  <a:srgbClr val="1C2833"/>
+                </a:solidFill>
+                <a:latin typeface="Arial" pitchFamily="34" charset="0"/>
+                <a:ea typeface="Arial" pitchFamily="34" charset="-122"/>
+                <a:cs typeface="Arial" pitchFamily="34" charset="-120"/>
+              </a:rPr>
+              <a:t>.</a:t>
+            </a:r>
+            <a:endParaRPr lang="en-US" sz="1200" dirty="0"/>
+          </a:p>
+          <a:p>
+            <a:pPr algn="l" marL="342900" indent="-342900">
+              <a:lnSpc>
+                <a:spcPts val="1620"/>
+              </a:lnSpc>
+              <a:spcAft>
+                <a:spcPts val="300"/>
+              </a:spcAft>
+              <a:buSzPct val="100000"/>
+              <a:buChar char="•"/>
+            </a:pPr>
+            <a:r>
+              <a:rPr lang="en-US" sz="1200" dirty="0">
+                <a:solidFill>
+                  <a:srgbClr val="1C2833"/>
+                </a:solidFill>
+                <a:latin typeface="Arial" pitchFamily="34" charset="0"/>
+                <a:ea typeface="Arial" pitchFamily="34" charset="-122"/>
+                <a:cs typeface="Arial" pitchFamily="34" charset="-120"/>
+              </a:rPr>
+              <a:t>Present in 3 minutes on Day 10.</a:t>
+            </a:r>
+            <a:endParaRPr lang="en-US" sz="1200" dirty="0"/>
+          </a:p>
+        </p:txBody>
+      </p:sp>
+      <p:sp>
+        <p:nvSpPr>
+          <p:cNvPr id="6" name="Text 4"/>
+          <p:cNvSpPr/>
+          <p:nvPr/>
+        </p:nvSpPr>
+        <p:spPr>
+          <a:xfrm>
+            <a:off x="406301" y="4434929"/>
             <a:ext cx="8498026" cy="213271"/>
           </a:xfrm>
           <a:prstGeom prst="rect">
@@ -6360,7 +6231,7 @@
                 <a:ea typeface="Georgia" pitchFamily="34" charset="-122"/>
                 <a:cs typeface="Georgia" pitchFamily="34" charset="-120"/>
               </a:rPr>
-              <a:t>Wrap-up (5 min)</a:t>
+              <a:t>Core (5 min) (cont.)</a:t>
             </a:r>
             <a:endParaRPr lang="en-US" sz="1800" dirty="0"/>
           </a:p>
@@ -6374,8 +6245,8 @@
         </p:nvSpPr>
         <p:spPr>
           <a:xfrm>
-            <a:off x="406301" y="870942"/>
-            <a:ext cx="8498026" cy="639812"/>
+            <a:off x="634901" y="883593"/>
+            <a:ext cx="8102798" cy="487561"/>
           </a:xfrm>
           <a:prstGeom prst="rect">
             <a:avLst/>
@@ -6387,20 +6258,18 @@
           <a:bodyPr wrap="square" lIns="0" tIns="0" rIns="0" bIns="0" rtlCol="0" anchor="t"/>
           <a:lstStyle/>
           <a:p>
-            <a:pPr algn="l" indent="0" marL="0">
-              <a:lnSpc>
-                <a:spcPts val="1680"/>
-              </a:lnSpc>
-              <a:spcBef>
-                <a:spcPts val="300"/>
-              </a:spcBef>
-              <a:spcAft>
-                <a:spcPts val="300"/>
-              </a:spcAft>
-              <a:buNone/>
-            </a:pPr>
-            <a:r>
-              <a:rPr lang="en-US" sz="1200" dirty="0">
+            <a:pPr algn="l" marL="342900" indent="-342900">
+              <a:lnSpc>
+                <a:spcPts val="1620"/>
+              </a:lnSpc>
+              <a:spcAft>
+                <a:spcPts val="300"/>
+              </a:spcAft>
+              <a:buSzPct val="100000"/>
+              <a:buChar char="•"/>
+            </a:pPr>
+            <a:r>
+              <a:rPr lang="en-US" sz="1200" b="1" dirty="0">
                 <a:solidFill>
                   <a:srgbClr val="1C2833"/>
                 </a:solidFill>
@@ -6408,22 +6277,19 @@
                 <a:ea typeface="Arial" pitchFamily="34" charset="-122"/>
                 <a:cs typeface="Arial" pitchFamily="34" charset="-120"/>
               </a:rPr>
-              <a:t>– Each student reads aloud their </a:t>
-            </a:r>
-            <a:pPr algn="l" indent="0" marL="0">
-              <a:lnSpc>
-                <a:spcPts val="1680"/>
-              </a:lnSpc>
-              <a:spcBef>
-                <a:spcPts val="300"/>
-              </a:spcBef>
-              <a:spcAft>
-                <a:spcPts val="300"/>
-              </a:spcAft>
-              <a:buNone/>
-            </a:pPr>
-            <a:r>
-              <a:rPr lang="en-US" sz="1200" b="1" dirty="0">
+              <a:t>Realistic, not heroic.</a:t>
+            </a:r>
+            <a:pPr algn="l" indent="0" marL="0">
+              <a:lnSpc>
+                <a:spcPts val="1620"/>
+              </a:lnSpc>
+              <a:spcAft>
+                <a:spcPts val="300"/>
+              </a:spcAft>
+              <a:buNone/>
+            </a:pPr>
+            <a:r>
+              <a:rPr lang="en-US" sz="1200" dirty="0">
                 <a:solidFill>
                   <a:srgbClr val="1C2833"/>
                 </a:solidFill>
@@ -6431,22 +6297,19 @@
                 <a:ea typeface="Arial" pitchFamily="34" charset="-122"/>
                 <a:cs typeface="Arial" pitchFamily="34" charset="-120"/>
               </a:rPr>
-              <a:t>Day 1</a:t>
-            </a:r>
-            <a:pPr algn="l" indent="0" marL="0">
-              <a:lnSpc>
-                <a:spcPts val="1680"/>
-              </a:lnSpc>
-              <a:spcBef>
-                <a:spcPts val="300"/>
-              </a:spcBef>
-              <a:spcAft>
-                <a:spcPts val="300"/>
-              </a:spcAft>
-              <a:buNone/>
-            </a:pPr>
-            <a:r>
-              <a:rPr lang="en-US" sz="1200" dirty="0">
+              <a:t> </a:t>
+            </a:r>
+            <a:pPr algn="l" indent="0" marL="0">
+              <a:lnSpc>
+                <a:spcPts val="1620"/>
+              </a:lnSpc>
+              <a:spcAft>
+                <a:spcPts val="300"/>
+              </a:spcAft>
+              <a:buNone/>
+            </a:pPr>
+            <a:r>
+              <a:rPr lang="en-US" sz="1200" i="1" dirty="0">
                 <a:solidFill>
                   <a:srgbClr val="1C2833"/>
                 </a:solidFill>
@@ -6454,22 +6317,45 @@
                 <a:ea typeface="Arial" pitchFamily="34" charset="-122"/>
                 <a:cs typeface="Arial" pitchFamily="34" charset="-120"/>
               </a:rPr>
-              <a:t> change to a partner. Partner gives one piece of feedback. – Photograph or scan each plan before they leave. (Submitted as "draft 1.") – Preview Day 9: </a:t>
-            </a:r>
-            <a:pPr algn="l" indent="0" marL="0">
-              <a:lnSpc>
-                <a:spcPts val="1680"/>
-              </a:lnSpc>
-              <a:spcBef>
-                <a:spcPts val="300"/>
-              </a:spcBef>
-              <a:spcAft>
-                <a:spcPts val="300"/>
-              </a:spcAft>
-              <a:buNone/>
-            </a:pPr>
-            <a:r>
-              <a:rPr lang="en-US" sz="1200" i="1" dirty="0">
+              <a:t>"Don't write '5 am wake' if you currently wake at 7 am. The point is honest small adjustment — not transformation."</a:t>
+            </a:r>
+            <a:endParaRPr lang="en-US" sz="1200" dirty="0"/>
+          </a:p>
+        </p:txBody>
+      </p:sp>
+      <p:sp>
+        <p:nvSpPr>
+          <p:cNvPr id="5" name="Text 3"/>
+          <p:cNvSpPr/>
+          <p:nvPr/>
+        </p:nvSpPr>
+        <p:spPr>
+          <a:xfrm>
+            <a:off x="634901" y="1472654"/>
+            <a:ext cx="8102798" cy="487561"/>
+          </a:xfrm>
+          <a:prstGeom prst="rect">
+            <a:avLst/>
+          </a:prstGeom>
+          <a:noFill/>
+          <a:ln/>
+        </p:spPr>
+        <p:txBody>
+          <a:bodyPr wrap="square" lIns="0" tIns="0" rIns="0" bIns="0" rtlCol="0" anchor="t"/>
+          <a:lstStyle/>
+          <a:p>
+            <a:pPr algn="l" marL="342900" indent="-342900">
+              <a:lnSpc>
+                <a:spcPts val="1620"/>
+              </a:lnSpc>
+              <a:spcAft>
+                <a:spcPts val="300"/>
+              </a:spcAft>
+              <a:buSzPct val="100000"/>
+              <a:buChar char="•"/>
+            </a:pPr>
+            <a:r>
+              <a:rPr lang="en-US" sz="1200" b="1" dirty="0">
                 <a:solidFill>
                   <a:srgbClr val="1C2833"/>
                 </a:solidFill>
@@ -6477,7 +6363,27 @@
                 <a:ea typeface="Arial" pitchFamily="34" charset="-122"/>
                 <a:cs typeface="Arial" pitchFamily="34" charset="-120"/>
               </a:rPr>
-              <a:t>"Tomorrow — refine and start building the actual artefact."</a:t>
+              <a:t>Show the rubric.</a:t>
+            </a:r>
+            <a:pPr algn="l" indent="0" marL="0">
+              <a:lnSpc>
+                <a:spcPts val="1620"/>
+              </a:lnSpc>
+              <a:spcAft>
+                <a:spcPts val="300"/>
+              </a:spcAft>
+              <a:buNone/>
+            </a:pPr>
+            <a:r>
+              <a:rPr lang="en-US" sz="1200" dirty="0">
+                <a:solidFill>
+                  <a:srgbClr val="1C2833"/>
+                </a:solidFill>
+                <a:latin typeface="Arial" pitchFamily="34" charset="0"/>
+                <a:ea typeface="Arial" pitchFamily="34" charset="-122"/>
+                <a:cs typeface="Arial" pitchFamily="34" charset="-120"/>
+              </a:rPr>
+              <a:t> Walk through quickly. Highlight the "Use of sources" criterion — they must cite Caraka or Aṣṭāṅga Hṛdaya by reference. Paraphrase OK.</a:t>
             </a:r>
             <a:endParaRPr lang="en-US" sz="1200" dirty="0"/>
           </a:p>
@@ -6485,7 +6391,7 @@
       </p:sp>
       <p:sp>
         <p:nvSpPr>
-          <p:cNvPr id="5" name="Text 3"/>
+          <p:cNvPr id="6" name="Text 4"/>
           <p:cNvSpPr/>
           <p:nvPr/>
         </p:nvSpPr>
@@ -6635,7 +6541,7 @@
                 <a:ea typeface="Georgia" pitchFamily="34" charset="-122"/>
                 <a:cs typeface="Georgia" pitchFamily="34" charset="-120"/>
               </a:rPr>
-              <a:t>Student-facing content</a:t>
+              <a:t>Activity (30 min) — Plan writing</a:t>
             </a:r>
             <a:endParaRPr lang="en-US" sz="1800" dirty="0"/>
           </a:p>
@@ -6649,292 +6555,166 @@
         </p:nvSpPr>
         <p:spPr>
           <a:xfrm>
-            <a:off x="406301" y="883593"/>
-            <a:ext cx="8331398" cy="2112169"/>
-          </a:xfrm>
-          <a:prstGeom prst="rect">
-            <a:avLst/>
-          </a:prstGeom>
-          <a:solidFill>
-            <a:srgbClr val="F4F8F9"/>
-          </a:solidFill>
-          <a:ln/>
-        </p:spPr>
-        <p:txBody>
-          <a:bodyPr wrap="square" rtlCol="0" anchor="ctr"/>
-          <a:lstStyle/>
-          <a:p>
-            <a:pPr indent="0" marL="0">
-              <a:buNone/>
-            </a:pPr>
-            <a:endParaRPr lang="en-US" dirty="0"/>
-          </a:p>
-        </p:txBody>
-      </p:sp>
-      <p:sp>
-        <p:nvSpPr>
-          <p:cNvPr id="5" name="Shape 3"/>
-          <p:cNvSpPr/>
-          <p:nvPr/>
-        </p:nvSpPr>
-        <p:spPr>
-          <a:xfrm>
-            <a:off x="434876" y="883593"/>
-            <a:ext cx="0" cy="2112169"/>
-          </a:xfrm>
-          <a:prstGeom prst="line">
-            <a:avLst/>
-          </a:prstGeom>
-          <a:noFill/>
-          <a:ln w="57150">
-            <a:solidFill>
-              <a:srgbClr val="FE4447"/>
-            </a:solidFill>
-            <a:prstDash val="solid"/>
-          </a:ln>
-        </p:spPr>
+            <a:off x="406301" y="870942"/>
+            <a:ext cx="8498026" cy="213271"/>
+          </a:xfrm>
+          <a:prstGeom prst="rect">
+            <a:avLst/>
+          </a:prstGeom>
+          <a:noFill/>
+          <a:ln/>
+        </p:spPr>
+        <p:txBody>
+          <a:bodyPr wrap="square" lIns="0" tIns="0" rIns="0" bIns="0" rtlCol="0" anchor="t"/>
+          <a:lstStyle/>
+          <a:p>
+            <a:pPr algn="l" indent="0" marL="0">
+              <a:lnSpc>
+                <a:spcPts val="1680"/>
+              </a:lnSpc>
+              <a:spcBef>
+                <a:spcPts val="300"/>
+              </a:spcBef>
+              <a:spcAft>
+                <a:spcPts val="300"/>
+              </a:spcAft>
+              <a:buNone/>
+            </a:pPr>
+            <a:r>
+              <a:rPr lang="en-US" sz="1200" dirty="0">
+                <a:solidFill>
+                  <a:srgbClr val="1C2833"/>
+                </a:solidFill>
+                <a:latin typeface="Arial" pitchFamily="34" charset="0"/>
+                <a:ea typeface="Arial" pitchFamily="34" charset="-122"/>
+                <a:cs typeface="Arial" pitchFamily="34" charset="-120"/>
+              </a:rPr>
+              <a:t>Students work individually (or in pairs if their target </a:t>
+            </a:r>
+            <a:pPr algn="l" indent="0" marL="0">
+              <a:lnSpc>
+                <a:spcPts val="1680"/>
+              </a:lnSpc>
+              <a:spcBef>
+                <a:spcPts val="300"/>
+              </a:spcBef>
+              <a:spcAft>
+                <a:spcPts val="300"/>
+              </a:spcAft>
+              <a:buNone/>
+            </a:pPr>
+            <a:r>
+              <a:rPr lang="en-US" sz="1200" i="1" dirty="0">
+                <a:solidFill>
+                  <a:srgbClr val="1C2833"/>
+                </a:solidFill>
+                <a:latin typeface="Arial" pitchFamily="34" charset="0"/>
+                <a:ea typeface="Arial" pitchFamily="34" charset="-122"/>
+                <a:cs typeface="Arial" pitchFamily="34" charset="-120"/>
+              </a:rPr>
+              <a:t>doṣa</a:t>
+            </a:r>
+            <a:pPr algn="l" indent="0" marL="0">
+              <a:lnSpc>
+                <a:spcPts val="1680"/>
+              </a:lnSpc>
+              <a:spcBef>
+                <a:spcPts val="300"/>
+              </a:spcBef>
+              <a:spcAft>
+                <a:spcPts val="300"/>
+              </a:spcAft>
+              <a:buNone/>
+            </a:pPr>
+            <a:r>
+              <a:rPr lang="en-US" sz="1200" dirty="0">
+                <a:solidFill>
+                  <a:srgbClr val="1C2833"/>
+                </a:solidFill>
+                <a:latin typeface="Arial" pitchFamily="34" charset="0"/>
+                <a:ea typeface="Arial" pitchFamily="34" charset="-122"/>
+                <a:cs typeface="Arial" pitchFamily="34" charset="-120"/>
+              </a:rPr>
+              <a:t> is the same).</a:t>
+            </a:r>
+            <a:endParaRPr lang="en-US" sz="1200" dirty="0"/>
+          </a:p>
+        </p:txBody>
+      </p:sp>
+      <p:sp>
+        <p:nvSpPr>
+          <p:cNvPr id="5" name="Text 3"/>
+          <p:cNvSpPr/>
+          <p:nvPr/>
+        </p:nvSpPr>
+        <p:spPr>
+          <a:xfrm>
+            <a:off x="406301" y="1160413"/>
+            <a:ext cx="8498026" cy="213271"/>
+          </a:xfrm>
+          <a:prstGeom prst="rect">
+            <a:avLst/>
+          </a:prstGeom>
+          <a:noFill/>
+          <a:ln/>
+        </p:spPr>
+        <p:txBody>
+          <a:bodyPr wrap="square" lIns="0" tIns="0" rIns="0" bIns="0" rtlCol="0" anchor="t"/>
+          <a:lstStyle/>
+          <a:p>
+            <a:pPr algn="l" indent="0" marL="0">
+              <a:lnSpc>
+                <a:spcPts val="1680"/>
+              </a:lnSpc>
+              <a:spcBef>
+                <a:spcPts val="300"/>
+              </a:spcBef>
+              <a:spcAft>
+                <a:spcPts val="300"/>
+              </a:spcAft>
+              <a:buNone/>
+            </a:pPr>
+            <a:r>
+              <a:rPr lang="en-US" sz="1200" b="1" dirty="0">
+                <a:solidFill>
+                  <a:srgbClr val="1C2833"/>
+                </a:solidFill>
+                <a:latin typeface="Arial" pitchFamily="34" charset="0"/>
+                <a:ea typeface="Arial" pitchFamily="34" charset="-122"/>
+                <a:cs typeface="Arial" pitchFamily="34" charset="-120"/>
+              </a:rPr>
+              <a:t>The plan template</a:t>
+            </a:r>
+            <a:pPr algn="l" indent="0" marL="0">
+              <a:lnSpc>
+                <a:spcPts val="1680"/>
+              </a:lnSpc>
+              <a:spcBef>
+                <a:spcPts val="300"/>
+              </a:spcBef>
+              <a:spcAft>
+                <a:spcPts val="300"/>
+              </a:spcAft>
+              <a:buNone/>
+            </a:pPr>
+            <a:r>
+              <a:rPr lang="en-US" sz="1200" dirty="0">
+                <a:solidFill>
+                  <a:srgbClr val="1C2833"/>
+                </a:solidFill>
+                <a:latin typeface="Arial" pitchFamily="34" charset="0"/>
+                <a:ea typeface="Arial" pitchFamily="34" charset="-122"/>
+                <a:cs typeface="Arial" pitchFamily="34" charset="-120"/>
+              </a:rPr>
+              <a:t> (write on the board for students to copy onto their plan page):</a:t>
+            </a:r>
+            <a:endParaRPr lang="en-US" sz="1200" dirty="0"/>
+          </a:p>
+        </p:txBody>
       </p:sp>
       <p:sp>
         <p:nvSpPr>
           <p:cNvPr id="6" name="Text 4"/>
-          <p:cNvSpPr/>
-          <p:nvPr/>
-        </p:nvSpPr>
-        <p:spPr>
-          <a:xfrm>
-            <a:off x="692051" y="1074093"/>
-            <a:ext cx="7973389" cy="230981"/>
-          </a:xfrm>
-          <a:prstGeom prst="rect">
-            <a:avLst/>
-          </a:prstGeom>
-          <a:noFill/>
-          <a:ln/>
-        </p:spPr>
-        <p:txBody>
-          <a:bodyPr wrap="square" lIns="0" tIns="0" rIns="0" bIns="0" rtlCol="0" anchor="t"/>
-          <a:lstStyle/>
-          <a:p>
-            <a:pPr algn="l" indent="0" marL="0">
-              <a:lnSpc>
-                <a:spcPts val="1820"/>
-              </a:lnSpc>
-              <a:spcBef>
-                <a:spcPts val="300"/>
-              </a:spcBef>
-              <a:spcAft>
-                <a:spcPts val="300"/>
-              </a:spcAft>
-              <a:buNone/>
-            </a:pPr>
-            <a:r>
-              <a:rPr lang="en-US" sz="1300" b="1" i="1" dirty="0">
-                <a:solidFill>
-                  <a:srgbClr val="1C2833"/>
-                </a:solidFill>
-                <a:latin typeface="Georgia" pitchFamily="34" charset="0"/>
-                <a:ea typeface="Georgia" pitchFamily="34" charset="-122"/>
-                <a:cs typeface="Georgia" pitchFamily="34" charset="-120"/>
-              </a:rPr>
-              <a:t>The project, in one paragraph:</a:t>
-            </a:r>
-            <a:endParaRPr lang="en-US" sz="1300" dirty="0"/>
-          </a:p>
-        </p:txBody>
-      </p:sp>
-      <p:sp>
-        <p:nvSpPr>
-          <p:cNvPr id="7" name="Text 5"/>
-          <p:cNvSpPr/>
-          <p:nvPr/>
-        </p:nvSpPr>
-        <p:spPr>
-          <a:xfrm>
-            <a:off x="692051" y="1343174"/>
-            <a:ext cx="7973389" cy="692944"/>
-          </a:xfrm>
-          <a:prstGeom prst="rect">
-            <a:avLst/>
-          </a:prstGeom>
-          <a:noFill/>
-          <a:ln/>
-        </p:spPr>
-        <p:txBody>
-          <a:bodyPr wrap="square" lIns="0" tIns="0" rIns="0" bIns="0" rtlCol="0" anchor="t"/>
-          <a:lstStyle/>
-          <a:p>
-            <a:pPr algn="l" indent="0" marL="0">
-              <a:lnSpc>
-                <a:spcPts val="1820"/>
-              </a:lnSpc>
-              <a:spcBef>
-                <a:spcPts val="300"/>
-              </a:spcBef>
-              <a:spcAft>
-                <a:spcPts val="300"/>
-              </a:spcAft>
-              <a:buNone/>
-            </a:pPr>
-            <a:r>
-              <a:rPr lang="en-US" sz="1300" i="1" dirty="0">
-                <a:solidFill>
-                  <a:srgbClr val="1C2833"/>
-                </a:solidFill>
-                <a:latin typeface="Georgia" pitchFamily="34" charset="0"/>
-                <a:ea typeface="Georgia" pitchFamily="34" charset="-122"/>
-                <a:cs typeface="Georgia" pitchFamily="34" charset="-120"/>
-              </a:rPr>
-              <a:t>Design a 5-day doṣa-aware week for yourself. Pick ONE doṣa tendency from your self-observation. Plan 5 small, realistic daily changes that would support balance for that doṣa. Explain each change with the underlying concept. Cite one classical source. Present in 3 minutes on Day 10.</a:t>
-            </a:r>
-            <a:endParaRPr lang="en-US" sz="1300" dirty="0"/>
-          </a:p>
-        </p:txBody>
-      </p:sp>
-      <p:sp>
-        <p:nvSpPr>
-          <p:cNvPr id="8" name="Text 6"/>
-          <p:cNvSpPr/>
-          <p:nvPr/>
-        </p:nvSpPr>
-        <p:spPr>
-          <a:xfrm>
-            <a:off x="692051" y="2074218"/>
-            <a:ext cx="7973389" cy="230981"/>
-          </a:xfrm>
-          <a:prstGeom prst="rect">
-            <a:avLst/>
-          </a:prstGeom>
-          <a:noFill/>
-          <a:ln/>
-        </p:spPr>
-        <p:txBody>
-          <a:bodyPr wrap="square" lIns="0" tIns="0" rIns="0" bIns="0" rtlCol="0" anchor="t"/>
-          <a:lstStyle/>
-          <a:p>
-            <a:pPr algn="l" indent="0" marL="0">
-              <a:lnSpc>
-                <a:spcPts val="1820"/>
-              </a:lnSpc>
-              <a:spcBef>
-                <a:spcPts val="300"/>
-              </a:spcBef>
-              <a:spcAft>
-                <a:spcPts val="300"/>
-              </a:spcAft>
-              <a:buNone/>
-            </a:pPr>
-            <a:r>
-              <a:rPr lang="en-US" sz="1300" b="1" i="1" dirty="0">
-                <a:solidFill>
-                  <a:srgbClr val="1C2833"/>
-                </a:solidFill>
-                <a:latin typeface="Georgia" pitchFamily="34" charset="0"/>
-                <a:ea typeface="Georgia" pitchFamily="34" charset="-122"/>
-                <a:cs typeface="Georgia" pitchFamily="34" charset="-120"/>
-              </a:rPr>
-              <a:t>The principle behind the project:</a:t>
-            </a:r>
-            <a:endParaRPr lang="en-US" sz="1300" dirty="0"/>
-          </a:p>
-        </p:txBody>
-      </p:sp>
-      <p:sp>
-        <p:nvSpPr>
-          <p:cNvPr id="9" name="Text 7"/>
-          <p:cNvSpPr/>
-          <p:nvPr/>
-        </p:nvSpPr>
-        <p:spPr>
-          <a:xfrm>
-            <a:off x="692051" y="2343299"/>
-            <a:ext cx="7973389" cy="461963"/>
-          </a:xfrm>
-          <a:prstGeom prst="rect">
-            <a:avLst/>
-          </a:prstGeom>
-          <a:noFill/>
-          <a:ln/>
-        </p:spPr>
-        <p:txBody>
-          <a:bodyPr wrap="square" lIns="0" tIns="0" rIns="0" bIns="0" rtlCol="0" anchor="t"/>
-          <a:lstStyle/>
-          <a:p>
-            <a:pPr algn="l" indent="0" marL="0">
-              <a:lnSpc>
-                <a:spcPts val="1820"/>
-              </a:lnSpc>
-              <a:spcBef>
-                <a:spcPts val="300"/>
-              </a:spcBef>
-              <a:spcAft>
-                <a:spcPts val="300"/>
-              </a:spcAft>
-              <a:buNone/>
-            </a:pPr>
-            <a:r>
-              <a:rPr lang="en-US" sz="1300" dirty="0">
-                <a:solidFill>
-                  <a:srgbClr val="1C2833"/>
-                </a:solidFill>
-                <a:latin typeface="Georgia" pitchFamily="34" charset="0"/>
-                <a:ea typeface="Georgia" pitchFamily="34" charset="-122"/>
-                <a:cs typeface="Georgia" pitchFamily="34" charset="-120"/>
-              </a:rPr>
-              <a:t>The doṣa framework is most useful when it changes what you </a:t>
-            </a:r>
-            <a:pPr algn="l" indent="0" marL="0">
-              <a:lnSpc>
-                <a:spcPts val="1820"/>
-              </a:lnSpc>
-              <a:spcBef>
-                <a:spcPts val="300"/>
-              </a:spcBef>
-              <a:spcAft>
-                <a:spcPts val="300"/>
-              </a:spcAft>
-              <a:buNone/>
-            </a:pPr>
-            <a:r>
-              <a:rPr lang="en-US" sz="1300" i="1" dirty="0">
-                <a:solidFill>
-                  <a:srgbClr val="1C2833"/>
-                </a:solidFill>
-                <a:latin typeface="Georgia" pitchFamily="34" charset="0"/>
-                <a:ea typeface="Georgia" pitchFamily="34" charset="-122"/>
-                <a:cs typeface="Georgia" pitchFamily="34" charset="-120"/>
-              </a:rPr>
-              <a:t>do</a:t>
-            </a:r>
-            <a:pPr algn="l" indent="0" marL="0">
-              <a:lnSpc>
-                <a:spcPts val="1820"/>
-              </a:lnSpc>
-              <a:spcBef>
-                <a:spcPts val="300"/>
-              </a:spcBef>
-              <a:spcAft>
-                <a:spcPts val="300"/>
-              </a:spcAft>
-              <a:buNone/>
-            </a:pPr>
-            <a:r>
-              <a:rPr lang="en-US" sz="1300" dirty="0">
-                <a:solidFill>
-                  <a:srgbClr val="1C2833"/>
-                </a:solidFill>
-                <a:latin typeface="Georgia" pitchFamily="34" charset="0"/>
-                <a:ea typeface="Georgia" pitchFamily="34" charset="-122"/>
-                <a:cs typeface="Georgia" pitchFamily="34" charset="-120"/>
-              </a:rPr>
-              <a:t> — even a little. Designing a plan is the test of whether you've understood it.</a:t>
-            </a:r>
-            <a:endParaRPr lang="en-US" sz="1300" dirty="0"/>
-          </a:p>
-        </p:txBody>
-      </p:sp>
-      <p:sp>
-        <p:nvSpPr>
-          <p:cNvPr id="10" name="Text 8"/>
           <p:cNvSpPr/>
           <p:nvPr/>
         </p:nvSpPr>
@@ -7084,7 +6864,7 @@
                 <a:ea typeface="Georgia" pitchFamily="34" charset="-122"/>
                 <a:cs typeface="Georgia" pitchFamily="34" charset="-120"/>
               </a:rPr>
-              <a:t>Homework</a:t>
+              <a:t>Activity (30 min) — Plan writing (cont.)</a:t>
             </a:r>
             <a:endParaRPr lang="en-US" sz="1800" dirty="0"/>
           </a:p>
@@ -7098,8 +6878,61 @@
         </p:nvSpPr>
         <p:spPr>
           <a:xfrm>
-            <a:off x="406301" y="870942"/>
-            <a:ext cx="8498026" cy="213271"/>
+            <a:off x="406301" y="883593"/>
+            <a:ext cx="8331398" cy="7062341"/>
+          </a:xfrm>
+          <a:prstGeom prst="rect">
+            <a:avLst/>
+          </a:prstGeom>
+          <a:solidFill>
+            <a:srgbClr val="F4F8F9"/>
+          </a:solidFill>
+          <a:ln/>
+        </p:spPr>
+        <p:txBody>
+          <a:bodyPr wrap="square" rtlCol="0" anchor="ctr"/>
+          <a:lstStyle/>
+          <a:p>
+            <a:pPr indent="0" marL="0">
+              <a:buNone/>
+            </a:pPr>
+            <a:endParaRPr lang="en-US" dirty="0"/>
+          </a:p>
+        </p:txBody>
+      </p:sp>
+      <p:sp>
+        <p:nvSpPr>
+          <p:cNvPr id="5" name="Shape 3"/>
+          <p:cNvSpPr/>
+          <p:nvPr/>
+        </p:nvSpPr>
+        <p:spPr>
+          <a:xfrm>
+            <a:off x="430113" y="883593"/>
+            <a:ext cx="0" cy="7062341"/>
+          </a:xfrm>
+          <a:prstGeom prst="line">
+            <a:avLst/>
+          </a:prstGeom>
+          <a:noFill/>
+          <a:ln w="47625">
+            <a:solidFill>
+              <a:srgbClr val="277884"/>
+            </a:solidFill>
+            <a:prstDash val="solid"/>
+          </a:ln>
+        </p:spPr>
+      </p:sp>
+      <p:sp>
+        <p:nvSpPr>
+          <p:cNvPr id="6" name="Text 4"/>
+          <p:cNvSpPr/>
+          <p:nvPr/>
+        </p:nvSpPr>
+        <p:spPr>
+          <a:xfrm>
+            <a:off x="631627" y="1010543"/>
+            <a:ext cx="8086939" cy="174575"/>
           </a:xfrm>
           <a:prstGeom prst="rect">
             <a:avLst/>
@@ -7113,40 +6946,1336 @@
           <a:p>
             <a:pPr algn="l" indent="0" marL="0">
               <a:lnSpc>
-                <a:spcPts val="1680"/>
-              </a:lnSpc>
-              <a:spcBef>
-                <a:spcPts val="300"/>
-              </a:spcBef>
-              <a:spcAft>
-                <a:spcPts val="300"/>
-              </a:spcAft>
-              <a:buNone/>
-            </a:pPr>
-            <a:r>
-              <a:rPr lang="en-US" sz="1200" dirty="0">
-                <a:solidFill>
-                  <a:srgbClr val="1C2833"/>
-                </a:solidFill>
-                <a:latin typeface="Arial" pitchFamily="34" charset="0"/>
-                <a:ea typeface="Arial" pitchFamily="34" charset="-122"/>
-                <a:cs typeface="Arial" pitchFamily="34" charset="-120"/>
-              </a:rPr>
-              <a:t>– Refine your plan. Sleep on it. Cross out anything that won't fit your actual week. Bring two extra ideas tomorrow.</a:t>
-            </a:r>
-            <a:endParaRPr lang="en-US" sz="1200" dirty="0"/>
-          </a:p>
-        </p:txBody>
-      </p:sp>
-      <p:sp>
-        <p:nvSpPr>
-          <p:cNvPr id="5" name="Text 3"/>
-          <p:cNvSpPr/>
-          <p:nvPr/>
-        </p:nvSpPr>
-        <p:spPr>
-          <a:xfrm>
-            <a:off x="406301" y="4434929"/>
+                <a:spcPts val="1375"/>
+              </a:lnSpc>
+              <a:buNone/>
+            </a:pPr>
+            <a:r>
+              <a:rPr lang="en-US" sz="1100" dirty="0">
+                <a:solidFill>
+                  <a:srgbClr val="1C2833"/>
+                </a:solidFill>
+                <a:latin typeface="Courier New" pitchFamily="34" charset="0"/>
+                <a:ea typeface="Courier New" pitchFamily="34" charset="-122"/>
+                <a:cs typeface="Courier New" pitchFamily="34" charset="-120"/>
+              </a:rPr>
+              <a:t>1. My target tendency (e.g. "I notice some Vāta excess in winter — dry skin, light sleep"):</a:t>
+            </a:r>
+            <a:endParaRPr lang="en-US" sz="1100" dirty="0"/>
+          </a:p>
+        </p:txBody>
+      </p:sp>
+      <p:sp>
+        <p:nvSpPr>
+          <p:cNvPr id="7" name="Text 5"/>
+          <p:cNvSpPr/>
+          <p:nvPr/>
+        </p:nvSpPr>
+        <p:spPr>
+          <a:xfrm>
+            <a:off x="631627" y="1185118"/>
+            <a:ext cx="8086939" cy="174575"/>
+          </a:xfrm>
+          <a:prstGeom prst="rect">
+            <a:avLst/>
+          </a:prstGeom>
+          <a:noFill/>
+          <a:ln/>
+        </p:spPr>
+        <p:txBody>
+          <a:bodyPr wrap="square" lIns="0" tIns="0" rIns="0" bIns="0" rtlCol="0" anchor="t"/>
+          <a:lstStyle/>
+          <a:p>
+            <a:pPr algn="l" indent="0" marL="0">
+              <a:lnSpc>
+                <a:spcPts val="1375"/>
+              </a:lnSpc>
+              <a:buNone/>
+            </a:pPr>
+            <a:r>
+              <a:rPr lang="en-US" sz="1100" dirty="0">
+                <a:solidFill>
+                  <a:srgbClr val="1C2833"/>
+                </a:solidFill>
+                <a:latin typeface="Courier New" pitchFamily="34" charset="0"/>
+                <a:ea typeface="Courier New" pitchFamily="34" charset="-122"/>
+                <a:cs typeface="Courier New" pitchFamily="34" charset="-120"/>
+              </a:rPr>
+              <a:t>__________________________________________________________</a:t>
+            </a:r>
+            <a:endParaRPr lang="en-US" sz="1100" dirty="0"/>
+          </a:p>
+        </p:txBody>
+      </p:sp>
+      <p:sp>
+        <p:nvSpPr>
+          <p:cNvPr id="8" name="Text 6"/>
+          <p:cNvSpPr/>
+          <p:nvPr/>
+        </p:nvSpPr>
+        <p:spPr>
+          <a:xfrm>
+            <a:off x="631627" y="1534269"/>
+            <a:ext cx="8086939" cy="174575"/>
+          </a:xfrm>
+          <a:prstGeom prst="rect">
+            <a:avLst/>
+          </a:prstGeom>
+          <a:noFill/>
+          <a:ln/>
+        </p:spPr>
+        <p:txBody>
+          <a:bodyPr wrap="square" lIns="0" tIns="0" rIns="0" bIns="0" rtlCol="0" anchor="t"/>
+          <a:lstStyle/>
+          <a:p>
+            <a:pPr algn="l" indent="0" marL="0">
+              <a:lnSpc>
+                <a:spcPts val="1375"/>
+              </a:lnSpc>
+              <a:buNone/>
+            </a:pPr>
+            <a:r>
+              <a:rPr lang="en-US" sz="1100" dirty="0">
+                <a:solidFill>
+                  <a:srgbClr val="1C2833"/>
+                </a:solidFill>
+                <a:latin typeface="Courier New" pitchFamily="34" charset="0"/>
+                <a:ea typeface="Courier New" pitchFamily="34" charset="-122"/>
+                <a:cs typeface="Courier New" pitchFamily="34" charset="-120"/>
+              </a:rPr>
+              <a:t>2. Three qualities I'll lean toward to balance:</a:t>
+            </a:r>
+            <a:endParaRPr lang="en-US" sz="1100" dirty="0"/>
+          </a:p>
+        </p:txBody>
+      </p:sp>
+      <p:sp>
+        <p:nvSpPr>
+          <p:cNvPr id="9" name="Text 7"/>
+          <p:cNvSpPr/>
+          <p:nvPr/>
+        </p:nvSpPr>
+        <p:spPr>
+          <a:xfrm>
+            <a:off x="631627" y="1708845"/>
+            <a:ext cx="8086939" cy="174575"/>
+          </a:xfrm>
+          <a:prstGeom prst="rect">
+            <a:avLst/>
+          </a:prstGeom>
+          <a:noFill/>
+          <a:ln/>
+        </p:spPr>
+        <p:txBody>
+          <a:bodyPr wrap="square" lIns="0" tIns="0" rIns="0" bIns="0" rtlCol="0" anchor="t"/>
+          <a:lstStyle/>
+          <a:p>
+            <a:pPr algn="l" indent="0" marL="0">
+              <a:lnSpc>
+                <a:spcPts val="1375"/>
+              </a:lnSpc>
+              <a:buNone/>
+            </a:pPr>
+            <a:r>
+              <a:rPr lang="en-US" sz="1100" dirty="0">
+                <a:solidFill>
+                  <a:srgbClr val="1C2833"/>
+                </a:solidFill>
+                <a:latin typeface="Courier New" pitchFamily="34" charset="0"/>
+                <a:ea typeface="Courier New" pitchFamily="34" charset="-122"/>
+                <a:cs typeface="Courier New" pitchFamily="34" charset="-120"/>
+              </a:rPr>
+              <a:t>(e.g. for vāta: warm, oily, grounding)</a:t>
+            </a:r>
+            <a:endParaRPr lang="en-US" sz="1100" dirty="0"/>
+          </a:p>
+        </p:txBody>
+      </p:sp>
+      <p:sp>
+        <p:nvSpPr>
+          <p:cNvPr id="10" name="Text 8"/>
+          <p:cNvSpPr/>
+          <p:nvPr/>
+        </p:nvSpPr>
+        <p:spPr>
+          <a:xfrm>
+            <a:off x="631627" y="1883420"/>
+            <a:ext cx="8086939" cy="174575"/>
+          </a:xfrm>
+          <a:prstGeom prst="rect">
+            <a:avLst/>
+          </a:prstGeom>
+          <a:noFill/>
+          <a:ln/>
+        </p:spPr>
+        <p:txBody>
+          <a:bodyPr wrap="square" lIns="0" tIns="0" rIns="0" bIns="0" rtlCol="0" anchor="t"/>
+          <a:lstStyle/>
+          <a:p>
+            <a:pPr algn="l" indent="0" marL="0">
+              <a:lnSpc>
+                <a:spcPts val="1375"/>
+              </a:lnSpc>
+              <a:buNone/>
+            </a:pPr>
+            <a:r>
+              <a:rPr lang="en-US" sz="1100" dirty="0">
+                <a:solidFill>
+                  <a:srgbClr val="1C2833"/>
+                </a:solidFill>
+                <a:latin typeface="Courier New" pitchFamily="34" charset="0"/>
+                <a:ea typeface="Courier New" pitchFamily="34" charset="-122"/>
+                <a:cs typeface="Courier New" pitchFamily="34" charset="-120"/>
+              </a:rPr>
+              <a:t>– __________________________</a:t>
+            </a:r>
+            <a:endParaRPr lang="en-US" sz="1100" dirty="0"/>
+          </a:p>
+        </p:txBody>
+      </p:sp>
+      <p:sp>
+        <p:nvSpPr>
+          <p:cNvPr id="11" name="Text 9"/>
+          <p:cNvSpPr/>
+          <p:nvPr/>
+        </p:nvSpPr>
+        <p:spPr>
+          <a:xfrm>
+            <a:off x="631627" y="2057995"/>
+            <a:ext cx="8086939" cy="174575"/>
+          </a:xfrm>
+          <a:prstGeom prst="rect">
+            <a:avLst/>
+          </a:prstGeom>
+          <a:noFill/>
+          <a:ln/>
+        </p:spPr>
+        <p:txBody>
+          <a:bodyPr wrap="square" lIns="0" tIns="0" rIns="0" bIns="0" rtlCol="0" anchor="t"/>
+          <a:lstStyle/>
+          <a:p>
+            <a:pPr algn="l" indent="0" marL="0">
+              <a:lnSpc>
+                <a:spcPts val="1375"/>
+              </a:lnSpc>
+              <a:buNone/>
+            </a:pPr>
+            <a:r>
+              <a:rPr lang="en-US" sz="1100" dirty="0">
+                <a:solidFill>
+                  <a:srgbClr val="1C2833"/>
+                </a:solidFill>
+                <a:latin typeface="Courier New" pitchFamily="34" charset="0"/>
+                <a:ea typeface="Courier New" pitchFamily="34" charset="-122"/>
+                <a:cs typeface="Courier New" pitchFamily="34" charset="-120"/>
+              </a:rPr>
+              <a:t>– __________________________</a:t>
+            </a:r>
+            <a:endParaRPr lang="en-US" sz="1100" dirty="0"/>
+          </a:p>
+        </p:txBody>
+      </p:sp>
+      <p:sp>
+        <p:nvSpPr>
+          <p:cNvPr id="12" name="Text 10"/>
+          <p:cNvSpPr/>
+          <p:nvPr/>
+        </p:nvSpPr>
+        <p:spPr>
+          <a:xfrm>
+            <a:off x="631627" y="2232571"/>
+            <a:ext cx="8086939" cy="174575"/>
+          </a:xfrm>
+          <a:prstGeom prst="rect">
+            <a:avLst/>
+          </a:prstGeom>
+          <a:noFill/>
+          <a:ln/>
+        </p:spPr>
+        <p:txBody>
+          <a:bodyPr wrap="square" lIns="0" tIns="0" rIns="0" bIns="0" rtlCol="0" anchor="t"/>
+          <a:lstStyle/>
+          <a:p>
+            <a:pPr algn="l" indent="0" marL="0">
+              <a:lnSpc>
+                <a:spcPts val="1375"/>
+              </a:lnSpc>
+              <a:buNone/>
+            </a:pPr>
+            <a:r>
+              <a:rPr lang="en-US" sz="1100" dirty="0">
+                <a:solidFill>
+                  <a:srgbClr val="1C2833"/>
+                </a:solidFill>
+                <a:latin typeface="Courier New" pitchFamily="34" charset="0"/>
+                <a:ea typeface="Courier New" pitchFamily="34" charset="-122"/>
+                <a:cs typeface="Courier New" pitchFamily="34" charset="-120"/>
+              </a:rPr>
+              <a:t>– __________________________</a:t>
+            </a:r>
+            <a:endParaRPr lang="en-US" sz="1100" dirty="0"/>
+          </a:p>
+        </p:txBody>
+      </p:sp>
+      <p:sp>
+        <p:nvSpPr>
+          <p:cNvPr id="13" name="Text 11"/>
+          <p:cNvSpPr/>
+          <p:nvPr/>
+        </p:nvSpPr>
+        <p:spPr>
+          <a:xfrm>
+            <a:off x="631627" y="2581721"/>
+            <a:ext cx="8086939" cy="174575"/>
+          </a:xfrm>
+          <a:prstGeom prst="rect">
+            <a:avLst/>
+          </a:prstGeom>
+          <a:noFill/>
+          <a:ln/>
+        </p:spPr>
+        <p:txBody>
+          <a:bodyPr wrap="square" lIns="0" tIns="0" rIns="0" bIns="0" rtlCol="0" anchor="t"/>
+          <a:lstStyle/>
+          <a:p>
+            <a:pPr algn="l" indent="0" marL="0">
+              <a:lnSpc>
+                <a:spcPts val="1375"/>
+              </a:lnSpc>
+              <a:buNone/>
+            </a:pPr>
+            <a:r>
+              <a:rPr lang="en-US" sz="1100" dirty="0">
+                <a:solidFill>
+                  <a:srgbClr val="1C2833"/>
+                </a:solidFill>
+                <a:latin typeface="Courier New" pitchFamily="34" charset="0"/>
+                <a:ea typeface="Courier New" pitchFamily="34" charset="-122"/>
+                <a:cs typeface="Courier New" pitchFamily="34" charset="-120"/>
+              </a:rPr>
+              <a:t>3. Five days of small changes — ONE per day:</a:t>
+            </a:r>
+            <a:endParaRPr lang="en-US" sz="1100" dirty="0"/>
+          </a:p>
+        </p:txBody>
+      </p:sp>
+      <p:sp>
+        <p:nvSpPr>
+          <p:cNvPr id="14" name="Text 12"/>
+          <p:cNvSpPr/>
+          <p:nvPr/>
+        </p:nvSpPr>
+        <p:spPr>
+          <a:xfrm>
+            <a:off x="631627" y="2930872"/>
+            <a:ext cx="8086939" cy="174575"/>
+          </a:xfrm>
+          <a:prstGeom prst="rect">
+            <a:avLst/>
+          </a:prstGeom>
+          <a:noFill/>
+          <a:ln/>
+        </p:spPr>
+        <p:txBody>
+          <a:bodyPr wrap="square" lIns="0" tIns="0" rIns="0" bIns="0" rtlCol="0" anchor="t"/>
+          <a:lstStyle/>
+          <a:p>
+            <a:pPr algn="l" indent="0" marL="0">
+              <a:lnSpc>
+                <a:spcPts val="1375"/>
+              </a:lnSpc>
+              <a:buNone/>
+            </a:pPr>
+            <a:r>
+              <a:rPr lang="en-US" sz="1100" dirty="0">
+                <a:solidFill>
+                  <a:srgbClr val="1C2833"/>
+                </a:solidFill>
+                <a:latin typeface="Courier New" pitchFamily="34" charset="0"/>
+                <a:ea typeface="Courier New" pitchFamily="34" charset="-122"/>
+                <a:cs typeface="Courier New" pitchFamily="34" charset="-120"/>
+              </a:rPr>
+              <a:t>Day 1: _________________________________________________</a:t>
+            </a:r>
+            <a:endParaRPr lang="en-US" sz="1100" dirty="0"/>
+          </a:p>
+        </p:txBody>
+      </p:sp>
+      <p:sp>
+        <p:nvSpPr>
+          <p:cNvPr id="15" name="Text 13"/>
+          <p:cNvSpPr/>
+          <p:nvPr/>
+        </p:nvSpPr>
+        <p:spPr>
+          <a:xfrm>
+            <a:off x="631627" y="3105448"/>
+            <a:ext cx="8086939" cy="174575"/>
+          </a:xfrm>
+          <a:prstGeom prst="rect">
+            <a:avLst/>
+          </a:prstGeom>
+          <a:noFill/>
+          <a:ln/>
+        </p:spPr>
+        <p:txBody>
+          <a:bodyPr wrap="square" lIns="0" tIns="0" rIns="0" bIns="0" rtlCol="0" anchor="t"/>
+          <a:lstStyle/>
+          <a:p>
+            <a:pPr algn="l" indent="0" marL="0">
+              <a:lnSpc>
+                <a:spcPts val="1375"/>
+              </a:lnSpc>
+              <a:buNone/>
+            </a:pPr>
+            <a:r>
+              <a:rPr lang="en-US" sz="1100" dirty="0">
+                <a:solidFill>
+                  <a:srgbClr val="1C2833"/>
+                </a:solidFill>
+                <a:latin typeface="Courier New" pitchFamily="34" charset="0"/>
+                <a:ea typeface="Courier New" pitchFamily="34" charset="-122"/>
+                <a:cs typeface="Courier New" pitchFamily="34" charset="-120"/>
+              </a:rPr>
+              <a:t>Day 2: _________________________________________________</a:t>
+            </a:r>
+            <a:endParaRPr lang="en-US" sz="1100" dirty="0"/>
+          </a:p>
+        </p:txBody>
+      </p:sp>
+      <p:sp>
+        <p:nvSpPr>
+          <p:cNvPr id="16" name="Text 14"/>
+          <p:cNvSpPr/>
+          <p:nvPr/>
+        </p:nvSpPr>
+        <p:spPr>
+          <a:xfrm>
+            <a:off x="631627" y="3280023"/>
+            <a:ext cx="8086939" cy="174575"/>
+          </a:xfrm>
+          <a:prstGeom prst="rect">
+            <a:avLst/>
+          </a:prstGeom>
+          <a:noFill/>
+          <a:ln/>
+        </p:spPr>
+        <p:txBody>
+          <a:bodyPr wrap="square" lIns="0" tIns="0" rIns="0" bIns="0" rtlCol="0" anchor="t"/>
+          <a:lstStyle/>
+          <a:p>
+            <a:pPr algn="l" indent="0" marL="0">
+              <a:lnSpc>
+                <a:spcPts val="1375"/>
+              </a:lnSpc>
+              <a:buNone/>
+            </a:pPr>
+            <a:r>
+              <a:rPr lang="en-US" sz="1100" dirty="0">
+                <a:solidFill>
+                  <a:srgbClr val="1C2833"/>
+                </a:solidFill>
+                <a:latin typeface="Courier New" pitchFamily="34" charset="0"/>
+                <a:ea typeface="Courier New" pitchFamily="34" charset="-122"/>
+                <a:cs typeface="Courier New" pitchFamily="34" charset="-120"/>
+              </a:rPr>
+              <a:t>Day 3: _________________________________________________</a:t>
+            </a:r>
+            <a:endParaRPr lang="en-US" sz="1100" dirty="0"/>
+          </a:p>
+        </p:txBody>
+      </p:sp>
+      <p:sp>
+        <p:nvSpPr>
+          <p:cNvPr id="17" name="Text 15"/>
+          <p:cNvSpPr/>
+          <p:nvPr/>
+        </p:nvSpPr>
+        <p:spPr>
+          <a:xfrm>
+            <a:off x="631627" y="3454598"/>
+            <a:ext cx="8086939" cy="174575"/>
+          </a:xfrm>
+          <a:prstGeom prst="rect">
+            <a:avLst/>
+          </a:prstGeom>
+          <a:noFill/>
+          <a:ln/>
+        </p:spPr>
+        <p:txBody>
+          <a:bodyPr wrap="square" lIns="0" tIns="0" rIns="0" bIns="0" rtlCol="0" anchor="t"/>
+          <a:lstStyle/>
+          <a:p>
+            <a:pPr algn="l" indent="0" marL="0">
+              <a:lnSpc>
+                <a:spcPts val="1375"/>
+              </a:lnSpc>
+              <a:buNone/>
+            </a:pPr>
+            <a:r>
+              <a:rPr lang="en-US" sz="1100" dirty="0">
+                <a:solidFill>
+                  <a:srgbClr val="1C2833"/>
+                </a:solidFill>
+                <a:latin typeface="Courier New" pitchFamily="34" charset="0"/>
+                <a:ea typeface="Courier New" pitchFamily="34" charset="-122"/>
+                <a:cs typeface="Courier New" pitchFamily="34" charset="-120"/>
+              </a:rPr>
+              <a:t>Day 4: _________________________________________________</a:t>
+            </a:r>
+            <a:endParaRPr lang="en-US" sz="1100" dirty="0"/>
+          </a:p>
+        </p:txBody>
+      </p:sp>
+      <p:sp>
+        <p:nvSpPr>
+          <p:cNvPr id="18" name="Text 16"/>
+          <p:cNvSpPr/>
+          <p:nvPr/>
+        </p:nvSpPr>
+        <p:spPr>
+          <a:xfrm>
+            <a:off x="631627" y="3629174"/>
+            <a:ext cx="8086939" cy="174575"/>
+          </a:xfrm>
+          <a:prstGeom prst="rect">
+            <a:avLst/>
+          </a:prstGeom>
+          <a:noFill/>
+          <a:ln/>
+        </p:spPr>
+        <p:txBody>
+          <a:bodyPr wrap="square" lIns="0" tIns="0" rIns="0" bIns="0" rtlCol="0" anchor="t"/>
+          <a:lstStyle/>
+          <a:p>
+            <a:pPr algn="l" indent="0" marL="0">
+              <a:lnSpc>
+                <a:spcPts val="1375"/>
+              </a:lnSpc>
+              <a:buNone/>
+            </a:pPr>
+            <a:r>
+              <a:rPr lang="en-US" sz="1100" dirty="0">
+                <a:solidFill>
+                  <a:srgbClr val="1C2833"/>
+                </a:solidFill>
+                <a:latin typeface="Courier New" pitchFamily="34" charset="0"/>
+                <a:ea typeface="Courier New" pitchFamily="34" charset="-122"/>
+                <a:cs typeface="Courier New" pitchFamily="34" charset="-120"/>
+              </a:rPr>
+              <a:t>Day 5: _________________________________________________</a:t>
+            </a:r>
+            <a:endParaRPr lang="en-US" sz="1100" dirty="0"/>
+          </a:p>
+        </p:txBody>
+      </p:sp>
+      <p:sp>
+        <p:nvSpPr>
+          <p:cNvPr id="19" name="Text 17"/>
+          <p:cNvSpPr/>
+          <p:nvPr/>
+        </p:nvSpPr>
+        <p:spPr>
+          <a:xfrm>
+            <a:off x="631627" y="3978325"/>
+            <a:ext cx="8086939" cy="174575"/>
+          </a:xfrm>
+          <a:prstGeom prst="rect">
+            <a:avLst/>
+          </a:prstGeom>
+          <a:noFill/>
+          <a:ln/>
+        </p:spPr>
+        <p:txBody>
+          <a:bodyPr wrap="square" lIns="0" tIns="0" rIns="0" bIns="0" rtlCol="0" anchor="t"/>
+          <a:lstStyle/>
+          <a:p>
+            <a:pPr algn="l" indent="0" marL="0">
+              <a:lnSpc>
+                <a:spcPts val="1375"/>
+              </a:lnSpc>
+              <a:buNone/>
+            </a:pPr>
+            <a:r>
+              <a:rPr lang="en-US" sz="1100" dirty="0">
+                <a:solidFill>
+                  <a:srgbClr val="1C2833"/>
+                </a:solidFill>
+                <a:latin typeface="Courier New" pitchFamily="34" charset="0"/>
+                <a:ea typeface="Courier New" pitchFamily="34" charset="-122"/>
+                <a:cs typeface="Courier New" pitchFamily="34" charset="-120"/>
+              </a:rPr>
+              <a:t>4. For each change, the underlying doṣa concept:</a:t>
+            </a:r>
+            <a:endParaRPr lang="en-US" sz="1100" dirty="0"/>
+          </a:p>
+        </p:txBody>
+      </p:sp>
+      <p:sp>
+        <p:nvSpPr>
+          <p:cNvPr id="20" name="Text 18"/>
+          <p:cNvSpPr/>
+          <p:nvPr/>
+        </p:nvSpPr>
+        <p:spPr>
+          <a:xfrm>
+            <a:off x="631627" y="4152900"/>
+            <a:ext cx="8086939" cy="174575"/>
+          </a:xfrm>
+          <a:prstGeom prst="rect">
+            <a:avLst/>
+          </a:prstGeom>
+          <a:noFill/>
+          <a:ln/>
+        </p:spPr>
+        <p:txBody>
+          <a:bodyPr wrap="square" lIns="0" tIns="0" rIns="0" bIns="0" rtlCol="0" anchor="t"/>
+          <a:lstStyle/>
+          <a:p>
+            <a:pPr algn="l" indent="0" marL="0">
+              <a:lnSpc>
+                <a:spcPts val="1375"/>
+              </a:lnSpc>
+              <a:buNone/>
+            </a:pPr>
+            <a:r>
+              <a:rPr lang="en-US" sz="1100" dirty="0">
+                <a:solidFill>
+                  <a:srgbClr val="1C2833"/>
+                </a:solidFill>
+                <a:latin typeface="Courier New" pitchFamily="34" charset="0"/>
+                <a:ea typeface="Courier New" pitchFamily="34" charset="-122"/>
+                <a:cs typeface="Courier New" pitchFamily="34" charset="-120"/>
+              </a:rPr>
+              <a:t>Day 1 concept: __________________________________________</a:t>
+            </a:r>
+            <a:endParaRPr lang="en-US" sz="1100" dirty="0"/>
+          </a:p>
+        </p:txBody>
+      </p:sp>
+      <p:sp>
+        <p:nvSpPr>
+          <p:cNvPr id="21" name="Text 19"/>
+          <p:cNvSpPr/>
+          <p:nvPr/>
+        </p:nvSpPr>
+        <p:spPr>
+          <a:xfrm>
+            <a:off x="631627" y="4327475"/>
+            <a:ext cx="8086939" cy="174575"/>
+          </a:xfrm>
+          <a:prstGeom prst="rect">
+            <a:avLst/>
+          </a:prstGeom>
+          <a:noFill/>
+          <a:ln/>
+        </p:spPr>
+        <p:txBody>
+          <a:bodyPr wrap="square" lIns="0" tIns="0" rIns="0" bIns="0" rtlCol="0" anchor="t"/>
+          <a:lstStyle/>
+          <a:p>
+            <a:pPr algn="l" indent="0" marL="0">
+              <a:lnSpc>
+                <a:spcPts val="1375"/>
+              </a:lnSpc>
+              <a:buNone/>
+            </a:pPr>
+            <a:r>
+              <a:rPr lang="en-US" sz="1100" dirty="0">
+                <a:solidFill>
+                  <a:srgbClr val="1C2833"/>
+                </a:solidFill>
+                <a:latin typeface="Courier New" pitchFamily="34" charset="0"/>
+                <a:ea typeface="Courier New" pitchFamily="34" charset="-122"/>
+                <a:cs typeface="Courier New" pitchFamily="34" charset="-120"/>
+              </a:rPr>
+              <a:t>Day 2 concept: __________________________________________</a:t>
+            </a:r>
+            <a:endParaRPr lang="en-US" sz="1100" dirty="0"/>
+          </a:p>
+        </p:txBody>
+      </p:sp>
+      <p:sp>
+        <p:nvSpPr>
+          <p:cNvPr id="22" name="Text 20"/>
+          <p:cNvSpPr/>
+          <p:nvPr/>
+        </p:nvSpPr>
+        <p:spPr>
+          <a:xfrm>
+            <a:off x="631627" y="4502051"/>
+            <a:ext cx="8086939" cy="174575"/>
+          </a:xfrm>
+          <a:prstGeom prst="rect">
+            <a:avLst/>
+          </a:prstGeom>
+          <a:noFill/>
+          <a:ln/>
+        </p:spPr>
+        <p:txBody>
+          <a:bodyPr wrap="square" lIns="0" tIns="0" rIns="0" bIns="0" rtlCol="0" anchor="t"/>
+          <a:lstStyle/>
+          <a:p>
+            <a:pPr algn="l" indent="0" marL="0">
+              <a:lnSpc>
+                <a:spcPts val="1375"/>
+              </a:lnSpc>
+              <a:buNone/>
+            </a:pPr>
+            <a:r>
+              <a:rPr lang="en-US" sz="1100" dirty="0">
+                <a:solidFill>
+                  <a:srgbClr val="1C2833"/>
+                </a:solidFill>
+                <a:latin typeface="Courier New" pitchFamily="34" charset="0"/>
+                <a:ea typeface="Courier New" pitchFamily="34" charset="-122"/>
+                <a:cs typeface="Courier New" pitchFamily="34" charset="-120"/>
+              </a:rPr>
+              <a:t>Day 3 concept: __________________________________________</a:t>
+            </a:r>
+            <a:endParaRPr lang="en-US" sz="1100" dirty="0"/>
+          </a:p>
+        </p:txBody>
+      </p:sp>
+      <p:sp>
+        <p:nvSpPr>
+          <p:cNvPr id="23" name="Text 21"/>
+          <p:cNvSpPr/>
+          <p:nvPr/>
+        </p:nvSpPr>
+        <p:spPr>
+          <a:xfrm>
+            <a:off x="631627" y="4676626"/>
+            <a:ext cx="8086939" cy="174575"/>
+          </a:xfrm>
+          <a:prstGeom prst="rect">
+            <a:avLst/>
+          </a:prstGeom>
+          <a:noFill/>
+          <a:ln/>
+        </p:spPr>
+        <p:txBody>
+          <a:bodyPr wrap="square" lIns="0" tIns="0" rIns="0" bIns="0" rtlCol="0" anchor="t"/>
+          <a:lstStyle/>
+          <a:p>
+            <a:pPr algn="l" indent="0" marL="0">
+              <a:lnSpc>
+                <a:spcPts val="1375"/>
+              </a:lnSpc>
+              <a:buNone/>
+            </a:pPr>
+            <a:r>
+              <a:rPr lang="en-US" sz="1100" dirty="0">
+                <a:solidFill>
+                  <a:srgbClr val="1C2833"/>
+                </a:solidFill>
+                <a:latin typeface="Courier New" pitchFamily="34" charset="0"/>
+                <a:ea typeface="Courier New" pitchFamily="34" charset="-122"/>
+                <a:cs typeface="Courier New" pitchFamily="34" charset="-120"/>
+              </a:rPr>
+              <a:t>Day 4 concept: __________________________________________</a:t>
+            </a:r>
+            <a:endParaRPr lang="en-US" sz="1100" dirty="0"/>
+          </a:p>
+        </p:txBody>
+      </p:sp>
+      <p:sp>
+        <p:nvSpPr>
+          <p:cNvPr id="24" name="Text 22"/>
+          <p:cNvSpPr/>
+          <p:nvPr/>
+        </p:nvSpPr>
+        <p:spPr>
+          <a:xfrm>
+            <a:off x="631627" y="4851202"/>
+            <a:ext cx="8086939" cy="174575"/>
+          </a:xfrm>
+          <a:prstGeom prst="rect">
+            <a:avLst/>
+          </a:prstGeom>
+          <a:noFill/>
+          <a:ln/>
+        </p:spPr>
+        <p:txBody>
+          <a:bodyPr wrap="square" lIns="0" tIns="0" rIns="0" bIns="0" rtlCol="0" anchor="t"/>
+          <a:lstStyle/>
+          <a:p>
+            <a:pPr algn="l" indent="0" marL="0">
+              <a:lnSpc>
+                <a:spcPts val="1375"/>
+              </a:lnSpc>
+              <a:buNone/>
+            </a:pPr>
+            <a:r>
+              <a:rPr lang="en-US" sz="1100" dirty="0">
+                <a:solidFill>
+                  <a:srgbClr val="1C2833"/>
+                </a:solidFill>
+                <a:latin typeface="Courier New" pitchFamily="34" charset="0"/>
+                <a:ea typeface="Courier New" pitchFamily="34" charset="-122"/>
+                <a:cs typeface="Courier New" pitchFamily="34" charset="-120"/>
+              </a:rPr>
+              <a:t>Day 5 concept: __________________________________________</a:t>
+            </a:r>
+            <a:endParaRPr lang="en-US" sz="1100" dirty="0"/>
+          </a:p>
+        </p:txBody>
+      </p:sp>
+      <p:sp>
+        <p:nvSpPr>
+          <p:cNvPr id="25" name="Text 23"/>
+          <p:cNvSpPr/>
+          <p:nvPr/>
+        </p:nvSpPr>
+        <p:spPr>
+          <a:xfrm>
+            <a:off x="631627" y="5200352"/>
+            <a:ext cx="8086939" cy="174575"/>
+          </a:xfrm>
+          <a:prstGeom prst="rect">
+            <a:avLst/>
+          </a:prstGeom>
+          <a:noFill/>
+          <a:ln/>
+        </p:spPr>
+        <p:txBody>
+          <a:bodyPr wrap="square" lIns="0" tIns="0" rIns="0" bIns="0" rtlCol="0" anchor="t"/>
+          <a:lstStyle/>
+          <a:p>
+            <a:pPr algn="l" indent="0" marL="0">
+              <a:lnSpc>
+                <a:spcPts val="1375"/>
+              </a:lnSpc>
+              <a:buNone/>
+            </a:pPr>
+            <a:r>
+              <a:rPr lang="en-US" sz="1100" dirty="0">
+                <a:solidFill>
+                  <a:srgbClr val="1C2833"/>
+                </a:solidFill>
+                <a:latin typeface="Courier New" pitchFamily="34" charset="0"/>
+                <a:ea typeface="Courier New" pitchFamily="34" charset="-122"/>
+                <a:cs typeface="Courier New" pitchFamily="34" charset="-120"/>
+              </a:rPr>
+              <a:t>5. Citation I'll use:</a:t>
+            </a:r>
+            <a:endParaRPr lang="en-US" sz="1100" dirty="0"/>
+          </a:p>
+        </p:txBody>
+      </p:sp>
+      <p:sp>
+        <p:nvSpPr>
+          <p:cNvPr id="26" name="Text 24"/>
+          <p:cNvSpPr/>
+          <p:nvPr/>
+        </p:nvSpPr>
+        <p:spPr>
+          <a:xfrm>
+            <a:off x="631627" y="5374928"/>
+            <a:ext cx="8086939" cy="174575"/>
+          </a:xfrm>
+          <a:prstGeom prst="rect">
+            <a:avLst/>
+          </a:prstGeom>
+          <a:noFill/>
+          <a:ln/>
+        </p:spPr>
+        <p:txBody>
+          <a:bodyPr wrap="square" lIns="0" tIns="0" rIns="0" bIns="0" rtlCol="0" anchor="t"/>
+          <a:lstStyle/>
+          <a:p>
+            <a:pPr algn="l" indent="0" marL="0">
+              <a:lnSpc>
+                <a:spcPts val="1375"/>
+              </a:lnSpc>
+              <a:buNone/>
+            </a:pPr>
+            <a:r>
+              <a:rPr lang="en-US" sz="1100" dirty="0">
+                <a:solidFill>
+                  <a:srgbClr val="1C2833"/>
+                </a:solidFill>
+                <a:latin typeface="Courier New" pitchFamily="34" charset="0"/>
+                <a:ea typeface="Courier New" pitchFamily="34" charset="-122"/>
+                <a:cs typeface="Courier New" pitchFamily="34" charset="-120"/>
+              </a:rPr>
+              <a:t>(e.g. "Aṣṭāṅga Hṛdaya, Sūtrasthāna 1.6–7 — the doṣa-dhātu-mala framework")</a:t>
+            </a:r>
+            <a:endParaRPr lang="en-US" sz="1100" dirty="0"/>
+          </a:p>
+        </p:txBody>
+      </p:sp>
+      <p:sp>
+        <p:nvSpPr>
+          <p:cNvPr id="27" name="Text 25"/>
+          <p:cNvSpPr/>
+          <p:nvPr/>
+        </p:nvSpPr>
+        <p:spPr>
+          <a:xfrm>
+            <a:off x="631627" y="5549503"/>
+            <a:ext cx="8086939" cy="174575"/>
+          </a:xfrm>
+          <a:prstGeom prst="rect">
+            <a:avLst/>
+          </a:prstGeom>
+          <a:noFill/>
+          <a:ln/>
+        </p:spPr>
+        <p:txBody>
+          <a:bodyPr wrap="square" lIns="0" tIns="0" rIns="0" bIns="0" rtlCol="0" anchor="t"/>
+          <a:lstStyle/>
+          <a:p>
+            <a:pPr algn="l" indent="0" marL="0">
+              <a:lnSpc>
+                <a:spcPts val="1375"/>
+              </a:lnSpc>
+              <a:buNone/>
+            </a:pPr>
+            <a:r>
+              <a:rPr lang="en-US" sz="1100" dirty="0">
+                <a:solidFill>
+                  <a:srgbClr val="1C2833"/>
+                </a:solidFill>
+                <a:latin typeface="Courier New" pitchFamily="34" charset="0"/>
+                <a:ea typeface="Courier New" pitchFamily="34" charset="-122"/>
+                <a:cs typeface="Courier New" pitchFamily="34" charset="-120"/>
+              </a:rPr>
+              <a:t>__________________________________________________________</a:t>
+            </a:r>
+            <a:endParaRPr lang="en-US" sz="1100" dirty="0"/>
+          </a:p>
+        </p:txBody>
+      </p:sp>
+      <p:sp>
+        <p:nvSpPr>
+          <p:cNvPr id="28" name="Text 26"/>
+          <p:cNvSpPr/>
+          <p:nvPr/>
+        </p:nvSpPr>
+        <p:spPr>
+          <a:xfrm>
+            <a:off x="631627" y="5898654"/>
+            <a:ext cx="8086939" cy="174575"/>
+          </a:xfrm>
+          <a:prstGeom prst="rect">
+            <a:avLst/>
+          </a:prstGeom>
+          <a:noFill/>
+          <a:ln/>
+        </p:spPr>
+        <p:txBody>
+          <a:bodyPr wrap="square" lIns="0" tIns="0" rIns="0" bIns="0" rtlCol="0" anchor="t"/>
+          <a:lstStyle/>
+          <a:p>
+            <a:pPr algn="l" indent="0" marL="0">
+              <a:lnSpc>
+                <a:spcPts val="1375"/>
+              </a:lnSpc>
+              <a:buNone/>
+            </a:pPr>
+            <a:r>
+              <a:rPr lang="en-US" sz="1100" dirty="0">
+                <a:solidFill>
+                  <a:srgbClr val="1C2833"/>
+                </a:solidFill>
+                <a:latin typeface="Courier New" pitchFamily="34" charset="0"/>
+                <a:ea typeface="Courier New" pitchFamily="34" charset="-122"/>
+                <a:cs typeface="Courier New" pitchFamily="34" charset="-120"/>
+              </a:rPr>
+              <a:t>6. My presentation format:</a:t>
+            </a:r>
+            <a:endParaRPr lang="en-US" sz="1100" dirty="0"/>
+          </a:p>
+        </p:txBody>
+      </p:sp>
+      <p:sp>
+        <p:nvSpPr>
+          <p:cNvPr id="29" name="Text 27"/>
+          <p:cNvSpPr/>
+          <p:nvPr/>
+        </p:nvSpPr>
+        <p:spPr>
+          <a:xfrm>
+            <a:off x="631627" y="6073229"/>
+            <a:ext cx="8086939" cy="174575"/>
+          </a:xfrm>
+          <a:prstGeom prst="rect">
+            <a:avLst/>
+          </a:prstGeom>
+          <a:noFill/>
+          <a:ln/>
+        </p:spPr>
+        <p:txBody>
+          <a:bodyPr wrap="square" lIns="0" tIns="0" rIns="0" bIns="0" rtlCol="0" anchor="t"/>
+          <a:lstStyle/>
+          <a:p>
+            <a:pPr algn="l" indent="0" marL="0">
+              <a:lnSpc>
+                <a:spcPts val="1375"/>
+              </a:lnSpc>
+              <a:buNone/>
+            </a:pPr>
+            <a:r>
+              <a:rPr lang="en-US" sz="1100" dirty="0">
+                <a:solidFill>
+                  <a:srgbClr val="1C2833"/>
+                </a:solidFill>
+                <a:latin typeface="Courier New" pitchFamily="34" charset="0"/>
+                <a:ea typeface="Courier New" pitchFamily="34" charset="-122"/>
+                <a:cs typeface="Courier New" pitchFamily="34" charset="-120"/>
+              </a:rPr>
+              <a:t>☐ Poster (A2)</a:t>
+            </a:r>
+            <a:endParaRPr lang="en-US" sz="1100" dirty="0"/>
+          </a:p>
+        </p:txBody>
+      </p:sp>
+      <p:sp>
+        <p:nvSpPr>
+          <p:cNvPr id="30" name="Text 28"/>
+          <p:cNvSpPr/>
+          <p:nvPr/>
+        </p:nvSpPr>
+        <p:spPr>
+          <a:xfrm>
+            <a:off x="631627" y="6247805"/>
+            <a:ext cx="8086939" cy="174575"/>
+          </a:xfrm>
+          <a:prstGeom prst="rect">
+            <a:avLst/>
+          </a:prstGeom>
+          <a:noFill/>
+          <a:ln/>
+        </p:spPr>
+        <p:txBody>
+          <a:bodyPr wrap="square" lIns="0" tIns="0" rIns="0" bIns="0" rtlCol="0" anchor="t"/>
+          <a:lstStyle/>
+          <a:p>
+            <a:pPr algn="l" indent="0" marL="0">
+              <a:lnSpc>
+                <a:spcPts val="1375"/>
+              </a:lnSpc>
+              <a:buNone/>
+            </a:pPr>
+            <a:r>
+              <a:rPr lang="en-US" sz="1100" dirty="0">
+                <a:solidFill>
+                  <a:srgbClr val="1C2833"/>
+                </a:solidFill>
+                <a:latin typeface="Courier New" pitchFamily="34" charset="0"/>
+                <a:ea typeface="Courier New" pitchFamily="34" charset="-122"/>
+                <a:cs typeface="Courier New" pitchFamily="34" charset="-120"/>
+              </a:rPr>
+              <a:t>☐ Live demo (2 min)</a:t>
+            </a:r>
+            <a:endParaRPr lang="en-US" sz="1100" dirty="0"/>
+          </a:p>
+        </p:txBody>
+      </p:sp>
+      <p:sp>
+        <p:nvSpPr>
+          <p:cNvPr id="31" name="Text 29"/>
+          <p:cNvSpPr/>
+          <p:nvPr/>
+        </p:nvSpPr>
+        <p:spPr>
+          <a:xfrm>
+            <a:off x="631627" y="6422380"/>
+            <a:ext cx="8086939" cy="174575"/>
+          </a:xfrm>
+          <a:prstGeom prst="rect">
+            <a:avLst/>
+          </a:prstGeom>
+          <a:noFill/>
+          <a:ln/>
+        </p:spPr>
+        <p:txBody>
+          <a:bodyPr wrap="square" lIns="0" tIns="0" rIns="0" bIns="0" rtlCol="0" anchor="t"/>
+          <a:lstStyle/>
+          <a:p>
+            <a:pPr algn="l" indent="0" marL="0">
+              <a:lnSpc>
+                <a:spcPts val="1375"/>
+              </a:lnSpc>
+              <a:buNone/>
+            </a:pPr>
+            <a:r>
+              <a:rPr lang="en-US" sz="1100" dirty="0">
+                <a:solidFill>
+                  <a:srgbClr val="1C2833"/>
+                </a:solidFill>
+                <a:latin typeface="Courier New" pitchFamily="34" charset="0"/>
+                <a:ea typeface="Courier New" pitchFamily="34" charset="-122"/>
+                <a:cs typeface="Courier New" pitchFamily="34" charset="-120"/>
+              </a:rPr>
+              <a:t>☐ Short story (1 page)</a:t>
+            </a:r>
+            <a:endParaRPr lang="en-US" sz="1100" dirty="0"/>
+          </a:p>
+        </p:txBody>
+      </p:sp>
+      <p:sp>
+        <p:nvSpPr>
+          <p:cNvPr id="32" name="Text 30"/>
+          <p:cNvSpPr/>
+          <p:nvPr/>
+        </p:nvSpPr>
+        <p:spPr>
+          <a:xfrm>
+            <a:off x="631627" y="6596955"/>
+            <a:ext cx="8086939" cy="174575"/>
+          </a:xfrm>
+          <a:prstGeom prst="rect">
+            <a:avLst/>
+          </a:prstGeom>
+          <a:noFill/>
+          <a:ln/>
+        </p:spPr>
+        <p:txBody>
+          <a:bodyPr wrap="square" lIns="0" tIns="0" rIns="0" bIns="0" rtlCol="0" anchor="t"/>
+          <a:lstStyle/>
+          <a:p>
+            <a:pPr algn="l" indent="0" marL="0">
+              <a:lnSpc>
+                <a:spcPts val="1375"/>
+              </a:lnSpc>
+              <a:buNone/>
+            </a:pPr>
+            <a:r>
+              <a:rPr lang="en-US" sz="1100" dirty="0">
+                <a:solidFill>
+                  <a:srgbClr val="1C2833"/>
+                </a:solidFill>
+                <a:latin typeface="Courier New" pitchFamily="34" charset="0"/>
+                <a:ea typeface="Courier New" pitchFamily="34" charset="-122"/>
+                <a:cs typeface="Courier New" pitchFamily="34" charset="-120"/>
+              </a:rPr>
+              <a:t>☐ 90-sec video</a:t>
+            </a:r>
+            <a:endParaRPr lang="en-US" sz="1100" dirty="0"/>
+          </a:p>
+        </p:txBody>
+      </p:sp>
+      <p:sp>
+        <p:nvSpPr>
+          <p:cNvPr id="33" name="Text 31"/>
+          <p:cNvSpPr/>
+          <p:nvPr/>
+        </p:nvSpPr>
+        <p:spPr>
+          <a:xfrm>
+            <a:off x="631627" y="6771531"/>
+            <a:ext cx="8086939" cy="174575"/>
+          </a:xfrm>
+          <a:prstGeom prst="rect">
+            <a:avLst/>
+          </a:prstGeom>
+          <a:noFill/>
+          <a:ln/>
+        </p:spPr>
+        <p:txBody>
+          <a:bodyPr wrap="square" lIns="0" tIns="0" rIns="0" bIns="0" rtlCol="0" anchor="t"/>
+          <a:lstStyle/>
+          <a:p>
+            <a:pPr algn="l" indent="0" marL="0">
+              <a:lnSpc>
+                <a:spcPts val="1375"/>
+              </a:lnSpc>
+              <a:buNone/>
+            </a:pPr>
+            <a:r>
+              <a:rPr lang="en-US" sz="1100" dirty="0">
+                <a:solidFill>
+                  <a:srgbClr val="1C2833"/>
+                </a:solidFill>
+                <a:latin typeface="Courier New" pitchFamily="34" charset="0"/>
+                <a:ea typeface="Courier New" pitchFamily="34" charset="-122"/>
+                <a:cs typeface="Courier New" pitchFamily="34" charset="-120"/>
+              </a:rPr>
+              <a:t>☐ Infographic</a:t>
+            </a:r>
+            <a:endParaRPr lang="en-US" sz="1100" dirty="0"/>
+          </a:p>
+        </p:txBody>
+      </p:sp>
+      <p:sp>
+        <p:nvSpPr>
+          <p:cNvPr id="34" name="Text 32"/>
+          <p:cNvSpPr/>
+          <p:nvPr/>
+        </p:nvSpPr>
+        <p:spPr>
+          <a:xfrm>
+            <a:off x="631627" y="6946106"/>
+            <a:ext cx="8086939" cy="174575"/>
+          </a:xfrm>
+          <a:prstGeom prst="rect">
+            <a:avLst/>
+          </a:prstGeom>
+          <a:noFill/>
+          <a:ln/>
+        </p:spPr>
+        <p:txBody>
+          <a:bodyPr wrap="square" lIns="0" tIns="0" rIns="0" bIns="0" rtlCol="0" anchor="t"/>
+          <a:lstStyle/>
+          <a:p>
+            <a:pPr algn="l" indent="0" marL="0">
+              <a:lnSpc>
+                <a:spcPts val="1375"/>
+              </a:lnSpc>
+              <a:buNone/>
+            </a:pPr>
+            <a:r>
+              <a:rPr lang="en-US" sz="1100" dirty="0">
+                <a:solidFill>
+                  <a:srgbClr val="1C2833"/>
+                </a:solidFill>
+                <a:latin typeface="Courier New" pitchFamily="34" charset="0"/>
+                <a:ea typeface="Courier New" pitchFamily="34" charset="-122"/>
+                <a:cs typeface="Courier New" pitchFamily="34" charset="-120"/>
+              </a:rPr>
+              <a:t>☐ Original song / poem</a:t>
+            </a:r>
+            <a:endParaRPr lang="en-US" sz="1100" dirty="0"/>
+          </a:p>
+        </p:txBody>
+      </p:sp>
+      <p:sp>
+        <p:nvSpPr>
+          <p:cNvPr id="35" name="Text 33"/>
+          <p:cNvSpPr/>
+          <p:nvPr/>
+        </p:nvSpPr>
+        <p:spPr>
+          <a:xfrm>
+            <a:off x="631627" y="7120682"/>
+            <a:ext cx="8086939" cy="174575"/>
+          </a:xfrm>
+          <a:prstGeom prst="rect">
+            <a:avLst/>
+          </a:prstGeom>
+          <a:noFill/>
+          <a:ln/>
+        </p:spPr>
+        <p:txBody>
+          <a:bodyPr wrap="square" lIns="0" tIns="0" rIns="0" bIns="0" rtlCol="0" anchor="t"/>
+          <a:lstStyle/>
+          <a:p>
+            <a:pPr algn="l" indent="0" marL="0">
+              <a:lnSpc>
+                <a:spcPts val="1375"/>
+              </a:lnSpc>
+              <a:buNone/>
+            </a:pPr>
+            <a:r>
+              <a:rPr lang="en-US" sz="1100" dirty="0">
+                <a:solidFill>
+                  <a:srgbClr val="1C2833"/>
+                </a:solidFill>
+                <a:latin typeface="Courier New" pitchFamily="34" charset="0"/>
+                <a:ea typeface="Courier New" pitchFamily="34" charset="-122"/>
+                <a:cs typeface="Courier New" pitchFamily="34" charset="-120"/>
+              </a:rPr>
+              <a:t>☐ Other (teacher-approved): _____________________________</a:t>
+            </a:r>
+            <a:endParaRPr lang="en-US" sz="1100" dirty="0"/>
+          </a:p>
+        </p:txBody>
+      </p:sp>
+      <p:sp>
+        <p:nvSpPr>
+          <p:cNvPr id="36" name="Text 34"/>
+          <p:cNvSpPr/>
+          <p:nvPr/>
+        </p:nvSpPr>
+        <p:spPr>
+          <a:xfrm>
+            <a:off x="631627" y="7469832"/>
+            <a:ext cx="8086939" cy="174575"/>
+          </a:xfrm>
+          <a:prstGeom prst="rect">
+            <a:avLst/>
+          </a:prstGeom>
+          <a:noFill/>
+          <a:ln/>
+        </p:spPr>
+        <p:txBody>
+          <a:bodyPr wrap="square" lIns="0" tIns="0" rIns="0" bIns="0" rtlCol="0" anchor="t"/>
+          <a:lstStyle/>
+          <a:p>
+            <a:pPr algn="l" indent="0" marL="0">
+              <a:lnSpc>
+                <a:spcPts val="1375"/>
+              </a:lnSpc>
+              <a:buNone/>
+            </a:pPr>
+            <a:r>
+              <a:rPr lang="en-US" sz="1100" dirty="0">
+                <a:solidFill>
+                  <a:srgbClr val="1C2833"/>
+                </a:solidFill>
+                <a:latin typeface="Courier New" pitchFamily="34" charset="0"/>
+                <a:ea typeface="Courier New" pitchFamily="34" charset="-122"/>
+                <a:cs typeface="Courier New" pitchFamily="34" charset="-120"/>
+              </a:rPr>
+              <a:t>7. One thing I will NOT do (because it would be unsafe or unrealistic):</a:t>
+            </a:r>
+            <a:endParaRPr lang="en-US" sz="1100" dirty="0"/>
+          </a:p>
+        </p:txBody>
+      </p:sp>
+      <p:sp>
+        <p:nvSpPr>
+          <p:cNvPr id="37" name="Text 35"/>
+          <p:cNvSpPr/>
+          <p:nvPr/>
+        </p:nvSpPr>
+        <p:spPr>
+          <a:xfrm>
+            <a:off x="631627" y="7644408"/>
+            <a:ext cx="8086939" cy="174575"/>
+          </a:xfrm>
+          <a:prstGeom prst="rect">
+            <a:avLst/>
+          </a:prstGeom>
+          <a:noFill/>
+          <a:ln/>
+        </p:spPr>
+        <p:txBody>
+          <a:bodyPr wrap="square" lIns="0" tIns="0" rIns="0" bIns="0" rtlCol="0" anchor="t"/>
+          <a:lstStyle/>
+          <a:p>
+            <a:pPr algn="l" indent="0" marL="0">
+              <a:lnSpc>
+                <a:spcPts val="1375"/>
+              </a:lnSpc>
+              <a:buNone/>
+            </a:pPr>
+            <a:r>
+              <a:rPr lang="en-US" sz="1100" dirty="0">
+                <a:solidFill>
+                  <a:srgbClr val="1C2833"/>
+                </a:solidFill>
+                <a:latin typeface="Courier New" pitchFamily="34" charset="0"/>
+                <a:ea typeface="Courier New" pitchFamily="34" charset="-122"/>
+                <a:cs typeface="Courier New" pitchFamily="34" charset="-120"/>
+              </a:rPr>
+              <a:t>__________________________________________________________</a:t>
+            </a:r>
+            <a:endParaRPr lang="en-US" sz="1100" dirty="0"/>
+          </a:p>
+        </p:txBody>
+      </p:sp>
+      <p:sp>
+        <p:nvSpPr>
+          <p:cNvPr id="38" name="Text 36"/>
+          <p:cNvSpPr/>
+          <p:nvPr/>
+        </p:nvSpPr>
+        <p:spPr>
+          <a:xfrm>
+            <a:off x="406301" y="8110984"/>
             <a:ext cx="8498026" cy="213271"/>
           </a:xfrm>
           <a:prstGeom prst="rect">
